--- a/presentation/3M_TechCase_Presentation.pptx
+++ b/presentation/3M_TechCase_Presentation.pptx
@@ -17,6 +17,7 @@
     <p:sldId id="265" r:id="rId11"/>
     <p:sldId id="266" r:id="rId12"/>
     <p:sldId id="267" r:id="rId13"/>
+    <p:sldId id="270" r:id="rId21"/>
     <p:sldId id="268" r:id="rId14"/>
     <p:sldId id="269" r:id="rId15"/>
   </p:sldIdLst>
@@ -3410,7 +3411,7 @@
                 <a:ea typeface="Segoe UI" pitchFamily="34" charset="-122"/>
                 <a:cs typeface="Segoe UI" pitchFamily="34" charset="-120"/>
               </a:rPr>
-              <a:t>Now switching to the live report → </a:t>
+              <a:t xml:space="preserve">Now switching to the live report → </a:t>
             </a:r>
             <a:pPr indent="0" marL="0">
               <a:buNone/>
@@ -5703,7 +5704,7 @@
                 <a:ea typeface="Segoe UI Semibold" pitchFamily="34" charset="-122"/>
                 <a:cs typeface="Segoe UI Semibold" pitchFamily="34" charset="-120"/>
               </a:rPr>
-              <a:t>Fare plateau in 2024</a:t>
+              <a:t>Seasonal &amp; weather stress (NOAA)</a:t>
             </a:r>
             <a:endParaRPr lang="en-US" sz="1500" dirty="0"/>
           </a:p>
@@ -5781,7 +5782,7 @@
                 <a:ea typeface="Segoe UI" pitchFamily="34" charset="-122"/>
                 <a:cs typeface="Segoe UI" pitchFamily="34" charset="-120"/>
               </a:rPr>
-              <a:t>Growth via volume, not price — healthy</a:t>
+              <a:t>Capacity planning &amp; disruption readiness</a:t>
             </a:r>
             <a:endParaRPr lang="en-US" sz="1300" dirty="0"/>
           </a:p>
@@ -6200,7 +6201,7 @@
                 <a:ea typeface="Segoe UI" pitchFamily="34" charset="-122"/>
                 <a:cs typeface="Segoe UI" pitchFamily="34" charset="-120"/>
               </a:rPr>
-              <a:t>time-series model per zone/hour</a:t>
+              <a:t>time-series per zone/hour, weather-aware</a:t>
             </a:r>
             <a:endParaRPr lang="en-US" sz="1150" dirty="0"/>
           </a:p>
@@ -6590,6 +6591,638 @@
               <a:t>Nicolas Augusto  ·  github.com/Nicolas-arch/3m-techcase-nyc-tlc</a:t>
             </a:r>
             <a:endParaRPr lang="en-US" sz="1300" dirty="0"/>
+          </a:p>
+        </p:txBody>
+      </p:sp>
+    </p:spTree>
+  </p:cSld>
+  <p:clrMapOvr>
+    <a:masterClrMapping/>
+  </p:clrMapOvr>
+</p:sld>
+</file>
+
+<file path=ppt/slides/slide15.xml><?xml version="1.0" encoding="utf-8"?>
+<p:sld xmlns:a="http://schemas.openxmlformats.org/drawingml/2006/main" xmlns:r="http://schemas.openxmlformats.org/officeDocument/2006/relationships" xmlns:p="http://schemas.openxmlformats.org/presentationml/2006/main">
+  <p:cSld name="Slide 12">
+    <p:bg>
+      <p:bgPr>
+        <a:solidFill>
+          <a:srgbClr val="FFFFFF"/>
+        </a:solidFill>
+      </p:bgPr>
+    </p:bg>
+    <p:spTree>
+      <p:nvGrpSpPr>
+        <p:cNvPr id="1" name=""/>
+        <p:cNvGrpSpPr/>
+        <p:nvPr/>
+      </p:nvGrpSpPr>
+      <p:grpSpPr>
+        <a:xfrm>
+          <a:off x="0" y="0"/>
+          <a:ext cx="0" cy="0"/>
+          <a:chOff x="0" y="0"/>
+          <a:chExt cx="0" cy="0"/>
+        </a:xfrm>
+      </p:grpSpPr>
+      <p:sp>
+        <p:nvSpPr>
+          <p:cNvPr id="2" name="Text 0"/>
+          <p:cNvSpPr/>
+          <p:nvPr/>
+        </p:nvSpPr>
+        <p:spPr>
+          <a:xfrm>
+            <a:off x="548640" y="384048"/>
+            <a:ext cx="11064240" cy="274320"/>
+          </a:xfrm>
+          <a:prstGeom prst="rect">
+            <a:avLst/>
+          </a:prstGeom>
+          <a:noFill/>
+          <a:ln/>
+        </p:spPr>
+        <p:txBody>
+          <a:bodyPr wrap="square" lIns="0" tIns="0" rIns="0" bIns="0" rtlCol="0" anchor="ctr"/>
+          <a:lstStyle/>
+          <a:p>
+            <a:pPr indent="0" marL="0">
+              <a:buNone/>
+            </a:pPr>
+            <a:r>
+              <a:rPr lang="en-US" sz="1250" b="1" spc="200" kern="0" dirty="0">
+                <a:solidFill>
+                  <a:srgbClr val="2E75B6"/>
+                </a:solidFill>
+                <a:latin typeface="Segoe UI" pitchFamily="34" charset="0"/>
+                <a:ea typeface="Segoe UI" pitchFamily="34" charset="-122"/>
+                <a:cs typeface="Segoe UI" pitchFamily="34" charset="-120"/>
+              </a:rPr>
+              <a:t>06 · DASHBOARD</a:t>
+            </a:r>
+            <a:endParaRPr lang="en-US" sz="1250" dirty="0"/>
+          </a:p>
+        </p:txBody>
+      </p:sp>
+      <p:sp>
+        <p:nvSpPr>
+          <p:cNvPr id="3" name="Text 1"/>
+          <p:cNvSpPr/>
+          <p:nvPr/>
+        </p:nvSpPr>
+        <p:spPr>
+          <a:xfrm>
+            <a:off x="548640" y="640080"/>
+            <a:ext cx="11064240" cy="640080"/>
+          </a:xfrm>
+          <a:prstGeom prst="rect">
+            <a:avLst/>
+          </a:prstGeom>
+          <a:noFill/>
+          <a:ln/>
+        </p:spPr>
+        <p:txBody>
+          <a:bodyPr wrap="square" lIns="0" tIns="0" rIns="0" bIns="0" rtlCol="0" anchor="ctr"/>
+          <a:lstStyle/>
+          <a:p>
+            <a:pPr indent="0" marL="0">
+              <a:buNone/>
+            </a:pPr>
+            <a:r>
+              <a:rPr lang="en-US" sz="2900" b="1" dirty="0">
+                <a:solidFill>
+                  <a:srgbClr val="1F3864"/>
+                </a:solidFill>
+                <a:latin typeface="Segoe UI Semibold" pitchFamily="34" charset="0"/>
+                <a:ea typeface="Segoe UI Semibold" pitchFamily="34" charset="-122"/>
+                <a:cs typeface="Segoe UI Semibold" pitchFamily="34" charset="-120"/>
+              </a:rPr>
+              <a:t>Weather &amp; Operational Risk</a:t>
+            </a:r>
+            <a:endParaRPr lang="en-US" sz="2900" dirty="0"/>
+          </a:p>
+        </p:txBody>
+      </p:sp>
+      <p:sp>
+        <p:nvSpPr>
+          <p:cNvPr id="4" name="Shape 2"/>
+          <p:cNvSpPr/>
+          <p:nvPr/>
+        </p:nvSpPr>
+        <p:spPr>
+          <a:xfrm>
+            <a:off x="548640" y="1691640"/>
+            <a:ext cx="5486400" cy="4023360"/>
+          </a:xfrm>
+          <a:prstGeom prst="rect">
+            <a:avLst/>
+          </a:prstGeom>
+          <a:solidFill>
+            <a:srgbClr val="FFFFFF"/>
+          </a:solidFill>
+          <a:ln w="12700">
+            <a:solidFill>
+              <a:srgbClr val="E0E0E0"/>
+            </a:solidFill>
+            <a:prstDash val="solid"/>
+          </a:ln>
+          <a:effectLst>
+            <a:outerShdw sx="100000" sy="100000" kx="0" ky="0" algn="bl" rotWithShape="0" blurRad="101600" dist="38100" dir="8100000">
+              <a:srgbClr val="1F3864">
+                <a:alpha val="16000"/>
+              </a:srgbClr>
+            </a:outerShdw>
+          </a:effectLst>
+        </p:spPr>
+      </p:sp>
+      <p:sp>
+        <p:nvSpPr>
+          <p:cNvPr id="5" name="Shape 3"/>
+          <p:cNvSpPr/>
+          <p:nvPr/>
+        </p:nvSpPr>
+        <p:spPr>
+          <a:xfrm>
+            <a:off x="548640" y="1691640"/>
+            <a:ext cx="82296" cy="4023360"/>
+          </a:xfrm>
+          <a:prstGeom prst="rect">
+            <a:avLst/>
+          </a:prstGeom>
+          <a:solidFill>
+            <a:srgbClr val="2E75B6"/>
+          </a:solidFill>
+          <a:ln/>
+        </p:spPr>
+      </p:sp>
+      <p:sp>
+        <p:nvSpPr>
+          <p:cNvPr id="6" name="Text 4"/>
+          <p:cNvSpPr/>
+          <p:nvPr/>
+        </p:nvSpPr>
+        <p:spPr>
+          <a:xfrm>
+            <a:off x="777240" y="1837944"/>
+            <a:ext cx="5120640" cy="320040"/>
+          </a:xfrm>
+          <a:prstGeom prst="rect">
+            <a:avLst/>
+          </a:prstGeom>
+          <a:noFill/>
+          <a:ln/>
+        </p:spPr>
+        <p:txBody>
+          <a:bodyPr wrap="square" lIns="0" tIns="0" rIns="0" bIns="0" rtlCol="0" anchor="ctr"/>
+          <a:lstStyle/>
+          <a:p>
+            <a:pPr indent="0" marL="0">
+              <a:buNone/>
+            </a:pPr>
+            <a:r>
+              <a:rPr lang="en-US" sz="1450" b="1" dirty="0">
+                <a:solidFill>
+                  <a:srgbClr val="1F3864"/>
+                </a:solidFill>
+                <a:latin typeface="Segoe UI Semibold" pitchFamily="34" charset="0"/>
+                <a:ea typeface="Segoe UI Semibold" pitchFamily="34" charset="-122"/>
+                <a:cs typeface="Segoe UI Semibold" pitchFamily="34" charset="-120"/>
+              </a:rPr>
+              <a:t>Page 6 — Seasonality (NOAA)</a:t>
+            </a:r>
+            <a:endParaRPr lang="en-US" sz="1450" dirty="0"/>
+          </a:p>
+        </p:txBody>
+      </p:sp>
+      <p:sp>
+        <p:nvSpPr>
+          <p:cNvPr id="7" name="Text 5"/>
+          <p:cNvSpPr/>
+          <p:nvPr/>
+        </p:nvSpPr>
+        <p:spPr>
+          <a:xfrm>
+            <a:off x="777240" y="2203704"/>
+            <a:ext cx="5120640" cy="3383280"/>
+          </a:xfrm>
+          <a:prstGeom prst="rect">
+            <a:avLst/>
+          </a:prstGeom>
+          <a:noFill/>
+          <a:ln/>
+        </p:spPr>
+        <p:txBody>
+          <a:bodyPr wrap="square" lIns="0" tIns="0" rIns="0" bIns="0" rtlCol="0" anchor="t"/>
+          <a:lstStyle/>
+          <a:p>
+            <a:pPr indent="0" marL="0">
+              <a:buNone/>
+            </a:pPr>
+            <a:r>
+              <a:rPr lang="en-US" sz="1200" dirty="0">
+                <a:solidFill>
+                  <a:srgbClr val="595959"/>
+                </a:solidFill>
+                <a:latin typeface="Segoe UI" pitchFamily="34" charset="0"/>
+                <a:ea typeface="Segoe UI" pitchFamily="34" charset="-122"/>
+                <a:cs typeface="Segoe UI" pitchFamily="34" charset="-120"/>
+              </a:rPr>
+              <a:t>The 2nd external source: NOAA weather joined onto dim_date.</a:t>
+            </a:r>
+            <a:endParaRPr lang="en-US" sz="1200" dirty="0"/>
+          </a:p>
+          <a:p>
+            <a:pPr indent="0" marL="0">
+              <a:buNone/>
+            </a:pPr>
+            <a:endParaRPr lang="en-US" sz="1200" dirty="0"/>
+          </a:p>
+          <a:p>
+            <a:pPr indent="0" marL="0">
+              <a:buNone/>
+            </a:pPr>
+            <a:r>
+              <a:rPr lang="en-US" sz="1200" dirty="0">
+                <a:solidFill>
+                  <a:srgbClr val="595959"/>
+                </a:solidFill>
+                <a:latin typeface="Segoe UI" pitchFamily="34" charset="0"/>
+                <a:ea typeface="Segoe UI" pitchFamily="34" charset="-122"/>
+                <a:cs typeface="Segoe UI" pitchFamily="34" charset="-120"/>
+              </a:rPr>
+              <a:t>• Fall is the stress season: 2nd-highest volume (109k trips/day) with the worst lead time (18.46 min).</a:t>
+            </a:r>
+            <a:endParaRPr lang="en-US" sz="1200" dirty="0"/>
+          </a:p>
+          <a:p>
+            <a:pPr indent="0" marL="0">
+              <a:buNone/>
+            </a:pPr>
+            <a:endParaRPr lang="en-US" sz="1200" dirty="0"/>
+          </a:p>
+          <a:p>
+            <a:pPr indent="0" marL="0">
+              <a:buNone/>
+            </a:pPr>
+            <a:r>
+              <a:rPr lang="en-US" sz="1200" dirty="0">
+                <a:solidFill>
+                  <a:srgbClr val="595959"/>
+                </a:solidFill>
+                <a:latin typeface="Segoe UI" pitchFamily="34" charset="0"/>
+                <a:ea typeface="Segoe UI" pitchFamily="34" charset="-122"/>
+                <a:cs typeface="Segoe UI" pitchFamily="34" charset="-120"/>
+              </a:rPr>
+              <a:t>• +1.71 min vs the winter baseline — high volume × slow cycle = peak cost-to-serve.</a:t>
+            </a:r>
+            <a:endParaRPr lang="en-US" sz="1200" dirty="0"/>
+          </a:p>
+          <a:p>
+            <a:pPr indent="0" marL="0">
+              <a:buNone/>
+            </a:pPr>
+            <a:endParaRPr lang="en-US" sz="1200" dirty="0"/>
+          </a:p>
+          <a:p>
+            <a:pPr indent="0" marL="0">
+              <a:buNone/>
+            </a:pPr>
+            <a:r>
+              <a:rPr lang="en-US" sz="1200" dirty="0">
+                <a:solidFill>
+                  <a:srgbClr val="595959"/>
+                </a:solidFill>
+                <a:latin typeface="Segoe UI" pitchFamily="34" charset="0"/>
+                <a:ea typeface="Segoe UI" pitchFamily="34" charset="-122"/>
+                <a:cs typeface="Segoe UI" pitchFamily="34" charset="-120"/>
+              </a:rPr>
+              <a:t>• Spring is the true volume peak (113k trips/day) but operationally efficient (17.44 min).</a:t>
+            </a:r>
+            <a:endParaRPr lang="en-US" sz="1200" dirty="0"/>
+          </a:p>
+          <a:p>
+            <a:pPr indent="0" marL="0">
+              <a:buNone/>
+            </a:pPr>
+            <a:endParaRPr lang="en-US" sz="1200" dirty="0"/>
+          </a:p>
+          <a:p>
+            <a:pPr indent="0" marL="0">
+              <a:buNone/>
+            </a:pPr>
+            <a:r>
+              <a:rPr lang="en-US" sz="1200" dirty="0">
+                <a:solidFill>
+                  <a:srgbClr val="595959"/>
+                </a:solidFill>
+                <a:latin typeface="Segoe UI" pitchFamily="34" charset="0"/>
+                <a:ea typeface="Segoe UI" pitchFamily="34" charset="-122"/>
+                <a:cs typeface="Segoe UI" pitchFamily="34" charset="-120"/>
+              </a:rPr>
+              <a:t>• Winter = low demand + fastest cycle (16.75 min) → maintenance &amp; capacity window.</a:t>
+            </a:r>
+            <a:endParaRPr lang="en-US" sz="1200" dirty="0"/>
+          </a:p>
+        </p:txBody>
+      </p:sp>
+      <p:sp>
+        <p:nvSpPr>
+          <p:cNvPr id="8" name="Shape 6"/>
+          <p:cNvSpPr/>
+          <p:nvPr/>
+        </p:nvSpPr>
+        <p:spPr>
+          <a:xfrm>
+            <a:off x="6309360" y="1691640"/>
+            <a:ext cx="5303520" cy="4023360"/>
+          </a:xfrm>
+          <a:prstGeom prst="rect">
+            <a:avLst/>
+          </a:prstGeom>
+          <a:solidFill>
+            <a:srgbClr val="FFFFFF"/>
+          </a:solidFill>
+          <a:ln w="12700">
+            <a:solidFill>
+              <a:srgbClr val="E0E0E0"/>
+            </a:solidFill>
+            <a:prstDash val="solid"/>
+          </a:ln>
+          <a:effectLst>
+            <a:outerShdw sx="100000" sy="100000" kx="0" ky="0" algn="bl" rotWithShape="0" blurRad="101600" dist="38100" dir="8100000">
+              <a:srgbClr val="1F3864">
+                <a:alpha val="16000"/>
+              </a:srgbClr>
+            </a:outerShdw>
+          </a:effectLst>
+        </p:spPr>
+      </p:sp>
+      <p:sp>
+        <p:nvSpPr>
+          <p:cNvPr id="9" name="Shape 7"/>
+          <p:cNvSpPr/>
+          <p:nvPr/>
+        </p:nvSpPr>
+        <p:spPr>
+          <a:xfrm>
+            <a:off x="6309360" y="1691640"/>
+            <a:ext cx="82296" cy="4023360"/>
+          </a:xfrm>
+          <a:prstGeom prst="rect">
+            <a:avLst/>
+          </a:prstGeom>
+          <a:solidFill>
+            <a:srgbClr val="22A06B"/>
+          </a:solidFill>
+          <a:ln/>
+        </p:spPr>
+      </p:sp>
+      <p:sp>
+        <p:nvSpPr>
+          <p:cNvPr id="10" name="Text 8"/>
+          <p:cNvSpPr/>
+          <p:nvPr/>
+        </p:nvSpPr>
+        <p:spPr>
+          <a:xfrm>
+            <a:off x="6537960" y="1837944"/>
+            <a:ext cx="4937760" cy="320040"/>
+          </a:xfrm>
+          <a:prstGeom prst="rect">
+            <a:avLst/>
+          </a:prstGeom>
+          <a:noFill/>
+          <a:ln/>
+        </p:spPr>
+        <p:txBody>
+          <a:bodyPr wrap="square" lIns="0" tIns="0" rIns="0" bIns="0" rtlCol="0" anchor="ctr"/>
+          <a:lstStyle/>
+          <a:p>
+            <a:pPr indent="0" marL="0">
+              <a:buNone/>
+            </a:pPr>
+            <a:r>
+              <a:rPr lang="en-US" sz="1450" b="1" dirty="0">
+                <a:solidFill>
+                  <a:srgbClr val="1F3864"/>
+                </a:solidFill>
+                <a:latin typeface="Segoe UI Semibold" pitchFamily="34" charset="0"/>
+                <a:ea typeface="Segoe UI Semibold" pitchFamily="34" charset="-122"/>
+                <a:cs typeface="Segoe UI Semibold" pitchFamily="34" charset="-120"/>
+              </a:rPr>
+              <a:t>Page 6 — Extreme weather</a:t>
+            </a:r>
+            <a:endParaRPr lang="en-US" sz="1450" dirty="0"/>
+          </a:p>
+        </p:txBody>
+      </p:sp>
+      <p:sp>
+        <p:nvSpPr>
+          <p:cNvPr id="11" name="Text 9"/>
+          <p:cNvSpPr/>
+          <p:nvPr/>
+        </p:nvSpPr>
+        <p:spPr>
+          <a:xfrm>
+            <a:off x="6537960" y="2203704"/>
+            <a:ext cx="4937760" cy="3383280"/>
+          </a:xfrm>
+          <a:prstGeom prst="rect">
+            <a:avLst/>
+          </a:prstGeom>
+          <a:noFill/>
+          <a:ln/>
+        </p:spPr>
+        <p:txBody>
+          <a:bodyPr wrap="square" lIns="0" tIns="0" rIns="0" bIns="0" rtlCol="0" anchor="t"/>
+          <a:lstStyle/>
+          <a:p>
+            <a:pPr indent="0" marL="0">
+              <a:buNone/>
+            </a:pPr>
+            <a:r>
+              <a:rPr lang="en-US" sz="1200" dirty="0">
+                <a:solidFill>
+                  <a:srgbClr val="595959"/>
+                </a:solidFill>
+                <a:latin typeface="Segoe UI" pitchFamily="34" charset="0"/>
+                <a:ea typeface="Segoe UI" pitchFamily="34" charset="-122"/>
+                <a:cs typeface="Segoe UI" pitchFamily="34" charset="-120"/>
+              </a:rPr>
+              <a:t>Do external shocks change the operation?</a:t>
+            </a:r>
+            <a:endParaRPr lang="en-US" sz="1200" dirty="0"/>
+          </a:p>
+          <a:p>
+            <a:pPr indent="0" marL="0">
+              <a:buNone/>
+            </a:pPr>
+            <a:endParaRPr lang="en-US" sz="1200" dirty="0"/>
+          </a:p>
+          <a:p>
+            <a:pPr indent="0" marL="0">
+              <a:buNone/>
+            </a:pPr>
+            <a:r>
+              <a:rPr lang="en-US" sz="1200" dirty="0">
+                <a:solidFill>
+                  <a:srgbClr val="595959"/>
+                </a:solidFill>
+                <a:latin typeface="Segoe UI" pitchFamily="34" charset="0"/>
+                <a:ea typeface="Segoe UI" pitchFamily="34" charset="-122"/>
+                <a:cs typeface="Segoe UI" pitchFamily="34" charset="-120"/>
+              </a:rPr>
+              <a:t>• Only 4 extreme days in 1,096 — but demand drops 36% (106k → 68k trips/day).</a:t>
+            </a:r>
+            <a:endParaRPr lang="en-US" sz="1200" dirty="0"/>
+          </a:p>
+          <a:p>
+            <a:pPr indent="0" marL="0">
+              <a:buNone/>
+            </a:pPr>
+            <a:endParaRPr lang="en-US" sz="1200" dirty="0"/>
+          </a:p>
+          <a:p>
+            <a:pPr indent="0" marL="0">
+              <a:buNone/>
+            </a:pPr>
+            <a:r>
+              <a:rPr lang="en-US" sz="1200" dirty="0">
+                <a:solidFill>
+                  <a:srgbClr val="595959"/>
+                </a:solidFill>
+                <a:latin typeface="Segoe UI" pitchFamily="34" charset="0"/>
+                <a:ea typeface="Segoe UI" pitchFamily="34" charset="-122"/>
+                <a:cs typeface="Segoe UI" pitchFamily="34" charset="-120"/>
+              </a:rPr>
+              <a:t>• Counter-intuitively, lead time gets ~3.8 min faster and the average fare falls.</a:t>
+            </a:r>
+            <a:endParaRPr lang="en-US" sz="1200" dirty="0"/>
+          </a:p>
+          <a:p>
+            <a:pPr indent="0" marL="0">
+              <a:buNone/>
+            </a:pPr>
+            <a:endParaRPr lang="en-US" sz="1200" dirty="0"/>
+          </a:p>
+          <a:p>
+            <a:pPr indent="0" marL="0">
+              <a:buNone/>
+            </a:pPr>
+            <a:r>
+              <a:rPr lang="en-US" sz="1200" dirty="0">
+                <a:solidFill>
+                  <a:srgbClr val="595959"/>
+                </a:solidFill>
+                <a:latin typeface="Segoe UI" pitchFamily="34" charset="0"/>
+                <a:ea typeface="Segoe UI" pitchFamily="34" charset="-122"/>
+                <a:cs typeface="Segoe UI" pitchFamily="34" charset="-120"/>
+              </a:rPr>
+              <a:t>• Demand self-selection: only the essential trips remain, and with less traffic the cycle shortens.</a:t>
+            </a:r>
+            <a:endParaRPr lang="en-US" sz="1200" dirty="0"/>
+          </a:p>
+          <a:p>
+            <a:pPr indent="0" marL="0">
+              <a:buNone/>
+            </a:pPr>
+            <a:endParaRPr lang="en-US" sz="1200" dirty="0"/>
+          </a:p>
+          <a:p>
+            <a:pPr indent="0" marL="0">
+              <a:buNone/>
+            </a:pPr>
+            <a:r>
+              <a:rPr lang="en-US" sz="1200" dirty="0">
+                <a:solidFill>
+                  <a:srgbClr val="595959"/>
+                </a:solidFill>
+                <a:latin typeface="Segoe UI" pitchFamily="34" charset="0"/>
+                <a:ea typeface="Segoe UI" pitchFamily="34" charset="-122"/>
+                <a:cs typeface="Segoe UI" pitchFamily="34" charset="-120"/>
+              </a:rPr>
+              <a:t>Supply-chain parallel: a disruption that cuts volume but reshapes the network.</a:t>
+            </a:r>
+            <a:endParaRPr lang="en-US" sz="1200" dirty="0"/>
+          </a:p>
+        </p:txBody>
+      </p:sp>
+      <p:sp>
+        <p:nvSpPr>
+          <p:cNvPr id="12" name="Text 10"/>
+          <p:cNvSpPr/>
+          <p:nvPr/>
+        </p:nvSpPr>
+        <p:spPr>
+          <a:xfrm>
+            <a:off x="548640" y="6455664"/>
+            <a:ext cx="7315200" cy="274320"/>
+          </a:xfrm>
+          <a:prstGeom prst="rect">
+            <a:avLst/>
+          </a:prstGeom>
+          <a:noFill/>
+          <a:ln/>
+        </p:spPr>
+        <p:txBody>
+          <a:bodyPr wrap="square" lIns="0" tIns="0" rIns="0" bIns="0" rtlCol="0" anchor="ctr"/>
+          <a:lstStyle/>
+          <a:p>
+            <a:pPr indent="0" marL="0">
+              <a:buNone/>
+            </a:pPr>
+            <a:r>
+              <a:rPr lang="en-US" sz="900" dirty="0">
+                <a:solidFill>
+                  <a:srgbClr val="808080"/>
+                </a:solidFill>
+                <a:latin typeface="Segoe UI" pitchFamily="34" charset="0"/>
+                <a:ea typeface="Segoe UI" pitchFamily="34" charset="-122"/>
+                <a:cs typeface="Segoe UI" pitchFamily="34" charset="-120"/>
+              </a:rPr>
+              <a:t>NYC TLC Yellow Taxi  ·  3M Technical Case</a:t>
+            </a:r>
+            <a:endParaRPr lang="en-US" sz="900" dirty="0"/>
+          </a:p>
+        </p:txBody>
+      </p:sp>
+      <p:sp>
+        <p:nvSpPr>
+          <p:cNvPr id="13" name="Text 11"/>
+          <p:cNvSpPr/>
+          <p:nvPr/>
+        </p:nvSpPr>
+        <p:spPr>
+          <a:xfrm>
+            <a:off x="11430000" y="6455664"/>
+            <a:ext cx="365760" cy="274320"/>
+          </a:xfrm>
+          <a:prstGeom prst="rect">
+            <a:avLst/>
+          </a:prstGeom>
+          <a:noFill/>
+          <a:ln/>
+        </p:spPr>
+        <p:txBody>
+          <a:bodyPr wrap="square" lIns="0" tIns="0" rIns="0" bIns="0" rtlCol="0" anchor="ctr"/>
+          <a:lstStyle/>
+          <a:p>
+            <a:pPr algn="r" indent="0" marL="0">
+              <a:buNone/>
+            </a:pPr>
+            <a:r>
+              <a:rPr lang="en-US" sz="900" dirty="0">
+                <a:solidFill>
+                  <a:srgbClr val="808080"/>
+                </a:solidFill>
+                <a:latin typeface="Segoe UI" pitchFamily="34" charset="0"/>
+                <a:ea typeface="Segoe UI" pitchFamily="34" charset="-122"/>
+                <a:cs typeface="Segoe UI" pitchFamily="34" charset="-120"/>
+              </a:rPr>
+              <a:t>13</a:t>
+            </a:r>
+            <a:endParaRPr lang="en-US" sz="900" dirty="0"/>
           </a:p>
         </p:txBody>
       </p:sp>
@@ -9025,7 +9658,7 @@
                 <a:ea typeface="Segoe UI" pitchFamily="34" charset="-122"/>
                 <a:cs typeface="Segoe UI" pitchFamily="34" charset="-120"/>
               </a:rPr>
-              <a:t>Medallion architecture  </a:t>
+              <a:t xml:space="preserve">Medallion architecture  </a:t>
             </a:r>
             <a:pPr indent="0" marL="0">
               <a:buNone/>
@@ -9078,7 +9711,7 @@
                 <a:ea typeface="Segoe UI" pitchFamily="34" charset="-122"/>
                 <a:cs typeface="Segoe UI" pitchFamily="34" charset="-120"/>
               </a:rPr>
-              <a:t>The 5 pipeline blocks the briefing asked to discuss: </a:t>
+              <a:t xml:space="preserve">The 5 pipeline blocks the briefing asked to discuss: </a:t>
             </a:r>
             <a:pPr indent="0" marL="0">
               <a:buNone/>

--- a/presentation/3M_TechCase_Presentation.pptx
+++ b/presentation/3M_TechCase_Presentation.pptx
@@ -4,6 +4,9 @@
   <p:sldMasterIdLst>
     <p:sldMasterId id="2147483648" r:id="rId1"/>
   </p:sldMasterIdLst>
+  <p:notesMasterIdLst>
+    <p:notesMasterId r:id="rId17"/>
+  </p:notesMasterIdLst>
   <p:sldIdLst>
     <p:sldId id="256" r:id="rId2"/>
     <p:sldId id="257" r:id="rId3"/>
@@ -17,15 +20,12 @@
     <p:sldId id="265" r:id="rId11"/>
     <p:sldId id="266" r:id="rId12"/>
     <p:sldId id="267" r:id="rId13"/>
-    <p:sldId id="270" r:id="rId21"/>
-    <p:sldId id="268" r:id="rId14"/>
-    <p:sldId id="269" r:id="rId15"/>
+    <p:sldId id="270" r:id="rId14"/>
+    <p:sldId id="268" r:id="rId15"/>
+    <p:sldId id="269" r:id="rId16"/>
   </p:sldIdLst>
-  <p:notesMasterIdLst>
-    <p:notesMasterId r:id="rId16"/>
-  </p:notesMasterIdLst>
-  <p:sldSz cx="12191695" cy="6858000"/>
-  <p:notesSz cx="6858000" cy="12191695"/>
+  <p:sldSz cx="12192000" cy="6858000"/>
+  <p:notesSz cx="6858000" cy="12192000"/>
   <p:defaultTextStyle>
     <a:lvl1pPr marL="0" algn="l" defTabSz="914400" rtl="0" eaLnBrk="1" latinLnBrk="0" hangingPunct="1">
       <a:defRPr sz="1800" kern="1200">
@@ -118,6 +118,11 @@
       </a:defRPr>
     </a:lvl9pPr>
   </p:defaultTextStyle>
+  <p:extLst>
+    <p:ext uri="{EFAFB233-063F-42B5-8137-9DF3F51BA10A}">
+      <p15:sldGuideLst xmlns:p15="http://schemas.microsoft.com/office/powerpoint/2012/main"/>
+    </p:ext>
+  </p:extLst>
 </p:presentation>
 </file>
 
@@ -143,234 +148,10 @@
           <a:chExt cx="0" cy="0"/>
         </a:xfrm>
       </p:grpSpPr>
-      <p:sp>
-        <p:nvSpPr>
-          <p:cNvPr id="2" name="Header Placeholder 1"/>
-          <p:cNvSpPr>
-            <a:spLocks noGrp="1"/>
-          </p:cNvSpPr>
-          <p:nvPr>
-            <p:ph type="hdr" sz="quarter"/>
-          </p:nvPr>
-        </p:nvSpPr>
-        <p:spPr>
-          <a:xfrm>
-            <a:off x="0" y="0"/>
-            <a:ext cx="2971800" cy="458788"/>
-          </a:xfrm>
-          <a:prstGeom prst="rect">
-            <a:avLst/>
-          </a:prstGeom>
-        </p:spPr>
-        <p:txBody>
-          <a:bodyPr vert="horz" lIns="91440" tIns="45720" rIns="91440" bIns="45720" rtlCol="0"/>
-          <a:lstStyle>
-            <a:lvl1pPr algn="l">
-              <a:defRPr sz="1200"/>
-            </a:lvl1pPr>
-          </a:lstStyle>
-          <a:p>
-            <a:endParaRPr lang="en-US"/>
-          </a:p>
-        </p:txBody>
-      </p:sp>
-      <p:sp>
-        <p:nvSpPr>
-          <p:cNvPr id="3" name="Date Placeholder 2"/>
-          <p:cNvSpPr>
-            <a:spLocks noGrp="1"/>
-          </p:cNvSpPr>
-          <p:nvPr>
-            <p:ph type="dt" idx="1"/>
-          </p:nvPr>
-        </p:nvSpPr>
-        <p:spPr>
-          <a:xfrm>
-            <a:off x="3884613" y="0"/>
-            <a:ext cx="2971800" cy="458788"/>
-          </a:xfrm>
-          <a:prstGeom prst="rect">
-            <a:avLst/>
-          </a:prstGeom>
-        </p:spPr>
-        <p:txBody>
-          <a:bodyPr vert="horz" lIns="91440" tIns="45720" rIns="91440" bIns="45720" rtlCol="0"/>
-          <a:lstStyle>
-            <a:lvl1pPr algn="r">
-              <a:defRPr sz="1200"/>
-            </a:lvl1pPr>
-          </a:lstStyle>
-          <a:p>
-            <a:fld id="{5282F153-3F37-0F45-9E97-73ACFA13230C}" type="datetimeFigureOut">
-              <a:rPr lang="en-US"/>
-              <a:t>7/23/19</a:t>
-            </a:fld>
-            <a:endParaRPr lang="en-US"/>
-          </a:p>
-        </p:txBody>
-      </p:sp>
-      <p:sp>
-        <p:nvSpPr>
-          <p:cNvPr id="4" name="Slide Image Placeholder 3"/>
-          <p:cNvSpPr>
-            <a:spLocks noGrp="1" noRot="1" noChangeAspect="1"/>
-          </p:cNvSpPr>
-          <p:nvPr>
-            <p:ph type="sldImg" idx="2"/>
-          </p:nvPr>
-        </p:nvSpPr>
-        <p:spPr>
-          <a:xfrm>
-            <a:off x="685800" y="1143000"/>
-            <a:ext cx="5486400" cy="3086100"/>
-          </a:xfrm>
-          <a:prstGeom prst="rect">
-            <a:avLst/>
-          </a:prstGeom>
-          <a:noFill/>
-          <a:ln w="12700">
-            <a:solidFill>
-              <a:prstClr val="black"/>
-            </a:solidFill>
-          </a:ln>
-        </p:spPr>
-        <p:txBody>
-          <a:bodyPr vert="horz" lIns="91440" tIns="45720" rIns="91440" bIns="45720" rtlCol="0" anchor="ctr"/>
-          <a:lstStyle/>
-          <a:p>
-            <a:endParaRPr lang="en-US"/>
-          </a:p>
-        </p:txBody>
-      </p:sp>
-      <p:sp>
-        <p:nvSpPr>
-          <p:cNvPr id="5" name="Notes Placeholder 4"/>
-          <p:cNvSpPr>
-            <a:spLocks noGrp="1"/>
-          </p:cNvSpPr>
-          <p:nvPr>
-            <p:ph type="body" sz="quarter" idx="3"/>
-          </p:nvPr>
-        </p:nvSpPr>
-        <p:spPr>
-          <a:xfrm>
-            <a:off x="685800" y="4400550"/>
-            <a:ext cx="5486400" cy="3600450"/>
-          </a:xfrm>
-          <a:prstGeom prst="rect">
-            <a:avLst/>
-          </a:prstGeom>
-        </p:spPr>
-        <p:txBody>
-          <a:bodyPr vert="horz" lIns="91440" tIns="45720" rIns="91440" bIns="45720" rtlCol="0"/>
-          <a:lstStyle/>
-          <a:p>
-            <a:pPr lvl="0"/>
-            <a:r>
-              <a:rPr lang="en-US"/>
-              <a:t>Click to edit Master text styles</a:t>
-            </a:r>
-          </a:p>
-          <a:p>
-            <a:pPr lvl="1"/>
-            <a:r>
-              <a:rPr lang="en-US"/>
-              <a:t>Second level</a:t>
-            </a:r>
-          </a:p>
-          <a:p>
-            <a:pPr lvl="2"/>
-            <a:r>
-              <a:rPr lang="en-US"/>
-              <a:t>Third level</a:t>
-            </a:r>
-          </a:p>
-          <a:p>
-            <a:pPr lvl="3"/>
-            <a:r>
-              <a:rPr lang="en-US"/>
-              <a:t>Fourth level</a:t>
-            </a:r>
-          </a:p>
-          <a:p>
-            <a:pPr lvl="4"/>
-            <a:r>
-              <a:rPr lang="en-US"/>
-              <a:t>Fifth level</a:t>
-            </a:r>
-          </a:p>
-        </p:txBody>
-      </p:sp>
-      <p:sp>
-        <p:nvSpPr>
-          <p:cNvPr id="6" name="Footer Placeholder 5"/>
-          <p:cNvSpPr>
-            <a:spLocks noGrp="1"/>
-          </p:cNvSpPr>
-          <p:nvPr>
-            <p:ph type="ftr" sz="quarter" idx="4"/>
-          </p:nvPr>
-        </p:nvSpPr>
-        <p:spPr>
-          <a:xfrm>
-            <a:off x="0" y="8685213"/>
-            <a:ext cx="2971800" cy="458787"/>
-          </a:xfrm>
-          <a:prstGeom prst="rect">
-            <a:avLst/>
-          </a:prstGeom>
-        </p:spPr>
-        <p:txBody>
-          <a:bodyPr vert="horz" lIns="91440" tIns="45720" rIns="91440" bIns="45720" rtlCol="0" anchor="b"/>
-          <a:lstStyle>
-            <a:lvl1pPr algn="l">
-              <a:defRPr sz="1200"/>
-            </a:lvl1pPr>
-          </a:lstStyle>
-          <a:p>
-            <a:endParaRPr lang="en-US"/>
-          </a:p>
-        </p:txBody>
-      </p:sp>
-      <p:sp>
-        <p:nvSpPr>
-          <p:cNvPr id="7" name="Slide Number Placeholder 6"/>
-          <p:cNvSpPr>
-            <a:spLocks noGrp="1"/>
-          </p:cNvSpPr>
-          <p:nvPr>
-            <p:ph type="sldNum" sz="quarter" idx="5"/>
-          </p:nvPr>
-        </p:nvSpPr>
-        <p:spPr>
-          <a:xfrm>
-            <a:off x="3884613" y="8685213"/>
-            <a:ext cx="2971800" cy="458787"/>
-          </a:xfrm>
-          <a:prstGeom prst="rect">
-            <a:avLst/>
-          </a:prstGeom>
-        </p:spPr>
-        <p:txBody>
-          <a:bodyPr vert="horz" lIns="91440" tIns="45720" rIns="91440" bIns="45720" rtlCol="0" anchor="b"/>
-          <a:lstStyle>
-            <a:lvl1pPr algn="r">
-              <a:defRPr sz="1200"/>
-            </a:lvl1pPr>
-          </a:lstStyle>
-          <a:p>
-            <a:fld id="{CE5E9CC1-C706-0F49-92D6-E571CC5EEA8F}" type="slidenum">
-              <a:rPr lang="en-US"/>
-              <a:t>‹#›</a:t>
-            </a:fld>
-            <a:endParaRPr lang="en-US"/>
-          </a:p>
-        </p:txBody>
-      </p:sp>
     </p:spTree>
     <p:extLst>
       <p:ext uri="{BB962C8B-B14F-4D97-AF65-F5344CB8AC3E}">
-        <p14:creationId xmlns:p14="http://schemas.microsoft.com/office/powerpoint/2010/main" val="1024086991"/>
+        <p14:creationId xmlns:p14="http://schemas.microsoft.com/office/powerpoint/2010/main" val="2457864037"/>
       </p:ext>
     </p:extLst>
   </p:cSld>
@@ -518,7 +299,6 @@
               <a:rPr lang="en-US" dirty="0"/>
               <a:t>Abertura (~30s). Tese em uma frase: tratei os dados de táxi de NYC como uma cadeia de suprimentos urbana. O briefing não deu problema formal, então escolhi essa lente porque conecta direto com o time de Enterprise Supply Chain da 3M. Pipeline end-to-end na mesma stack da 3M (Fabric + Power BI), 119M de viagens, 5 telas, os 6 features obrigatórios.</a:t>
             </a:r>
-            <a:endParaRPr lang="en-US" dirty="0"/>
           </a:p>
         </p:txBody>
       </p:sp>
@@ -606,7 +386,6 @@
               <a:rPr lang="en-US" dirty="0"/>
               <a:t>(~30s + DEMO) Aqui eu troco pro Power BI ao vivo. A Página 1 entrega o negócio inteiro em 10 segundos: 3,06 bilhões de receita, +5,7% YoY, lead time previsível de 17,6 min, anomalia saudável de 0,16%. Mostrar os filtros Year/Month/Time View e comentar que o RLS roda por baixo. Demo ~4-5 min navegando as 5 telas.</a:t>
             </a:r>
-            <a:endParaRPr lang="en-US" dirty="0"/>
           </a:p>
         </p:txBody>
       </p:sp>
@@ -694,7 +473,6 @@
               <a:rPr lang="en-US" dirty="0"/>
               <a:t>(~60s) Página 2, demanda: o heat map mostra dois regimes — rush de fim de tarde nos dias úteis e madrugada de fim de semana. 31% da demanda em 4 horas do dia. Página 3, operações: 78% das viagens em 5-30 min, lead time muito consistente — ouro pra forecast. Composição do custo aberta, e o choque tarifário de 2023. UDF rodando ao vivo no KPI de custo por milha.</a:t>
             </a:r>
-            <a:endParaRPr lang="en-US" dirty="0"/>
           </a:p>
         </p:txBody>
       </p:sp>
@@ -782,7 +560,6 @@
               <a:rPr lang="en-US" dirty="0"/>
               <a:t>(~60s) Página 4, a peça obrigatória da fonte externa: Manhattan over-served 4 vezes, Brooklyn sub-servido (oportunidade). Correlação 0,43 — demanda puxada por negócios e turismo, não pela renda do morador. Página 5, governança: 97,16% retido com cada descarte rastreável, anomalia por borough, e o RLS com 6 roles — cada gerente só vê o seu borough. Fecha o 6º feature.</a:t>
             </a:r>
-            <a:endParaRPr lang="en-US" dirty="0"/>
           </a:p>
         </p:txBody>
       </p:sp>
@@ -870,7 +647,6 @@
               <a:rPr lang="en-US" dirty="0"/>
               <a:t>(~60s) O fecho de negócio. Cada achado vira uma decisão de supply chain: lead time estável habilita forecast confiável e menos safety stock; concentração de demanda orienta network design; boroughs sub-servidos = onde expandir; dois perfis de anomalia pedem exception management diferente; e o platô tarifário mostra crescimento por volume, não preço — saudável.</a:t>
             </a:r>
-            <a:endParaRPr lang="en-US" dirty="0"/>
           </a:p>
         </p:txBody>
       </p:sp>
@@ -891,7 +667,7 @@
           <a:p>
             <a:fld id="{F7021451-1387-4CA6-816F-3879F97B5CBC}" type="slidenum">
               <a:rPr lang="en-US"/>
-              <a:t>13</a:t>
+              <a:t>14</a:t>
             </a:fld>
             <a:endParaRPr lang="en-US"/>
           </a:p>
@@ -958,7 +734,6 @@
               <a:rPr lang="en-US" dirty="0"/>
               <a:t>(~40s) Próximos passos pra mostrar visão de produto: refresh em tempo real, enrichment no nível de zona via spatial join, modelo de forecasting de demanda, detecção de anomalia com ML, deploy governado no Fabric e expansão do RLS. E o Part 2 opcional: aplicar o mesmo método a um case do meu portfólio. Fechar com obrigado e abrir pra perguntas.</a:t>
             </a:r>
-            <a:endParaRPr lang="en-US" dirty="0"/>
           </a:p>
         </p:txBody>
       </p:sp>
@@ -979,7 +754,7 @@
           <a:p>
             <a:fld id="{F7021451-1387-4CA6-816F-3879F97B5CBC}" type="slidenum">
               <a:rPr lang="en-US"/>
-              <a:t>14</a:t>
+              <a:t>15</a:t>
             </a:fld>
             <a:endParaRPr lang="en-US"/>
           </a:p>
@@ -1046,7 +821,6 @@
               <a:rPr lang="en-US" dirty="0"/>
               <a:t>(~60s) Decisão de narrativa, não só técnica. Trip = shipment, duração = lead time, zonas = nós de origem/destino, tarifa = custo logístico, anomalia = exception management. Isso deixa a banca de supply chain confortável: tudo que eu mostrar tem tradução direta pro mundo deles.</a:t>
             </a:r>
-            <a:endParaRPr lang="en-US" dirty="0"/>
           </a:p>
         </p:txBody>
       </p:sp>
@@ -1134,7 +908,6 @@
               <a:rPr lang="en-US" dirty="0"/>
               <a:t>(~50s) Pipeline end-to-end na stack da 3M: Microsoft Fabric, arquitetura medallion Bronze→Silver→Gold. Os 5 blocos que o briefing pediu pra discutir estão aqui: intake, harmonização, enrichment, modelo e front-end. Cada um vira um slide a seguir.</a:t>
             </a:r>
-            <a:endParaRPr lang="en-US" dirty="0"/>
           </a:p>
         </p:txBody>
       </p:sp>
@@ -1222,7 +995,6 @@
               <a:rPr lang="en-US" dirty="0"/>
               <a:t>(~50s) Bronze: 119,1 milhões de viagens de 36 parquets. O desafio real foi schema drift — os arquivos da TLC não batem entre si (VendorID int vs bigint, airport_fee com caixa diferente). Resolvi com schema canônico explícito e cast arquivo a arquivo. Ingestão idempotente. Já achei 663 linhas com data fora do escopo — primeiro sinal de qualidade.</a:t>
             </a:r>
-            <a:endParaRPr lang="en-US" dirty="0"/>
           </a:p>
         </p:txBody>
       </p:sp>
@@ -1310,7 +1082,6 @@
               <a:rPr lang="en-US" dirty="0"/>
               <a:t>(~50s) Silver: retivemos 97,16% das linhas — e cada descarte tem motivo explícito. Distância ≤ 0 (cancelamentos) e tarifa negativa (estornos) são ~95% dos descartes. As 180 mil anomalias não foram apagadas: ficaram marcadas com flag pra análise na tela de Data Quality. Transparência total.</a:t>
             </a:r>
-            <a:endParaRPr lang="en-US" dirty="0"/>
           </a:p>
         </p:txBody>
       </p:sp>
@@ -1398,7 +1169,6 @@
               <a:rPr lang="en-US" dirty="0"/>
               <a:t>(~45s) Enrichment com duas fontes externas. ACS do Census (a obrigatória): renda, população e densidade por borough — pra cruzar demanda com tamanho e riqueza do mercado, é reference data, então snapshot. NOAA: clima diário, operational data, via API com paginação anual. Padrão híbrido API + snapshot conforme a natureza do dado.</a:t>
             </a:r>
-            <a:endParaRPr lang="en-US" dirty="0"/>
           </a:p>
         </p:txBody>
       </p:sp>
@@ -1486,7 +1256,6 @@
               <a:rPr lang="en-US" dirty="0"/>
               <a:t>(~50s) Gold: star schema clássico, 1 fato e 7 dimensões, com a zona em role-playing (pickup e dropoff). Modelo semântico em DirectLake, zero-copy. Padrão Kimball: todo FK tem COALESCE pra Unknown, então zero chaves órfãs no fato. Modelo feito pra confiança e performance.</a:t>
             </a:r>
-            <a:endParaRPr lang="en-US" dirty="0"/>
           </a:p>
         </p:txBody>
       </p:sp>
@@ -1574,7 +1343,6 @@
               <a:rPr lang="en-US" dirty="0"/>
               <a:t>(~40s) Os 6 features obrigatórios, todos entregues e cada um com propósito: time intelligence via calc group, field parameters (25 análises em 1 visual), calculation groups, conditional formatting, RLS com 6 roles, e UDFs DAX. Não é checklist — cada um resolve um problema real do relatório.</a:t>
             </a:r>
-            <a:endParaRPr lang="en-US" dirty="0"/>
           </a:p>
         </p:txBody>
       </p:sp>
@@ -1662,7 +1430,6 @@
               <a:rPr lang="en-US" dirty="0"/>
               <a:t>(~45s) A camada de medidas é onde mora a engenharia analítica. Padrão argmax pra achar o pico real (não a maior hora). Médias ponderadas pela população. Correlação de Pearson escrita em DAX — toque de ciência de dados, nativo. UDFs reusadas ao vivo. E decisões de performance: classificação pesada empurrada pro Gold, modelo fino.</a:t>
             </a:r>
-            <a:endParaRPr lang="en-US" dirty="0"/>
           </a:p>
         </p:txBody>
       </p:sp>
@@ -1735,6 +1502,11 @@
 <file path=ppt/slideMasters/slideMaster1.xml><?xml version="1.0" encoding="utf-8"?>
 <p:sldMaster xmlns:a="http://schemas.openxmlformats.org/drawingml/2006/main" xmlns:r="http://schemas.openxmlformats.org/officeDocument/2006/relationships" xmlns:p="http://schemas.openxmlformats.org/presentationml/2006/main">
   <p:cSld>
+    <p:bg>
+      <p:bgRef idx="1001">
+        <a:schemeClr val="bg1"/>
+      </p:bgRef>
+    </p:bg>
     <p:spTree>
       <p:nvGrpSpPr>
         <p:cNvPr id="1" name=""/>
@@ -2017,6 +1789,7 @@
         <a:solidFill>
           <a:srgbClr val="1F3864"/>
         </a:solidFill>
+        <a:effectLst/>
       </p:bgPr>
     </p:bg>
     <p:spTree>
@@ -2054,11 +1827,11 @@
           <a:bodyPr wrap="square" lIns="0" tIns="0" rIns="0" bIns="0" rtlCol="0" anchor="ctr"/>
           <a:lstStyle/>
           <a:p>
-            <a:pPr indent="0" marL="0">
-              <a:buNone/>
-            </a:pPr>
-            <a:r>
-              <a:rPr lang="en-US" sz="1800" b="1" spc="300" kern="0" dirty="0">
+            <a:pPr marL="0" indent="0">
+              <a:buNone/>
+            </a:pPr>
+            <a:r>
+              <a:rPr lang="en-US" sz="1800" b="1" kern="0" spc="300" dirty="0">
                 <a:solidFill>
                   <a:srgbClr val="BDD7EE"/>
                 </a:solidFill>
@@ -2093,7 +1866,7 @@
           <a:bodyPr wrap="square" lIns="0" tIns="0" rIns="0" bIns="0" rtlCol="0" anchor="ctr"/>
           <a:lstStyle/>
           <a:p>
-            <a:pPr indent="0" marL="0">
+            <a:pPr marL="0" indent="0">
               <a:buNone/>
             </a:pPr>
             <a:r>
@@ -2132,7 +1905,7 @@
           <a:bodyPr wrap="square" lIns="0" tIns="0" rIns="0" bIns="0" rtlCol="0" anchor="ctr"/>
           <a:lstStyle/>
           <a:p>
-            <a:pPr indent="0" marL="0">
+            <a:pPr marL="0" indent="0">
               <a:buNone/>
             </a:pPr>
             <a:r>
@@ -2174,6 +1947,13 @@
             <a:prstDash val="solid"/>
           </a:ln>
         </p:spPr>
+        <p:txBody>
+          <a:bodyPr/>
+          <a:lstStyle/>
+          <a:p>
+            <a:endParaRPr lang="pt-BR"/>
+          </a:p>
+        </p:txBody>
       </p:sp>
       <p:sp>
         <p:nvSpPr>
@@ -2196,7 +1976,7 @@
           <a:bodyPr wrap="square" lIns="0" tIns="0" rIns="0" bIns="0" rtlCol="0" anchor="ctr"/>
           <a:lstStyle/>
           <a:p>
-            <a:pPr algn="ctr" indent="0" marL="0">
+            <a:pPr marL="0" indent="0" algn="ctr">
               <a:buNone/>
             </a:pPr>
             <a:r>
@@ -2235,7 +2015,7 @@
           <a:bodyPr wrap="square" lIns="0" tIns="0" rIns="0" bIns="0" rtlCol="0" anchor="ctr"/>
           <a:lstStyle/>
           <a:p>
-            <a:pPr algn="ctr" indent="0" marL="0">
+            <a:pPr marL="0" indent="0" algn="ctr">
               <a:buNone/>
             </a:pPr>
             <a:r>
@@ -2277,6 +2057,13 @@
             <a:prstDash val="solid"/>
           </a:ln>
         </p:spPr>
+        <p:txBody>
+          <a:bodyPr/>
+          <a:lstStyle/>
+          <a:p>
+            <a:endParaRPr lang="pt-BR"/>
+          </a:p>
+        </p:txBody>
       </p:sp>
       <p:sp>
         <p:nvSpPr>
@@ -2299,7 +2086,7 @@
           <a:bodyPr wrap="square" lIns="0" tIns="0" rIns="0" bIns="0" rtlCol="0" anchor="ctr"/>
           <a:lstStyle/>
           <a:p>
-            <a:pPr algn="ctr" indent="0" marL="0">
+            <a:pPr marL="0" indent="0" algn="ctr">
               <a:buNone/>
             </a:pPr>
             <a:r>
@@ -2338,7 +2125,7 @@
           <a:bodyPr wrap="square" lIns="0" tIns="0" rIns="0" bIns="0" rtlCol="0" anchor="ctr"/>
           <a:lstStyle/>
           <a:p>
-            <a:pPr algn="ctr" indent="0" marL="0">
+            <a:pPr marL="0" indent="0" algn="ctr">
               <a:buNone/>
             </a:pPr>
             <a:r>
@@ -2380,6 +2167,13 @@
             <a:prstDash val="solid"/>
           </a:ln>
         </p:spPr>
+        <p:txBody>
+          <a:bodyPr/>
+          <a:lstStyle/>
+          <a:p>
+            <a:endParaRPr lang="pt-BR"/>
+          </a:p>
+        </p:txBody>
       </p:sp>
       <p:sp>
         <p:nvSpPr>
@@ -2402,7 +2196,7 @@
           <a:bodyPr wrap="square" lIns="0" tIns="0" rIns="0" bIns="0" rtlCol="0" anchor="ctr"/>
           <a:lstStyle/>
           <a:p>
-            <a:pPr algn="ctr" indent="0" marL="0">
+            <a:pPr marL="0" indent="0" algn="ctr">
               <a:buNone/>
             </a:pPr>
             <a:r>
@@ -2441,7 +2235,7 @@
           <a:bodyPr wrap="square" lIns="0" tIns="0" rIns="0" bIns="0" rtlCol="0" anchor="ctr"/>
           <a:lstStyle/>
           <a:p>
-            <a:pPr algn="ctr" indent="0" marL="0">
+            <a:pPr marL="0" indent="0" algn="ctr">
               <a:buNone/>
             </a:pPr>
             <a:r>
@@ -2483,6 +2277,13 @@
             <a:prstDash val="solid"/>
           </a:ln>
         </p:spPr>
+        <p:txBody>
+          <a:bodyPr/>
+          <a:lstStyle/>
+          <a:p>
+            <a:endParaRPr lang="pt-BR"/>
+          </a:p>
+        </p:txBody>
       </p:sp>
       <p:sp>
         <p:nvSpPr>
@@ -2505,7 +2306,7 @@
           <a:bodyPr wrap="square" lIns="0" tIns="0" rIns="0" bIns="0" rtlCol="0" anchor="ctr"/>
           <a:lstStyle/>
           <a:p>
-            <a:pPr algn="ctr" indent="0" marL="0">
+            <a:pPr marL="0" indent="0" algn="ctr">
               <a:buNone/>
             </a:pPr>
             <a:r>
@@ -2544,7 +2345,7 @@
           <a:bodyPr wrap="square" lIns="0" tIns="0" rIns="0" bIns="0" rtlCol="0" anchor="ctr"/>
           <a:lstStyle/>
           <a:p>
-            <a:pPr algn="ctr" indent="0" marL="0">
+            <a:pPr marL="0" indent="0" algn="ctr">
               <a:buNone/>
             </a:pPr>
             <a:r>
@@ -2583,7 +2384,7 @@
           <a:bodyPr wrap="square" lIns="0" tIns="0" rIns="0" bIns="0" rtlCol="0" anchor="ctr"/>
           <a:lstStyle/>
           <a:p>
-            <a:pPr indent="0" marL="0">
+            <a:pPr marL="0" indent="0">
               <a:buNone/>
             </a:pPr>
             <a:r>
@@ -2600,7 +2401,7 @@
             <a:endParaRPr lang="en-US" sz="1200" dirty="0"/>
           </a:p>
           <a:p>
-            <a:pPr indent="0" marL="0">
+            <a:pPr marL="0" indent="0">
               <a:buNone/>
             </a:pPr>
             <a:r>
@@ -2634,6 +2435,7 @@
         <a:solidFill>
           <a:srgbClr val="FFFFFF"/>
         </a:solidFill>
+        <a:effectLst/>
       </p:bgPr>
     </p:bg>
     <p:spTree>
@@ -2671,11 +2473,11 @@
           <a:bodyPr wrap="square" lIns="0" tIns="0" rIns="0" bIns="0" rtlCol="0" anchor="ctr"/>
           <a:lstStyle/>
           <a:p>
-            <a:pPr indent="0" marL="0">
-              <a:buNone/>
-            </a:pPr>
-            <a:r>
-              <a:rPr lang="en-US" sz="1250" b="1" spc="200" kern="0" dirty="0">
+            <a:pPr marL="0" indent="0">
+              <a:buNone/>
+            </a:pPr>
+            <a:r>
+              <a:rPr lang="en-US" sz="1250" b="1" kern="0" spc="200" dirty="0">
                 <a:solidFill>
                   <a:srgbClr val="2E75B6"/>
                 </a:solidFill>
@@ -2710,7 +2512,7 @@
           <a:bodyPr wrap="square" lIns="0" tIns="0" rIns="0" bIns="0" rtlCol="0" anchor="ctr"/>
           <a:lstStyle/>
           <a:p>
-            <a:pPr indent="0" marL="0">
+            <a:pPr marL="0" indent="0">
               <a:buNone/>
             </a:pPr>
             <a:r>
@@ -2749,6 +2551,13 @@
           </a:solidFill>
           <a:ln/>
         </p:spPr>
+        <p:txBody>
+          <a:bodyPr/>
+          <a:lstStyle/>
+          <a:p>
+            <a:endParaRPr lang="pt-BR"/>
+          </a:p>
+        </p:txBody>
       </p:sp>
       <p:sp>
         <p:nvSpPr>
@@ -2771,7 +2580,7 @@
           <a:bodyPr wrap="square" lIns="0" tIns="0" rIns="0" bIns="0" rtlCol="0" anchor="ctr"/>
           <a:lstStyle/>
           <a:p>
-            <a:pPr algn="ctr" indent="0" marL="0">
+            <a:pPr marL="0" indent="0" algn="ctr">
               <a:buNone/>
             </a:pPr>
             <a:r>
@@ -2813,13 +2622,20 @@
             <a:prstDash val="solid"/>
           </a:ln>
           <a:effectLst>
-            <a:outerShdw sx="100000" sy="100000" kx="0" ky="0" algn="bl" rotWithShape="0" blurRad="101600" dist="38100" dir="8100000">
+            <a:outerShdw blurRad="101600" dist="38100" dir="8100000" algn="bl" rotWithShape="0">
               <a:srgbClr val="1F3864">
                 <a:alpha val="16000"/>
               </a:srgbClr>
             </a:outerShdw>
           </a:effectLst>
         </p:spPr>
+        <p:txBody>
+          <a:bodyPr/>
+          <a:lstStyle/>
+          <a:p>
+            <a:endParaRPr lang="pt-BR"/>
+          </a:p>
+        </p:txBody>
       </p:sp>
       <p:sp>
         <p:nvSpPr>
@@ -2842,7 +2658,7 @@
           <a:bodyPr wrap="square" lIns="0" tIns="0" rIns="0" bIns="0" rtlCol="0" anchor="ctr"/>
           <a:lstStyle/>
           <a:p>
-            <a:pPr algn="ctr" indent="0" marL="0">
+            <a:pPr marL="0" indent="0" algn="ctr">
               <a:buNone/>
             </a:pPr>
             <a:r>
@@ -2881,7 +2697,7 @@
           <a:bodyPr wrap="square" lIns="0" tIns="0" rIns="0" bIns="0" rtlCol="0" anchor="t"/>
           <a:lstStyle/>
           <a:p>
-            <a:pPr algn="ctr" indent="0" marL="0">
+            <a:pPr marL="0" indent="0" algn="ctr">
               <a:buNone/>
             </a:pPr>
             <a:r>
@@ -2923,13 +2739,20 @@
             <a:prstDash val="solid"/>
           </a:ln>
           <a:effectLst>
-            <a:outerShdw sx="100000" sy="100000" kx="0" ky="0" algn="bl" rotWithShape="0" blurRad="101600" dist="38100" dir="8100000">
+            <a:outerShdw blurRad="101600" dist="38100" dir="8100000" algn="bl" rotWithShape="0">
               <a:srgbClr val="1F3864">
                 <a:alpha val="16000"/>
               </a:srgbClr>
             </a:outerShdw>
           </a:effectLst>
         </p:spPr>
+        <p:txBody>
+          <a:bodyPr/>
+          <a:lstStyle/>
+          <a:p>
+            <a:endParaRPr lang="pt-BR"/>
+          </a:p>
+        </p:txBody>
       </p:sp>
       <p:sp>
         <p:nvSpPr>
@@ -2952,7 +2775,7 @@
           <a:bodyPr wrap="square" lIns="0" tIns="0" rIns="0" bIns="0" rtlCol="0" anchor="ctr"/>
           <a:lstStyle/>
           <a:p>
-            <a:pPr algn="ctr" indent="0" marL="0">
+            <a:pPr marL="0" indent="0" algn="ctr">
               <a:buNone/>
             </a:pPr>
             <a:r>
@@ -2991,7 +2814,7 @@
           <a:bodyPr wrap="square" lIns="0" tIns="0" rIns="0" bIns="0" rtlCol="0" anchor="t"/>
           <a:lstStyle/>
           <a:p>
-            <a:pPr algn="ctr" indent="0" marL="0">
+            <a:pPr marL="0" indent="0" algn="ctr">
               <a:buNone/>
             </a:pPr>
             <a:r>
@@ -3033,13 +2856,20 @@
             <a:prstDash val="solid"/>
           </a:ln>
           <a:effectLst>
-            <a:outerShdw sx="100000" sy="100000" kx="0" ky="0" algn="bl" rotWithShape="0" blurRad="101600" dist="38100" dir="8100000">
+            <a:outerShdw blurRad="101600" dist="38100" dir="8100000" algn="bl" rotWithShape="0">
               <a:srgbClr val="1F3864">
                 <a:alpha val="16000"/>
               </a:srgbClr>
             </a:outerShdw>
           </a:effectLst>
         </p:spPr>
+        <p:txBody>
+          <a:bodyPr/>
+          <a:lstStyle/>
+          <a:p>
+            <a:endParaRPr lang="pt-BR"/>
+          </a:p>
+        </p:txBody>
       </p:sp>
       <p:sp>
         <p:nvSpPr>
@@ -3062,7 +2892,7 @@
           <a:bodyPr wrap="square" lIns="0" tIns="0" rIns="0" bIns="0" rtlCol="0" anchor="ctr"/>
           <a:lstStyle/>
           <a:p>
-            <a:pPr algn="ctr" indent="0" marL="0">
+            <a:pPr marL="0" indent="0" algn="ctr">
               <a:buNone/>
             </a:pPr>
             <a:r>
@@ -3101,7 +2931,7 @@
           <a:bodyPr wrap="square" lIns="0" tIns="0" rIns="0" bIns="0" rtlCol="0" anchor="t"/>
           <a:lstStyle/>
           <a:p>
-            <a:pPr algn="ctr" indent="0" marL="0">
+            <a:pPr marL="0" indent="0" algn="ctr">
               <a:buNone/>
             </a:pPr>
             <a:r>
@@ -3143,13 +2973,20 @@
             <a:prstDash val="solid"/>
           </a:ln>
           <a:effectLst>
-            <a:outerShdw sx="100000" sy="100000" kx="0" ky="0" algn="bl" rotWithShape="0" blurRad="101600" dist="38100" dir="8100000">
+            <a:outerShdw blurRad="101600" dist="38100" dir="8100000" algn="bl" rotWithShape="0">
               <a:srgbClr val="1F3864">
                 <a:alpha val="16000"/>
               </a:srgbClr>
             </a:outerShdw>
           </a:effectLst>
         </p:spPr>
+        <p:txBody>
+          <a:bodyPr/>
+          <a:lstStyle/>
+          <a:p>
+            <a:endParaRPr lang="pt-BR"/>
+          </a:p>
+        </p:txBody>
       </p:sp>
       <p:sp>
         <p:nvSpPr>
@@ -3172,7 +3009,7 @@
           <a:bodyPr wrap="square" lIns="0" tIns="0" rIns="0" bIns="0" rtlCol="0" anchor="ctr"/>
           <a:lstStyle/>
           <a:p>
-            <a:pPr algn="ctr" indent="0" marL="0">
+            <a:pPr marL="0" indent="0" algn="ctr">
               <a:buNone/>
             </a:pPr>
             <a:r>
@@ -3211,7 +3048,7 @@
           <a:bodyPr wrap="square" lIns="0" tIns="0" rIns="0" bIns="0" rtlCol="0" anchor="t"/>
           <a:lstStyle/>
           <a:p>
-            <a:pPr algn="ctr" indent="0" marL="0">
+            <a:pPr marL="0" indent="0" algn="ctr">
               <a:buNone/>
             </a:pPr>
             <a:r>
@@ -3253,13 +3090,20 @@
             <a:prstDash val="solid"/>
           </a:ln>
           <a:effectLst>
-            <a:outerShdw sx="100000" sy="100000" kx="0" ky="0" algn="bl" rotWithShape="0" blurRad="101600" dist="38100" dir="8100000">
+            <a:outerShdw blurRad="101600" dist="38100" dir="8100000" algn="bl" rotWithShape="0">
               <a:srgbClr val="1F3864">
                 <a:alpha val="16000"/>
               </a:srgbClr>
             </a:outerShdw>
           </a:effectLst>
         </p:spPr>
+        <p:txBody>
+          <a:bodyPr/>
+          <a:lstStyle/>
+          <a:p>
+            <a:endParaRPr lang="pt-BR"/>
+          </a:p>
+        </p:txBody>
       </p:sp>
       <p:sp>
         <p:nvSpPr>
@@ -3282,7 +3126,7 @@
           <a:bodyPr wrap="square" lIns="0" tIns="0" rIns="0" bIns="0" rtlCol="0" anchor="ctr"/>
           <a:lstStyle/>
           <a:p>
-            <a:pPr algn="ctr" indent="0" marL="0">
+            <a:pPr marL="0" indent="0" algn="ctr">
               <a:buNone/>
             </a:pPr>
             <a:r>
@@ -3321,7 +3165,7 @@
           <a:bodyPr wrap="square" lIns="0" tIns="0" rIns="0" bIns="0" rtlCol="0" anchor="t"/>
           <a:lstStyle/>
           <a:p>
-            <a:pPr algn="ctr" indent="0" marL="0">
+            <a:pPr marL="0" indent="0" algn="ctr">
               <a:buNone/>
             </a:pPr>
             <a:r>
@@ -3360,7 +3204,7 @@
           <a:bodyPr wrap="square" lIns="0" tIns="0" rIns="0" bIns="0" rtlCol="0" anchor="t"/>
           <a:lstStyle/>
           <a:p>
-            <a:pPr indent="0" marL="0">
+            <a:pPr marL="0" indent="0">
               <a:buNone/>
             </a:pPr>
             <a:r>
@@ -3399,7 +3243,7 @@
           <a:bodyPr wrap="square" lIns="0" tIns="0" rIns="0" bIns="0" rtlCol="0" anchor="ctr"/>
           <a:lstStyle/>
           <a:p>
-            <a:pPr indent="0" marL="0">
+            <a:pPr marL="0" indent="0">
               <a:buNone/>
             </a:pPr>
             <a:r>
@@ -3411,11 +3255,8 @@
                 <a:ea typeface="Segoe UI" pitchFamily="34" charset="-122"/>
                 <a:cs typeface="Segoe UI" pitchFamily="34" charset="-120"/>
               </a:rPr>
-              <a:t xml:space="preserve">Now switching to the live report → </a:t>
-            </a:r>
-            <a:pPr indent="0" marL="0">
-              <a:buNone/>
-            </a:pPr>
+              <a:t>Now switching to the live report → </a:t>
+            </a:r>
             <a:r>
               <a:rPr lang="en-US" sz="1250" dirty="0">
                 <a:solidFill>
@@ -3452,7 +3293,7 @@
           <a:bodyPr wrap="square" lIns="0" tIns="0" rIns="0" bIns="0" rtlCol="0" anchor="ctr"/>
           <a:lstStyle/>
           <a:p>
-            <a:pPr indent="0" marL="0">
+            <a:pPr marL="0" indent="0">
               <a:buNone/>
             </a:pPr>
             <a:r>
@@ -3491,7 +3332,7 @@
           <a:bodyPr wrap="square" lIns="0" tIns="0" rIns="0" bIns="0" rtlCol="0" anchor="ctr"/>
           <a:lstStyle/>
           <a:p>
-            <a:pPr algn="r" indent="0" marL="0">
+            <a:pPr marL="0" indent="0" algn="r">
               <a:buNone/>
             </a:pPr>
             <a:r>
@@ -3525,6 +3366,7 @@
         <a:solidFill>
           <a:srgbClr val="FFFFFF"/>
         </a:solidFill>
+        <a:effectLst/>
       </p:bgPr>
     </p:bg>
     <p:spTree>
@@ -3562,11 +3404,11 @@
           <a:bodyPr wrap="square" lIns="0" tIns="0" rIns="0" bIns="0" rtlCol="0" anchor="ctr"/>
           <a:lstStyle/>
           <a:p>
-            <a:pPr indent="0" marL="0">
-              <a:buNone/>
-            </a:pPr>
-            <a:r>
-              <a:rPr lang="en-US" sz="1250" b="1" spc="200" kern="0" dirty="0">
+            <a:pPr marL="0" indent="0">
+              <a:buNone/>
+            </a:pPr>
+            <a:r>
+              <a:rPr lang="en-US" sz="1250" b="1" kern="0" spc="200" dirty="0">
                 <a:solidFill>
                   <a:srgbClr val="2E75B6"/>
                 </a:solidFill>
@@ -3601,7 +3443,7 @@
           <a:bodyPr wrap="square" lIns="0" tIns="0" rIns="0" bIns="0" rtlCol="0" anchor="ctr"/>
           <a:lstStyle/>
           <a:p>
-            <a:pPr indent="0" marL="0">
+            <a:pPr marL="0" indent="0">
               <a:buNone/>
             </a:pPr>
             <a:r>
@@ -3643,13 +3485,20 @@
             <a:prstDash val="solid"/>
           </a:ln>
           <a:effectLst>
-            <a:outerShdw sx="100000" sy="100000" kx="0" ky="0" algn="bl" rotWithShape="0" blurRad="101600" dist="38100" dir="8100000">
+            <a:outerShdw blurRad="101600" dist="38100" dir="8100000" algn="bl" rotWithShape="0">
               <a:srgbClr val="1F3864">
                 <a:alpha val="16000"/>
               </a:srgbClr>
             </a:outerShdw>
           </a:effectLst>
         </p:spPr>
+        <p:txBody>
+          <a:bodyPr/>
+          <a:lstStyle/>
+          <a:p>
+            <a:endParaRPr lang="pt-BR"/>
+          </a:p>
+        </p:txBody>
       </p:sp>
       <p:sp>
         <p:nvSpPr>
@@ -3670,6 +3519,13 @@
           </a:solidFill>
           <a:ln/>
         </p:spPr>
+        <p:txBody>
+          <a:bodyPr/>
+          <a:lstStyle/>
+          <a:p>
+            <a:endParaRPr lang="pt-BR"/>
+          </a:p>
+        </p:txBody>
       </p:sp>
       <p:sp>
         <p:nvSpPr>
@@ -3692,7 +3548,7 @@
           <a:bodyPr wrap="square" lIns="0" tIns="0" rIns="0" bIns="0" rtlCol="0" anchor="ctr"/>
           <a:lstStyle/>
           <a:p>
-            <a:pPr indent="0" marL="0">
+            <a:pPr marL="0" indent="0">
               <a:buNone/>
             </a:pPr>
             <a:r>
@@ -3731,7 +3587,7 @@
           <a:bodyPr wrap="square" lIns="0" tIns="0" rIns="0" bIns="0" rtlCol="0" anchor="t"/>
           <a:lstStyle/>
           <a:p>
-            <a:pPr indent="0" marL="0">
+            <a:pPr marL="0" indent="0">
               <a:buNone/>
             </a:pPr>
             <a:r>
@@ -3748,13 +3604,13 @@
             <a:endParaRPr lang="en-US" sz="1200" dirty="0"/>
           </a:p>
           <a:p>
-            <a:pPr indent="0" marL="0">
+            <a:pPr marL="0" indent="0">
               <a:buNone/>
             </a:pPr>
             <a:endParaRPr lang="en-US" sz="1200" dirty="0"/>
           </a:p>
           <a:p>
-            <a:pPr indent="0" marL="0">
+            <a:pPr marL="0" indent="0">
               <a:buNone/>
             </a:pPr>
             <a:r>
@@ -3771,13 +3627,13 @@
             <a:endParaRPr lang="en-US" sz="1200" dirty="0"/>
           </a:p>
           <a:p>
-            <a:pPr indent="0" marL="0">
+            <a:pPr marL="0" indent="0">
               <a:buNone/>
             </a:pPr>
             <a:endParaRPr lang="en-US" sz="1200" dirty="0"/>
           </a:p>
           <a:p>
-            <a:pPr indent="0" marL="0">
+            <a:pPr marL="0" indent="0">
               <a:buNone/>
             </a:pPr>
             <a:r>
@@ -3794,13 +3650,13 @@
             <a:endParaRPr lang="en-US" sz="1200" dirty="0"/>
           </a:p>
           <a:p>
-            <a:pPr indent="0" marL="0">
+            <a:pPr marL="0" indent="0">
               <a:buNone/>
             </a:pPr>
             <a:endParaRPr lang="en-US" sz="1200" dirty="0"/>
           </a:p>
           <a:p>
-            <a:pPr indent="0" marL="0">
+            <a:pPr marL="0" indent="0">
               <a:buNone/>
             </a:pPr>
             <a:r>
@@ -3817,13 +3673,13 @@
             <a:endParaRPr lang="en-US" sz="1200" dirty="0"/>
           </a:p>
           <a:p>
-            <a:pPr indent="0" marL="0">
+            <a:pPr marL="0" indent="0">
               <a:buNone/>
             </a:pPr>
             <a:endParaRPr lang="en-US" sz="1200" dirty="0"/>
           </a:p>
           <a:p>
-            <a:pPr indent="0" marL="0">
+            <a:pPr marL="0" indent="0">
               <a:buNone/>
             </a:pPr>
             <a:r>
@@ -3865,13 +3721,20 @@
             <a:prstDash val="solid"/>
           </a:ln>
           <a:effectLst>
-            <a:outerShdw sx="100000" sy="100000" kx="0" ky="0" algn="bl" rotWithShape="0" blurRad="101600" dist="38100" dir="8100000">
+            <a:outerShdw blurRad="101600" dist="38100" dir="8100000" algn="bl" rotWithShape="0">
               <a:srgbClr val="1F3864">
                 <a:alpha val="16000"/>
               </a:srgbClr>
             </a:outerShdw>
           </a:effectLst>
         </p:spPr>
+        <p:txBody>
+          <a:bodyPr/>
+          <a:lstStyle/>
+          <a:p>
+            <a:endParaRPr lang="pt-BR"/>
+          </a:p>
+        </p:txBody>
       </p:sp>
       <p:sp>
         <p:nvSpPr>
@@ -3892,6 +3755,13 @@
           </a:solidFill>
           <a:ln/>
         </p:spPr>
+        <p:txBody>
+          <a:bodyPr/>
+          <a:lstStyle/>
+          <a:p>
+            <a:endParaRPr lang="pt-BR"/>
+          </a:p>
+        </p:txBody>
       </p:sp>
       <p:sp>
         <p:nvSpPr>
@@ -3914,7 +3784,7 @@
           <a:bodyPr wrap="square" lIns="0" tIns="0" rIns="0" bIns="0" rtlCol="0" anchor="ctr"/>
           <a:lstStyle/>
           <a:p>
-            <a:pPr indent="0" marL="0">
+            <a:pPr marL="0" indent="0">
               <a:buNone/>
             </a:pPr>
             <a:r>
@@ -3953,7 +3823,7 @@
           <a:bodyPr wrap="square" lIns="0" tIns="0" rIns="0" bIns="0" rtlCol="0" anchor="t"/>
           <a:lstStyle/>
           <a:p>
-            <a:pPr indent="0" marL="0">
+            <a:pPr marL="0" indent="0">
               <a:buNone/>
             </a:pPr>
             <a:r>
@@ -3970,13 +3840,13 @@
             <a:endParaRPr lang="en-US" sz="1200" dirty="0"/>
           </a:p>
           <a:p>
-            <a:pPr indent="0" marL="0">
+            <a:pPr marL="0" indent="0">
               <a:buNone/>
             </a:pPr>
             <a:endParaRPr lang="en-US" sz="1200" dirty="0"/>
           </a:p>
           <a:p>
-            <a:pPr indent="0" marL="0">
+            <a:pPr marL="0" indent="0">
               <a:buNone/>
             </a:pPr>
             <a:r>
@@ -3993,13 +3863,13 @@
             <a:endParaRPr lang="en-US" sz="1200" dirty="0"/>
           </a:p>
           <a:p>
-            <a:pPr indent="0" marL="0">
+            <a:pPr marL="0" indent="0">
               <a:buNone/>
             </a:pPr>
             <a:endParaRPr lang="en-US" sz="1200" dirty="0"/>
           </a:p>
           <a:p>
-            <a:pPr indent="0" marL="0">
+            <a:pPr marL="0" indent="0">
               <a:buNone/>
             </a:pPr>
             <a:r>
@@ -4016,13 +3886,13 @@
             <a:endParaRPr lang="en-US" sz="1200" dirty="0"/>
           </a:p>
           <a:p>
-            <a:pPr indent="0" marL="0">
+            <a:pPr marL="0" indent="0">
               <a:buNone/>
             </a:pPr>
             <a:endParaRPr lang="en-US" sz="1200" dirty="0"/>
           </a:p>
           <a:p>
-            <a:pPr indent="0" marL="0">
+            <a:pPr marL="0" indent="0">
               <a:buNone/>
             </a:pPr>
             <a:r>
@@ -4039,13 +3909,13 @@
             <a:endParaRPr lang="en-US" sz="1200" dirty="0"/>
           </a:p>
           <a:p>
-            <a:pPr indent="0" marL="0">
+            <a:pPr marL="0" indent="0">
               <a:buNone/>
             </a:pPr>
             <a:endParaRPr lang="en-US" sz="1200" dirty="0"/>
           </a:p>
           <a:p>
-            <a:pPr indent="0" marL="0">
+            <a:pPr marL="0" indent="0">
               <a:buNone/>
             </a:pPr>
             <a:r>
@@ -4084,7 +3954,7 @@
           <a:bodyPr wrap="square" lIns="0" tIns="0" rIns="0" bIns="0" rtlCol="0" anchor="ctr"/>
           <a:lstStyle/>
           <a:p>
-            <a:pPr indent="0" marL="0">
+            <a:pPr marL="0" indent="0">
               <a:buNone/>
             </a:pPr>
             <a:r>
@@ -4123,7 +3993,7 @@
           <a:bodyPr wrap="square" lIns="0" tIns="0" rIns="0" bIns="0" rtlCol="0" anchor="ctr"/>
           <a:lstStyle/>
           <a:p>
-            <a:pPr algn="r" indent="0" marL="0">
+            <a:pPr marL="0" indent="0" algn="r">
               <a:buNone/>
             </a:pPr>
             <a:r>
@@ -4157,6 +4027,7 @@
         <a:solidFill>
           <a:srgbClr val="FFFFFF"/>
         </a:solidFill>
+        <a:effectLst/>
       </p:bgPr>
     </p:bg>
     <p:spTree>
@@ -4194,11 +4065,11 @@
           <a:bodyPr wrap="square" lIns="0" tIns="0" rIns="0" bIns="0" rtlCol="0" anchor="ctr"/>
           <a:lstStyle/>
           <a:p>
-            <a:pPr indent="0" marL="0">
-              <a:buNone/>
-            </a:pPr>
-            <a:r>
-              <a:rPr lang="en-US" sz="1250" b="1" spc="200" kern="0" dirty="0">
+            <a:pPr marL="0" indent="0">
+              <a:buNone/>
+            </a:pPr>
+            <a:r>
+              <a:rPr lang="en-US" sz="1250" b="1" kern="0" spc="200" dirty="0">
                 <a:solidFill>
                   <a:srgbClr val="2E75B6"/>
                 </a:solidFill>
@@ -4233,7 +4104,7 @@
           <a:bodyPr wrap="square" lIns="0" tIns="0" rIns="0" bIns="0" rtlCol="0" anchor="ctr"/>
           <a:lstStyle/>
           <a:p>
-            <a:pPr indent="0" marL="0">
+            <a:pPr marL="0" indent="0">
               <a:buNone/>
             </a:pPr>
             <a:r>
@@ -4259,7 +4130,7 @@
         </p:nvSpPr>
         <p:spPr>
           <a:xfrm>
-            <a:off x="548640" y="1691640"/>
+            <a:off x="579120" y="1748790"/>
             <a:ext cx="5486400" cy="4023360"/>
           </a:xfrm>
           <a:prstGeom prst="rect">
@@ -4275,13 +4146,20 @@
             <a:prstDash val="solid"/>
           </a:ln>
           <a:effectLst>
-            <a:outerShdw sx="100000" sy="100000" kx="0" ky="0" algn="bl" rotWithShape="0" blurRad="101600" dist="38100" dir="8100000">
+            <a:outerShdw blurRad="101600" dist="38100" dir="8100000" algn="bl" rotWithShape="0">
               <a:srgbClr val="1F3864">
                 <a:alpha val="16000"/>
               </a:srgbClr>
             </a:outerShdw>
           </a:effectLst>
         </p:spPr>
+        <p:txBody>
+          <a:bodyPr/>
+          <a:lstStyle/>
+          <a:p>
+            <a:endParaRPr lang="pt-BR"/>
+          </a:p>
+        </p:txBody>
       </p:sp>
       <p:sp>
         <p:nvSpPr>
@@ -4302,6 +4180,13 @@
           </a:solidFill>
           <a:ln/>
         </p:spPr>
+        <p:txBody>
+          <a:bodyPr/>
+          <a:lstStyle/>
+          <a:p>
+            <a:endParaRPr lang="pt-BR"/>
+          </a:p>
+        </p:txBody>
       </p:sp>
       <p:sp>
         <p:nvSpPr>
@@ -4324,7 +4209,7 @@
           <a:bodyPr wrap="square" lIns="0" tIns="0" rIns="0" bIns="0" rtlCol="0" anchor="ctr"/>
           <a:lstStyle/>
           <a:p>
-            <a:pPr indent="0" marL="0">
+            <a:pPr marL="0" indent="0">
               <a:buNone/>
             </a:pPr>
             <a:r>
@@ -4363,7 +4248,7 @@
           <a:bodyPr wrap="square" lIns="0" tIns="0" rIns="0" bIns="0" rtlCol="0" anchor="t"/>
           <a:lstStyle/>
           <a:p>
-            <a:pPr indent="0" marL="0">
+            <a:pPr marL="0" indent="0">
               <a:buNone/>
             </a:pPr>
             <a:r>
@@ -4380,13 +4265,13 @@
             <a:endParaRPr lang="en-US" sz="1200" dirty="0"/>
           </a:p>
           <a:p>
-            <a:pPr indent="0" marL="0">
+            <a:pPr marL="0" indent="0">
               <a:buNone/>
             </a:pPr>
             <a:endParaRPr lang="en-US" sz="1200" dirty="0"/>
           </a:p>
           <a:p>
-            <a:pPr indent="0" marL="0">
+            <a:pPr marL="0" indent="0">
               <a:buNone/>
             </a:pPr>
             <a:r>
@@ -4403,13 +4288,13 @@
             <a:endParaRPr lang="en-US" sz="1200" dirty="0"/>
           </a:p>
           <a:p>
-            <a:pPr indent="0" marL="0">
+            <a:pPr marL="0" indent="0">
               <a:buNone/>
             </a:pPr>
             <a:endParaRPr lang="en-US" sz="1200" dirty="0"/>
           </a:p>
           <a:p>
-            <a:pPr indent="0" marL="0">
+            <a:pPr marL="0" indent="0">
               <a:buNone/>
             </a:pPr>
             <a:r>
@@ -4426,13 +4311,13 @@
             <a:endParaRPr lang="en-US" sz="1200" dirty="0"/>
           </a:p>
           <a:p>
-            <a:pPr indent="0" marL="0">
+            <a:pPr marL="0" indent="0">
               <a:buNone/>
             </a:pPr>
             <a:endParaRPr lang="en-US" sz="1200" dirty="0"/>
           </a:p>
           <a:p>
-            <a:pPr indent="0" marL="0">
+            <a:pPr marL="0" indent="0">
               <a:buNone/>
             </a:pPr>
             <a:r>
@@ -4449,13 +4334,13 @@
             <a:endParaRPr lang="en-US" sz="1200" dirty="0"/>
           </a:p>
           <a:p>
-            <a:pPr indent="0" marL="0">
+            <a:pPr marL="0" indent="0">
               <a:buNone/>
             </a:pPr>
             <a:endParaRPr lang="en-US" sz="1200" dirty="0"/>
           </a:p>
           <a:p>
-            <a:pPr indent="0" marL="0">
+            <a:pPr marL="0" indent="0">
               <a:buNone/>
             </a:pPr>
             <a:r>
@@ -4497,13 +4382,20 @@
             <a:prstDash val="solid"/>
           </a:ln>
           <a:effectLst>
-            <a:outerShdw sx="100000" sy="100000" kx="0" ky="0" algn="bl" rotWithShape="0" blurRad="101600" dist="38100" dir="8100000">
+            <a:outerShdw blurRad="101600" dist="38100" dir="8100000" algn="bl" rotWithShape="0">
               <a:srgbClr val="1F3864">
                 <a:alpha val="16000"/>
               </a:srgbClr>
             </a:outerShdw>
           </a:effectLst>
         </p:spPr>
+        <p:txBody>
+          <a:bodyPr/>
+          <a:lstStyle/>
+          <a:p>
+            <a:endParaRPr lang="pt-BR"/>
+          </a:p>
+        </p:txBody>
       </p:sp>
       <p:sp>
         <p:nvSpPr>
@@ -4524,6 +4416,13 @@
           </a:solidFill>
           <a:ln/>
         </p:spPr>
+        <p:txBody>
+          <a:bodyPr/>
+          <a:lstStyle/>
+          <a:p>
+            <a:endParaRPr lang="pt-BR"/>
+          </a:p>
+        </p:txBody>
       </p:sp>
       <p:sp>
         <p:nvSpPr>
@@ -4546,7 +4445,7 @@
           <a:bodyPr wrap="square" lIns="0" tIns="0" rIns="0" bIns="0" rtlCol="0" anchor="ctr"/>
           <a:lstStyle/>
           <a:p>
-            <a:pPr indent="0" marL="0">
+            <a:pPr marL="0" indent="0">
               <a:buNone/>
             </a:pPr>
             <a:r>
@@ -4585,7 +4484,7 @@
           <a:bodyPr wrap="square" lIns="0" tIns="0" rIns="0" bIns="0" rtlCol="0" anchor="t"/>
           <a:lstStyle/>
           <a:p>
-            <a:pPr indent="0" marL="0">
+            <a:pPr marL="0" indent="0">
               <a:buNone/>
             </a:pPr>
             <a:r>
@@ -4602,13 +4501,13 @@
             <a:endParaRPr lang="en-US" sz="1200" dirty="0"/>
           </a:p>
           <a:p>
-            <a:pPr indent="0" marL="0">
+            <a:pPr marL="0" indent="0">
               <a:buNone/>
             </a:pPr>
             <a:endParaRPr lang="en-US" sz="1200" dirty="0"/>
           </a:p>
           <a:p>
-            <a:pPr indent="0" marL="0">
+            <a:pPr marL="0" indent="0">
               <a:buNone/>
             </a:pPr>
             <a:r>
@@ -4625,13 +4524,13 @@
             <a:endParaRPr lang="en-US" sz="1200" dirty="0"/>
           </a:p>
           <a:p>
-            <a:pPr indent="0" marL="0">
+            <a:pPr marL="0" indent="0">
               <a:buNone/>
             </a:pPr>
             <a:endParaRPr lang="en-US" sz="1200" dirty="0"/>
           </a:p>
           <a:p>
-            <a:pPr indent="0" marL="0">
+            <a:pPr marL="0" indent="0">
               <a:buNone/>
             </a:pPr>
             <a:r>
@@ -4648,13 +4547,13 @@
             <a:endParaRPr lang="en-US" sz="1200" dirty="0"/>
           </a:p>
           <a:p>
-            <a:pPr indent="0" marL="0">
+            <a:pPr marL="0" indent="0">
               <a:buNone/>
             </a:pPr>
             <a:endParaRPr lang="en-US" sz="1200" dirty="0"/>
           </a:p>
           <a:p>
-            <a:pPr indent="0" marL="0">
+            <a:pPr marL="0" indent="0">
               <a:buNone/>
             </a:pPr>
             <a:r>
@@ -4671,13 +4570,13 @@
             <a:endParaRPr lang="en-US" sz="1200" dirty="0"/>
           </a:p>
           <a:p>
-            <a:pPr indent="0" marL="0">
+            <a:pPr marL="0" indent="0">
               <a:buNone/>
             </a:pPr>
             <a:endParaRPr lang="en-US" sz="1200" dirty="0"/>
           </a:p>
           <a:p>
-            <a:pPr indent="0" marL="0">
+            <a:pPr marL="0" indent="0">
               <a:buNone/>
             </a:pPr>
             <a:r>
@@ -4716,7 +4615,7 @@
           <a:bodyPr wrap="square" lIns="0" tIns="0" rIns="0" bIns="0" rtlCol="0" anchor="ctr"/>
           <a:lstStyle/>
           <a:p>
-            <a:pPr indent="0" marL="0">
+            <a:pPr marL="0" indent="0">
               <a:buNone/>
             </a:pPr>
             <a:r>
@@ -4755,7 +4654,7 @@
           <a:bodyPr wrap="square" lIns="0" tIns="0" rIns="0" bIns="0" rtlCol="0" anchor="ctr"/>
           <a:lstStyle/>
           <a:p>
-            <a:pPr algn="r" indent="0" marL="0">
+            <a:pPr marL="0" indent="0" algn="r">
               <a:buNone/>
             </a:pPr>
             <a:r>
@@ -4783,12 +4682,13 @@
 
 <file path=ppt/slides/slide13.xml><?xml version="1.0" encoding="utf-8"?>
 <p:sld xmlns:a="http://schemas.openxmlformats.org/drawingml/2006/main" xmlns:r="http://schemas.openxmlformats.org/officeDocument/2006/relationships" xmlns:p="http://schemas.openxmlformats.org/presentationml/2006/main">
-  <p:cSld name="Slide 13">
+  <p:cSld name="Slide 12">
     <p:bg>
       <p:bgPr>
         <a:solidFill>
-          <a:srgbClr val="1F3864"/>
+          <a:srgbClr val="FFFFFF"/>
         </a:solidFill>
+        <a:effectLst/>
       </p:bgPr>
     </p:bg>
     <p:spTree>
@@ -4813,32 +4713,32 @@
         </p:nvSpPr>
         <p:spPr>
           <a:xfrm>
-            <a:off x="548640" y="457200"/>
-            <a:ext cx="10972800" cy="274320"/>
-          </a:xfrm>
-          <a:prstGeom prst="rect">
-            <a:avLst/>
-          </a:prstGeom>
-          <a:noFill/>
-          <a:ln/>
-        </p:spPr>
-        <p:txBody>
-          <a:bodyPr wrap="square" lIns="0" tIns="0" rIns="0" bIns="0" rtlCol="0" anchor="ctr"/>
-          <a:lstStyle/>
-          <a:p>
-            <a:pPr indent="0" marL="0">
-              <a:buNone/>
-            </a:pPr>
-            <a:r>
-              <a:rPr lang="en-US" sz="1250" b="1" spc="200" kern="0" dirty="0">
-                <a:solidFill>
-                  <a:srgbClr val="5B9BD5"/>
+            <a:off x="548640" y="384048"/>
+            <a:ext cx="11064240" cy="274320"/>
+          </a:xfrm>
+          <a:prstGeom prst="rect">
+            <a:avLst/>
+          </a:prstGeom>
+          <a:noFill/>
+          <a:ln/>
+        </p:spPr>
+        <p:txBody>
+          <a:bodyPr wrap="square" lIns="0" tIns="0" rIns="0" bIns="0" rtlCol="0" anchor="ctr"/>
+          <a:lstStyle/>
+          <a:p>
+            <a:pPr marL="0" indent="0">
+              <a:buNone/>
+            </a:pPr>
+            <a:r>
+              <a:rPr lang="en-US" sz="1250" b="1" kern="0" spc="200" dirty="0">
+                <a:solidFill>
+                  <a:srgbClr val="2E75B6"/>
                 </a:solidFill>
                 <a:latin typeface="Segoe UI" pitchFamily="34" charset="0"/>
                 <a:ea typeface="Segoe UI" pitchFamily="34" charset="-122"/>
                 <a:cs typeface="Segoe UI" pitchFamily="34" charset="-120"/>
               </a:rPr>
-              <a:t>07 · KEY INSIGHTS</a:t>
+              <a:t>06 · DASHBOARD</a:t>
             </a:r>
             <a:endParaRPr lang="en-US" sz="1250" dirty="0"/>
           </a:p>
@@ -4852,32 +4752,32 @@
         </p:nvSpPr>
         <p:spPr>
           <a:xfrm>
-            <a:off x="548640" y="731520"/>
-            <a:ext cx="10972800" cy="548640"/>
-          </a:xfrm>
-          <a:prstGeom prst="rect">
-            <a:avLst/>
-          </a:prstGeom>
-          <a:noFill/>
-          <a:ln/>
-        </p:spPr>
-        <p:txBody>
-          <a:bodyPr wrap="square" lIns="0" tIns="0" rIns="0" bIns="0" rtlCol="0" anchor="ctr"/>
-          <a:lstStyle/>
-          <a:p>
-            <a:pPr indent="0" marL="0">
+            <a:off x="548640" y="640080"/>
+            <a:ext cx="11064240" cy="640080"/>
+          </a:xfrm>
+          <a:prstGeom prst="rect">
+            <a:avLst/>
+          </a:prstGeom>
+          <a:noFill/>
+          <a:ln/>
+        </p:spPr>
+        <p:txBody>
+          <a:bodyPr wrap="square" lIns="0" tIns="0" rIns="0" bIns="0" rtlCol="0" anchor="ctr"/>
+          <a:lstStyle/>
+          <a:p>
+            <a:pPr marL="0" indent="0">
               <a:buNone/>
             </a:pPr>
             <a:r>
               <a:rPr lang="en-US" sz="2900" b="1" dirty="0">
                 <a:solidFill>
-                  <a:srgbClr val="FFFFFF"/>
+                  <a:srgbClr val="1F3864"/>
                 </a:solidFill>
                 <a:latin typeface="Segoe UI Semibold" pitchFamily="34" charset="0"/>
                 <a:ea typeface="Segoe UI Semibold" pitchFamily="34" charset="-122"/>
                 <a:cs typeface="Segoe UI Semibold" pitchFamily="34" charset="-120"/>
               </a:rPr>
-              <a:t>Translated to supply-chain decisions</a:t>
+              <a:t>Weather &amp; Operational Risk</a:t>
             </a:r>
             <a:endParaRPr lang="en-US" sz="2900" dirty="0"/>
           </a:p>
@@ -4892,899 +4792,544 @@
         <p:spPr>
           <a:xfrm>
             <a:off x="548640" y="1691640"/>
-            <a:ext cx="548640" cy="548640"/>
-          </a:xfrm>
-          <a:prstGeom prst="ellipse">
+            <a:ext cx="5486400" cy="4023360"/>
+          </a:xfrm>
+          <a:prstGeom prst="rect">
             <a:avLst/>
           </a:prstGeom>
           <a:solidFill>
-            <a:srgbClr val="27406E"/>
+            <a:srgbClr val="FFFFFF"/>
           </a:solidFill>
           <a:ln w="12700">
             <a:solidFill>
-              <a:srgbClr val="5B9BD5"/>
+              <a:srgbClr val="E0E0E0"/>
             </a:solidFill>
             <a:prstDash val="solid"/>
           </a:ln>
-        </p:spPr>
-      </p:sp>
-      <p:sp>
-        <p:nvSpPr>
-          <p:cNvPr id="5" name="Text 3"/>
+          <a:effectLst>
+            <a:outerShdw blurRad="101600" dist="38100" dir="8100000" algn="bl" rotWithShape="0">
+              <a:srgbClr val="1F3864">
+                <a:alpha val="16000"/>
+              </a:srgbClr>
+            </a:outerShdw>
+          </a:effectLst>
+        </p:spPr>
+        <p:txBody>
+          <a:bodyPr/>
+          <a:lstStyle/>
+          <a:p>
+            <a:endParaRPr lang="pt-BR"/>
+          </a:p>
+        </p:txBody>
+      </p:sp>
+      <p:sp>
+        <p:nvSpPr>
+          <p:cNvPr id="5" name="Shape 3"/>
           <p:cNvSpPr/>
           <p:nvPr/>
         </p:nvSpPr>
         <p:spPr>
           <a:xfrm>
             <a:off x="548640" y="1691640"/>
-            <a:ext cx="548640" cy="548640"/>
-          </a:xfrm>
-          <a:prstGeom prst="rect">
-            <a:avLst/>
-          </a:prstGeom>
-          <a:noFill/>
-          <a:ln/>
-        </p:spPr>
-        <p:txBody>
-          <a:bodyPr wrap="square" lIns="0" tIns="0" rIns="0" bIns="0" rtlCol="0" anchor="ctr"/>
-          <a:lstStyle/>
-          <a:p>
-            <a:pPr algn="ctr" indent="0" marL="0">
-              <a:buNone/>
-            </a:pPr>
-            <a:r>
-              <a:rPr lang="en-US" sz="1800" b="1" dirty="0">
-                <a:solidFill>
-                  <a:srgbClr val="FFFFFF"/>
+            <a:ext cx="82296" cy="4023360"/>
+          </a:xfrm>
+          <a:prstGeom prst="rect">
+            <a:avLst/>
+          </a:prstGeom>
+          <a:solidFill>
+            <a:srgbClr val="2E75B6"/>
+          </a:solidFill>
+          <a:ln/>
+        </p:spPr>
+        <p:txBody>
+          <a:bodyPr/>
+          <a:lstStyle/>
+          <a:p>
+            <a:endParaRPr lang="pt-BR"/>
+          </a:p>
+        </p:txBody>
+      </p:sp>
+      <p:sp>
+        <p:nvSpPr>
+          <p:cNvPr id="6" name="Text 4"/>
+          <p:cNvSpPr/>
+          <p:nvPr/>
+        </p:nvSpPr>
+        <p:spPr>
+          <a:xfrm>
+            <a:off x="777240" y="1837944"/>
+            <a:ext cx="5120640" cy="320040"/>
+          </a:xfrm>
+          <a:prstGeom prst="rect">
+            <a:avLst/>
+          </a:prstGeom>
+          <a:noFill/>
+          <a:ln/>
+        </p:spPr>
+        <p:txBody>
+          <a:bodyPr wrap="square" lIns="0" tIns="0" rIns="0" bIns="0" rtlCol="0" anchor="ctr"/>
+          <a:lstStyle/>
+          <a:p>
+            <a:pPr marL="0" indent="0">
+              <a:buNone/>
+            </a:pPr>
+            <a:r>
+              <a:rPr lang="en-US" sz="1450" b="1" dirty="0">
+                <a:solidFill>
+                  <a:srgbClr val="1F3864"/>
                 </a:solidFill>
                 <a:latin typeface="Segoe UI Semibold" pitchFamily="34" charset="0"/>
                 <a:ea typeface="Segoe UI Semibold" pitchFamily="34" charset="-122"/>
                 <a:cs typeface="Segoe UI Semibold" pitchFamily="34" charset="-120"/>
               </a:rPr>
-              <a:t>1</a:t>
-            </a:r>
-            <a:endParaRPr lang="en-US" sz="1800" dirty="0"/>
-          </a:p>
-        </p:txBody>
-      </p:sp>
-      <p:sp>
-        <p:nvSpPr>
-          <p:cNvPr id="6" name="Text 4"/>
-          <p:cNvSpPr/>
-          <p:nvPr/>
-        </p:nvSpPr>
-        <p:spPr>
-          <a:xfrm>
-            <a:off x="1325880" y="1600200"/>
-            <a:ext cx="5760720" cy="731520"/>
-          </a:xfrm>
-          <a:prstGeom prst="rect">
-            <a:avLst/>
-          </a:prstGeom>
-          <a:noFill/>
-          <a:ln/>
-        </p:spPr>
-        <p:txBody>
-          <a:bodyPr wrap="square" lIns="0" tIns="0" rIns="0" bIns="0" rtlCol="0" anchor="ctr"/>
-          <a:lstStyle/>
-          <a:p>
-            <a:pPr indent="0" marL="0">
-              <a:buNone/>
-            </a:pPr>
-            <a:r>
-              <a:rPr lang="en-US" sz="1500" b="1" dirty="0">
-                <a:solidFill>
-                  <a:srgbClr val="FFFFFF"/>
+              <a:t>Page 6 — Seasonality (NOAA)</a:t>
+            </a:r>
+            <a:endParaRPr lang="en-US" sz="1450" dirty="0"/>
+          </a:p>
+        </p:txBody>
+      </p:sp>
+      <p:sp>
+        <p:nvSpPr>
+          <p:cNvPr id="7" name="Text 5"/>
+          <p:cNvSpPr/>
+          <p:nvPr/>
+        </p:nvSpPr>
+        <p:spPr>
+          <a:xfrm>
+            <a:off x="777240" y="2203704"/>
+            <a:ext cx="5120640" cy="3383280"/>
+          </a:xfrm>
+          <a:prstGeom prst="rect">
+            <a:avLst/>
+          </a:prstGeom>
+          <a:noFill/>
+          <a:ln/>
+        </p:spPr>
+        <p:txBody>
+          <a:bodyPr wrap="square" lIns="0" tIns="0" rIns="0" bIns="0" rtlCol="0" anchor="t"/>
+          <a:lstStyle/>
+          <a:p>
+            <a:pPr marL="0" indent="0">
+              <a:buNone/>
+            </a:pPr>
+            <a:r>
+              <a:rPr lang="en-US" sz="1200" dirty="0">
+                <a:solidFill>
+                  <a:srgbClr val="595959"/>
+                </a:solidFill>
+                <a:latin typeface="Segoe UI" pitchFamily="34" charset="0"/>
+                <a:ea typeface="Segoe UI" pitchFamily="34" charset="-122"/>
+                <a:cs typeface="Segoe UI" pitchFamily="34" charset="-120"/>
+              </a:rPr>
+              <a:t>The 2nd external source: NOAA weather joined onto dim_date.</a:t>
+            </a:r>
+            <a:endParaRPr lang="en-US" sz="1200" dirty="0"/>
+          </a:p>
+          <a:p>
+            <a:pPr marL="0" indent="0">
+              <a:buNone/>
+            </a:pPr>
+            <a:endParaRPr lang="en-US" sz="1200" dirty="0"/>
+          </a:p>
+          <a:p>
+            <a:pPr marL="0" indent="0">
+              <a:buNone/>
+            </a:pPr>
+            <a:r>
+              <a:rPr lang="en-US" sz="1200" dirty="0">
+                <a:solidFill>
+                  <a:srgbClr val="595959"/>
+                </a:solidFill>
+                <a:latin typeface="Segoe UI" pitchFamily="34" charset="0"/>
+                <a:ea typeface="Segoe UI" pitchFamily="34" charset="-122"/>
+                <a:cs typeface="Segoe UI" pitchFamily="34" charset="-120"/>
+              </a:rPr>
+              <a:t>• Fall is the stress season: 2nd-highest volume (109k trips/day) with the worst lead time (18.46 min).</a:t>
+            </a:r>
+            <a:endParaRPr lang="en-US" sz="1200" dirty="0"/>
+          </a:p>
+          <a:p>
+            <a:pPr marL="0" indent="0">
+              <a:buNone/>
+            </a:pPr>
+            <a:endParaRPr lang="en-US" sz="1200" dirty="0"/>
+          </a:p>
+          <a:p>
+            <a:pPr marL="0" indent="0">
+              <a:buNone/>
+            </a:pPr>
+            <a:r>
+              <a:rPr lang="en-US" sz="1200" dirty="0">
+                <a:solidFill>
+                  <a:srgbClr val="595959"/>
+                </a:solidFill>
+                <a:latin typeface="Segoe UI" pitchFamily="34" charset="0"/>
+                <a:ea typeface="Segoe UI" pitchFamily="34" charset="-122"/>
+                <a:cs typeface="Segoe UI" pitchFamily="34" charset="-120"/>
+              </a:rPr>
+              <a:t>• +1.71 min vs the winter baseline — high volume × slow cycle = peak cost-to-serve.</a:t>
+            </a:r>
+            <a:endParaRPr lang="en-US" sz="1200" dirty="0"/>
+          </a:p>
+          <a:p>
+            <a:pPr marL="0" indent="0">
+              <a:buNone/>
+            </a:pPr>
+            <a:endParaRPr lang="en-US" sz="1200" dirty="0"/>
+          </a:p>
+          <a:p>
+            <a:pPr marL="0" indent="0">
+              <a:buNone/>
+            </a:pPr>
+            <a:r>
+              <a:rPr lang="en-US" sz="1200" dirty="0">
+                <a:solidFill>
+                  <a:srgbClr val="595959"/>
+                </a:solidFill>
+                <a:latin typeface="Segoe UI" pitchFamily="34" charset="0"/>
+                <a:ea typeface="Segoe UI" pitchFamily="34" charset="-122"/>
+                <a:cs typeface="Segoe UI" pitchFamily="34" charset="-120"/>
+              </a:rPr>
+              <a:t>• Spring is the true volume peak (113k trips/day) but operationally efficient (17.44 min).</a:t>
+            </a:r>
+            <a:endParaRPr lang="en-US" sz="1200" dirty="0"/>
+          </a:p>
+          <a:p>
+            <a:pPr marL="0" indent="0">
+              <a:buNone/>
+            </a:pPr>
+            <a:endParaRPr lang="en-US" sz="1200" dirty="0"/>
+          </a:p>
+          <a:p>
+            <a:pPr marL="0" indent="0">
+              <a:buNone/>
+            </a:pPr>
+            <a:r>
+              <a:rPr lang="en-US" sz="1200" dirty="0">
+                <a:solidFill>
+                  <a:srgbClr val="595959"/>
+                </a:solidFill>
+                <a:latin typeface="Segoe UI" pitchFamily="34" charset="0"/>
+                <a:ea typeface="Segoe UI" pitchFamily="34" charset="-122"/>
+                <a:cs typeface="Segoe UI" pitchFamily="34" charset="-120"/>
+              </a:rPr>
+              <a:t>• Winter = low demand + fastest cycle (16.75 min) → maintenance &amp; capacity window.</a:t>
+            </a:r>
+            <a:endParaRPr lang="en-US" sz="1200" dirty="0"/>
+          </a:p>
+        </p:txBody>
+      </p:sp>
+      <p:sp>
+        <p:nvSpPr>
+          <p:cNvPr id="8" name="Shape 6"/>
+          <p:cNvSpPr/>
+          <p:nvPr/>
+        </p:nvSpPr>
+        <p:spPr>
+          <a:xfrm>
+            <a:off x="6309360" y="1691640"/>
+            <a:ext cx="5303520" cy="4023360"/>
+          </a:xfrm>
+          <a:prstGeom prst="rect">
+            <a:avLst/>
+          </a:prstGeom>
+          <a:solidFill>
+            <a:srgbClr val="FFFFFF"/>
+          </a:solidFill>
+          <a:ln w="12700">
+            <a:solidFill>
+              <a:srgbClr val="E0E0E0"/>
+            </a:solidFill>
+            <a:prstDash val="solid"/>
+          </a:ln>
+          <a:effectLst>
+            <a:outerShdw blurRad="101600" dist="38100" dir="8100000" algn="bl" rotWithShape="0">
+              <a:srgbClr val="1F3864">
+                <a:alpha val="16000"/>
+              </a:srgbClr>
+            </a:outerShdw>
+          </a:effectLst>
+        </p:spPr>
+        <p:txBody>
+          <a:bodyPr/>
+          <a:lstStyle/>
+          <a:p>
+            <a:endParaRPr lang="pt-BR"/>
+          </a:p>
+        </p:txBody>
+      </p:sp>
+      <p:sp>
+        <p:nvSpPr>
+          <p:cNvPr id="9" name="Shape 7"/>
+          <p:cNvSpPr/>
+          <p:nvPr/>
+        </p:nvSpPr>
+        <p:spPr>
+          <a:xfrm>
+            <a:off x="6309360" y="1691640"/>
+            <a:ext cx="82296" cy="4023360"/>
+          </a:xfrm>
+          <a:prstGeom prst="rect">
+            <a:avLst/>
+          </a:prstGeom>
+          <a:solidFill>
+            <a:srgbClr val="22A06B"/>
+          </a:solidFill>
+          <a:ln/>
+        </p:spPr>
+        <p:txBody>
+          <a:bodyPr/>
+          <a:lstStyle/>
+          <a:p>
+            <a:endParaRPr lang="pt-BR"/>
+          </a:p>
+        </p:txBody>
+      </p:sp>
+      <p:sp>
+        <p:nvSpPr>
+          <p:cNvPr id="10" name="Text 8"/>
+          <p:cNvSpPr/>
+          <p:nvPr/>
+        </p:nvSpPr>
+        <p:spPr>
+          <a:xfrm>
+            <a:off x="6537960" y="1837944"/>
+            <a:ext cx="4937760" cy="320040"/>
+          </a:xfrm>
+          <a:prstGeom prst="rect">
+            <a:avLst/>
+          </a:prstGeom>
+          <a:noFill/>
+          <a:ln/>
+        </p:spPr>
+        <p:txBody>
+          <a:bodyPr wrap="square" lIns="0" tIns="0" rIns="0" bIns="0" rtlCol="0" anchor="ctr"/>
+          <a:lstStyle/>
+          <a:p>
+            <a:pPr marL="0" indent="0">
+              <a:buNone/>
+            </a:pPr>
+            <a:r>
+              <a:rPr lang="en-US" sz="1450" b="1" dirty="0">
+                <a:solidFill>
+                  <a:srgbClr val="1F3864"/>
                 </a:solidFill>
                 <a:latin typeface="Segoe UI Semibold" pitchFamily="34" charset="0"/>
                 <a:ea typeface="Segoe UI Semibold" pitchFamily="34" charset="-122"/>
                 <a:cs typeface="Segoe UI Semibold" pitchFamily="34" charset="-120"/>
               </a:rPr>
-              <a:t>Stable lead time (78% in 5–30 min)</a:t>
-            </a:r>
-            <a:endParaRPr lang="en-US" sz="1500" dirty="0"/>
-          </a:p>
-        </p:txBody>
-      </p:sp>
-      <p:sp>
-        <p:nvSpPr>
-          <p:cNvPr id="7" name="Text 5"/>
-          <p:cNvSpPr/>
-          <p:nvPr/>
-        </p:nvSpPr>
-        <p:spPr>
-          <a:xfrm>
-            <a:off x="7086600" y="1600200"/>
-            <a:ext cx="457200" cy="731520"/>
-          </a:xfrm>
-          <a:prstGeom prst="rect">
-            <a:avLst/>
-          </a:prstGeom>
-          <a:noFill/>
-          <a:ln/>
-        </p:spPr>
-        <p:txBody>
-          <a:bodyPr wrap="square" lIns="0" tIns="0" rIns="0" bIns="0" rtlCol="0" anchor="ctr"/>
-          <a:lstStyle/>
-          <a:p>
-            <a:pPr algn="ctr" indent="0" marL="0">
-              <a:buNone/>
-            </a:pPr>
-            <a:r>
-              <a:rPr lang="en-US" sz="1800" dirty="0">
-                <a:solidFill>
-                  <a:srgbClr val="5B9BD5"/>
-                </a:solidFill>
-                <a:latin typeface="Segoe UI Semibold" pitchFamily="34" charset="0"/>
-                <a:ea typeface="Segoe UI Semibold" pitchFamily="34" charset="-122"/>
-                <a:cs typeface="Segoe UI Semibold" pitchFamily="34" charset="-120"/>
-              </a:rPr>
-              <a:t>→</a:t>
-            </a:r>
-            <a:endParaRPr lang="en-US" sz="1800" dirty="0"/>
-          </a:p>
-        </p:txBody>
-      </p:sp>
-      <p:sp>
-        <p:nvSpPr>
-          <p:cNvPr id="8" name="Text 6"/>
-          <p:cNvSpPr/>
-          <p:nvPr/>
-        </p:nvSpPr>
-        <p:spPr>
-          <a:xfrm>
-            <a:off x="7589520" y="1600200"/>
-            <a:ext cx="4023360" cy="731520"/>
-          </a:xfrm>
-          <a:prstGeom prst="rect">
-            <a:avLst/>
-          </a:prstGeom>
-          <a:noFill/>
-          <a:ln/>
-        </p:spPr>
-        <p:txBody>
-          <a:bodyPr wrap="square" lIns="0" tIns="0" rIns="0" bIns="0" rtlCol="0" anchor="ctr"/>
-          <a:lstStyle/>
-          <a:p>
-            <a:pPr indent="0" marL="0">
-              <a:buNone/>
-            </a:pPr>
-            <a:r>
-              <a:rPr lang="en-US" sz="1300" dirty="0">
-                <a:solidFill>
-                  <a:srgbClr val="BDD7EE"/>
+              <a:t>Page 6 — Extreme weather</a:t>
+            </a:r>
+            <a:endParaRPr lang="en-US" sz="1450" dirty="0"/>
+          </a:p>
+        </p:txBody>
+      </p:sp>
+      <p:sp>
+        <p:nvSpPr>
+          <p:cNvPr id="11" name="Text 9"/>
+          <p:cNvSpPr/>
+          <p:nvPr/>
+        </p:nvSpPr>
+        <p:spPr>
+          <a:xfrm>
+            <a:off x="6537960" y="2203704"/>
+            <a:ext cx="4937760" cy="3383280"/>
+          </a:xfrm>
+          <a:prstGeom prst="rect">
+            <a:avLst/>
+          </a:prstGeom>
+          <a:noFill/>
+          <a:ln/>
+        </p:spPr>
+        <p:txBody>
+          <a:bodyPr wrap="square" lIns="0" tIns="0" rIns="0" bIns="0" rtlCol="0" anchor="t"/>
+          <a:lstStyle/>
+          <a:p>
+            <a:pPr marL="0" indent="0">
+              <a:buNone/>
+            </a:pPr>
+            <a:r>
+              <a:rPr lang="en-US" sz="1200" dirty="0">
+                <a:solidFill>
+                  <a:srgbClr val="595959"/>
                 </a:solidFill>
                 <a:latin typeface="Segoe UI" pitchFamily="34" charset="0"/>
                 <a:ea typeface="Segoe UI" pitchFamily="34" charset="-122"/>
                 <a:cs typeface="Segoe UI" pitchFamily="34" charset="-120"/>
               </a:rPr>
-              <a:t>Reliable forecast → lower safety stock</a:t>
-            </a:r>
-            <a:endParaRPr lang="en-US" sz="1300" dirty="0"/>
-          </a:p>
-        </p:txBody>
-      </p:sp>
-      <p:sp>
-        <p:nvSpPr>
-          <p:cNvPr id="9" name="Shape 7"/>
-          <p:cNvSpPr/>
-          <p:nvPr/>
-        </p:nvSpPr>
-        <p:spPr>
-          <a:xfrm>
-            <a:off x="548640" y="2633472"/>
-            <a:ext cx="548640" cy="548640"/>
-          </a:xfrm>
-          <a:prstGeom prst="ellipse">
-            <a:avLst/>
-          </a:prstGeom>
-          <a:solidFill>
-            <a:srgbClr val="27406E"/>
-          </a:solidFill>
-          <a:ln w="12700">
-            <a:solidFill>
-              <a:srgbClr val="5B9BD5"/>
-            </a:solidFill>
-            <a:prstDash val="solid"/>
-          </a:ln>
-        </p:spPr>
-      </p:sp>
-      <p:sp>
-        <p:nvSpPr>
-          <p:cNvPr id="10" name="Text 8"/>
-          <p:cNvSpPr/>
-          <p:nvPr/>
-        </p:nvSpPr>
-        <p:spPr>
-          <a:xfrm>
-            <a:off x="548640" y="2633472"/>
-            <a:ext cx="548640" cy="548640"/>
-          </a:xfrm>
-          <a:prstGeom prst="rect">
-            <a:avLst/>
-          </a:prstGeom>
-          <a:noFill/>
-          <a:ln/>
-        </p:spPr>
-        <p:txBody>
-          <a:bodyPr wrap="square" lIns="0" tIns="0" rIns="0" bIns="0" rtlCol="0" anchor="ctr"/>
-          <a:lstStyle/>
-          <a:p>
-            <a:pPr algn="ctr" indent="0" marL="0">
-              <a:buNone/>
-            </a:pPr>
-            <a:r>
-              <a:rPr lang="en-US" sz="1800" b="1" dirty="0">
-                <a:solidFill>
-                  <a:srgbClr val="FFFFFF"/>
-                </a:solidFill>
-                <a:latin typeface="Segoe UI Semibold" pitchFamily="34" charset="0"/>
-                <a:ea typeface="Segoe UI Semibold" pitchFamily="34" charset="-122"/>
-                <a:cs typeface="Segoe UI Semibold" pitchFamily="34" charset="-120"/>
-              </a:rPr>
-              <a:t>2</a:t>
-            </a:r>
-            <a:endParaRPr lang="en-US" sz="1800" dirty="0"/>
-          </a:p>
-        </p:txBody>
-      </p:sp>
-      <p:sp>
-        <p:nvSpPr>
-          <p:cNvPr id="11" name="Text 9"/>
-          <p:cNvSpPr/>
-          <p:nvPr/>
-        </p:nvSpPr>
-        <p:spPr>
-          <a:xfrm>
-            <a:off x="1325880" y="2542032"/>
-            <a:ext cx="5760720" cy="731520"/>
-          </a:xfrm>
-          <a:prstGeom prst="rect">
-            <a:avLst/>
-          </a:prstGeom>
-          <a:noFill/>
-          <a:ln/>
-        </p:spPr>
-        <p:txBody>
-          <a:bodyPr wrap="square" lIns="0" tIns="0" rIns="0" bIns="0" rtlCol="0" anchor="ctr"/>
-          <a:lstStyle/>
-          <a:p>
-            <a:pPr indent="0" marL="0">
-              <a:buNone/>
-            </a:pPr>
-            <a:r>
-              <a:rPr lang="en-US" sz="1500" b="1" dirty="0">
-                <a:solidFill>
-                  <a:srgbClr val="FFFFFF"/>
-                </a:solidFill>
-                <a:latin typeface="Segoe UI Semibold" pitchFamily="34" charset="0"/>
-                <a:ea typeface="Segoe UI Semibold" pitchFamily="34" charset="-122"/>
-                <a:cs typeface="Segoe UI Semibold" pitchFamily="34" charset="-120"/>
-              </a:rPr>
-              <a:t>Demand concentration (2 boroughs ≈ 93%)</a:t>
-            </a:r>
-            <a:endParaRPr lang="en-US" sz="1500" dirty="0"/>
-          </a:p>
-        </p:txBody>
-      </p:sp>
-      <p:sp>
-        <p:nvSpPr>
-          <p:cNvPr id="12" name="Text 10"/>
-          <p:cNvSpPr/>
-          <p:nvPr/>
-        </p:nvSpPr>
-        <p:spPr>
-          <a:xfrm>
-            <a:off x="7086600" y="2542032"/>
-            <a:ext cx="457200" cy="731520"/>
-          </a:xfrm>
-          <a:prstGeom prst="rect">
-            <a:avLst/>
-          </a:prstGeom>
-          <a:noFill/>
-          <a:ln/>
-        </p:spPr>
-        <p:txBody>
-          <a:bodyPr wrap="square" lIns="0" tIns="0" rIns="0" bIns="0" rtlCol="0" anchor="ctr"/>
-          <a:lstStyle/>
-          <a:p>
-            <a:pPr algn="ctr" indent="0" marL="0">
-              <a:buNone/>
-            </a:pPr>
-            <a:r>
-              <a:rPr lang="en-US" sz="1800" dirty="0">
-                <a:solidFill>
-                  <a:srgbClr val="5B9BD5"/>
-                </a:solidFill>
-                <a:latin typeface="Segoe UI Semibold" pitchFamily="34" charset="0"/>
-                <a:ea typeface="Segoe UI Semibold" pitchFamily="34" charset="-122"/>
-                <a:cs typeface="Segoe UI Semibold" pitchFamily="34" charset="-120"/>
-              </a:rPr>
-              <a:t>→</a:t>
-            </a:r>
-            <a:endParaRPr lang="en-US" sz="1800" dirty="0"/>
-          </a:p>
-        </p:txBody>
-      </p:sp>
-      <p:sp>
-        <p:nvSpPr>
-          <p:cNvPr id="13" name="Text 11"/>
-          <p:cNvSpPr/>
-          <p:nvPr/>
-        </p:nvSpPr>
-        <p:spPr>
-          <a:xfrm>
-            <a:off x="7589520" y="2542032"/>
-            <a:ext cx="4023360" cy="731520"/>
-          </a:xfrm>
-          <a:prstGeom prst="rect">
-            <a:avLst/>
-          </a:prstGeom>
-          <a:noFill/>
-          <a:ln/>
-        </p:spPr>
-        <p:txBody>
-          <a:bodyPr wrap="square" lIns="0" tIns="0" rIns="0" bIns="0" rtlCol="0" anchor="ctr"/>
-          <a:lstStyle/>
-          <a:p>
-            <a:pPr indent="0" marL="0">
-              <a:buNone/>
-            </a:pPr>
-            <a:r>
-              <a:rPr lang="en-US" sz="1300" dirty="0">
-                <a:solidFill>
-                  <a:srgbClr val="BDD7EE"/>
+              <a:t>Do external shocks change the operation?</a:t>
+            </a:r>
+            <a:endParaRPr lang="en-US" sz="1200" dirty="0"/>
+          </a:p>
+          <a:p>
+            <a:pPr marL="0" indent="0">
+              <a:buNone/>
+            </a:pPr>
+            <a:endParaRPr lang="en-US" sz="1200" dirty="0"/>
+          </a:p>
+          <a:p>
+            <a:pPr marL="0" indent="0">
+              <a:buNone/>
+            </a:pPr>
+            <a:r>
+              <a:rPr lang="en-US" sz="1200" dirty="0">
+                <a:solidFill>
+                  <a:srgbClr val="595959"/>
                 </a:solidFill>
                 <a:latin typeface="Segoe UI" pitchFamily="34" charset="0"/>
                 <a:ea typeface="Segoe UI" pitchFamily="34" charset="-122"/>
                 <a:cs typeface="Segoe UI" pitchFamily="34" charset="-120"/>
               </a:rPr>
-              <a:t>Network design / capacity placement</a:t>
-            </a:r>
-            <a:endParaRPr lang="en-US" sz="1300" dirty="0"/>
-          </a:p>
-        </p:txBody>
-      </p:sp>
-      <p:sp>
-        <p:nvSpPr>
-          <p:cNvPr id="14" name="Shape 12"/>
-          <p:cNvSpPr/>
-          <p:nvPr/>
-        </p:nvSpPr>
-        <p:spPr>
-          <a:xfrm>
-            <a:off x="548640" y="3575304"/>
-            <a:ext cx="548640" cy="548640"/>
-          </a:xfrm>
-          <a:prstGeom prst="ellipse">
-            <a:avLst/>
-          </a:prstGeom>
-          <a:solidFill>
-            <a:srgbClr val="27406E"/>
-          </a:solidFill>
-          <a:ln w="12700">
-            <a:solidFill>
-              <a:srgbClr val="5B9BD5"/>
-            </a:solidFill>
-            <a:prstDash val="solid"/>
-          </a:ln>
-        </p:spPr>
-      </p:sp>
-      <p:sp>
-        <p:nvSpPr>
-          <p:cNvPr id="15" name="Text 13"/>
-          <p:cNvSpPr/>
-          <p:nvPr/>
-        </p:nvSpPr>
-        <p:spPr>
-          <a:xfrm>
-            <a:off x="548640" y="3575304"/>
-            <a:ext cx="548640" cy="548640"/>
-          </a:xfrm>
-          <a:prstGeom prst="rect">
-            <a:avLst/>
-          </a:prstGeom>
-          <a:noFill/>
-          <a:ln/>
-        </p:spPr>
-        <p:txBody>
-          <a:bodyPr wrap="square" lIns="0" tIns="0" rIns="0" bIns="0" rtlCol="0" anchor="ctr"/>
-          <a:lstStyle/>
-          <a:p>
-            <a:pPr algn="ctr" indent="0" marL="0">
-              <a:buNone/>
-            </a:pPr>
-            <a:r>
-              <a:rPr lang="en-US" sz="1800" b="1" dirty="0">
-                <a:solidFill>
-                  <a:srgbClr val="FFFFFF"/>
-                </a:solidFill>
-                <a:latin typeface="Segoe UI Semibold" pitchFamily="34" charset="0"/>
-                <a:ea typeface="Segoe UI Semibold" pitchFamily="34" charset="-122"/>
-                <a:cs typeface="Segoe UI Semibold" pitchFamily="34" charset="-120"/>
-              </a:rPr>
-              <a:t>3</a:t>
-            </a:r>
-            <a:endParaRPr lang="en-US" sz="1800" dirty="0"/>
-          </a:p>
-        </p:txBody>
-      </p:sp>
-      <p:sp>
-        <p:nvSpPr>
-          <p:cNvPr id="16" name="Text 14"/>
-          <p:cNvSpPr/>
-          <p:nvPr/>
-        </p:nvSpPr>
-        <p:spPr>
-          <a:xfrm>
-            <a:off x="1325880" y="3483864"/>
-            <a:ext cx="5760720" cy="731520"/>
-          </a:xfrm>
-          <a:prstGeom prst="rect">
-            <a:avLst/>
-          </a:prstGeom>
-          <a:noFill/>
-          <a:ln/>
-        </p:spPr>
-        <p:txBody>
-          <a:bodyPr wrap="square" lIns="0" tIns="0" rIns="0" bIns="0" rtlCol="0" anchor="ctr"/>
-          <a:lstStyle/>
-          <a:p>
-            <a:pPr indent="0" marL="0">
-              <a:buNone/>
-            </a:pPr>
-            <a:r>
-              <a:rPr lang="en-US" sz="1500" b="1" dirty="0">
-                <a:solidFill>
-                  <a:srgbClr val="FFFFFF"/>
-                </a:solidFill>
-                <a:latin typeface="Segoe UI Semibold" pitchFamily="34" charset="0"/>
-                <a:ea typeface="Segoe UI Semibold" pitchFamily="34" charset="-122"/>
-                <a:cs typeface="Segoe UI Semibold" pitchFamily="34" charset="-120"/>
-              </a:rPr>
-              <a:t>Over- vs under-served boroughs</a:t>
-            </a:r>
-            <a:endParaRPr lang="en-US" sz="1500" dirty="0"/>
-          </a:p>
-        </p:txBody>
-      </p:sp>
-      <p:sp>
-        <p:nvSpPr>
-          <p:cNvPr id="17" name="Text 15"/>
-          <p:cNvSpPr/>
-          <p:nvPr/>
-        </p:nvSpPr>
-        <p:spPr>
-          <a:xfrm>
-            <a:off x="7086600" y="3483864"/>
-            <a:ext cx="457200" cy="731520"/>
-          </a:xfrm>
-          <a:prstGeom prst="rect">
-            <a:avLst/>
-          </a:prstGeom>
-          <a:noFill/>
-          <a:ln/>
-        </p:spPr>
-        <p:txBody>
-          <a:bodyPr wrap="square" lIns="0" tIns="0" rIns="0" bIns="0" rtlCol="0" anchor="ctr"/>
-          <a:lstStyle/>
-          <a:p>
-            <a:pPr algn="ctr" indent="0" marL="0">
-              <a:buNone/>
-            </a:pPr>
-            <a:r>
-              <a:rPr lang="en-US" sz="1800" dirty="0">
-                <a:solidFill>
-                  <a:srgbClr val="5B9BD5"/>
-                </a:solidFill>
-                <a:latin typeface="Segoe UI Semibold" pitchFamily="34" charset="0"/>
-                <a:ea typeface="Segoe UI Semibold" pitchFamily="34" charset="-122"/>
-                <a:cs typeface="Segoe UI Semibold" pitchFamily="34" charset="-120"/>
-              </a:rPr>
-              <a:t>→</a:t>
-            </a:r>
-            <a:endParaRPr lang="en-US" sz="1800" dirty="0"/>
-          </a:p>
-        </p:txBody>
-      </p:sp>
-      <p:sp>
-        <p:nvSpPr>
-          <p:cNvPr id="18" name="Text 16"/>
-          <p:cNvSpPr/>
-          <p:nvPr/>
-        </p:nvSpPr>
-        <p:spPr>
-          <a:xfrm>
-            <a:off x="7589520" y="3483864"/>
-            <a:ext cx="4023360" cy="731520"/>
-          </a:xfrm>
-          <a:prstGeom prst="rect">
-            <a:avLst/>
-          </a:prstGeom>
-          <a:noFill/>
-          <a:ln/>
-        </p:spPr>
-        <p:txBody>
-          <a:bodyPr wrap="square" lIns="0" tIns="0" rIns="0" bIns="0" rtlCol="0" anchor="ctr"/>
-          <a:lstStyle/>
-          <a:p>
-            <a:pPr indent="0" marL="0">
-              <a:buNone/>
-            </a:pPr>
-            <a:r>
-              <a:rPr lang="en-US" sz="1300" dirty="0">
-                <a:solidFill>
-                  <a:srgbClr val="BDD7EE"/>
+              <a:t>• Only 4 extreme days in 1,096 — but demand drops 36% (106k → 68k trips/day).</a:t>
+            </a:r>
+            <a:endParaRPr lang="en-US" sz="1200" dirty="0"/>
+          </a:p>
+          <a:p>
+            <a:pPr marL="0" indent="0">
+              <a:buNone/>
+            </a:pPr>
+            <a:endParaRPr lang="en-US" sz="1200" dirty="0"/>
+          </a:p>
+          <a:p>
+            <a:pPr marL="0" indent="0">
+              <a:buNone/>
+            </a:pPr>
+            <a:r>
+              <a:rPr lang="en-US" sz="1200" dirty="0">
+                <a:solidFill>
+                  <a:srgbClr val="595959"/>
                 </a:solidFill>
                 <a:latin typeface="Segoe UI" pitchFamily="34" charset="0"/>
                 <a:ea typeface="Segoe UI" pitchFamily="34" charset="-122"/>
                 <a:cs typeface="Segoe UI" pitchFamily="34" charset="-120"/>
               </a:rPr>
-              <a:t>Where to expand the market</a:t>
-            </a:r>
-            <a:endParaRPr lang="en-US" sz="1300" dirty="0"/>
-          </a:p>
-        </p:txBody>
-      </p:sp>
-      <p:sp>
-        <p:nvSpPr>
-          <p:cNvPr id="19" name="Shape 17"/>
-          <p:cNvSpPr/>
-          <p:nvPr/>
-        </p:nvSpPr>
-        <p:spPr>
-          <a:xfrm>
-            <a:off x="548640" y="4517136"/>
-            <a:ext cx="548640" cy="548640"/>
-          </a:xfrm>
-          <a:prstGeom prst="ellipse">
-            <a:avLst/>
-          </a:prstGeom>
-          <a:solidFill>
-            <a:srgbClr val="27406E"/>
-          </a:solidFill>
-          <a:ln w="12700">
-            <a:solidFill>
-              <a:srgbClr val="5B9BD5"/>
-            </a:solidFill>
-            <a:prstDash val="solid"/>
-          </a:ln>
-        </p:spPr>
-      </p:sp>
-      <p:sp>
-        <p:nvSpPr>
-          <p:cNvPr id="20" name="Text 18"/>
-          <p:cNvSpPr/>
-          <p:nvPr/>
-        </p:nvSpPr>
-        <p:spPr>
-          <a:xfrm>
-            <a:off x="548640" y="4517136"/>
-            <a:ext cx="548640" cy="548640"/>
-          </a:xfrm>
-          <a:prstGeom prst="rect">
-            <a:avLst/>
-          </a:prstGeom>
-          <a:noFill/>
-          <a:ln/>
-        </p:spPr>
-        <p:txBody>
-          <a:bodyPr wrap="square" lIns="0" tIns="0" rIns="0" bIns="0" rtlCol="0" anchor="ctr"/>
-          <a:lstStyle/>
-          <a:p>
-            <a:pPr algn="ctr" indent="0" marL="0">
-              <a:buNone/>
-            </a:pPr>
-            <a:r>
-              <a:rPr lang="en-US" sz="1800" b="1" dirty="0">
-                <a:solidFill>
-                  <a:srgbClr val="FFFFFF"/>
-                </a:solidFill>
-                <a:latin typeface="Segoe UI Semibold" pitchFamily="34" charset="0"/>
-                <a:ea typeface="Segoe UI Semibold" pitchFamily="34" charset="-122"/>
-                <a:cs typeface="Segoe UI Semibold" pitchFamily="34" charset="-120"/>
-              </a:rPr>
-              <a:t>4</a:t>
-            </a:r>
-            <a:endParaRPr lang="en-US" sz="1800" dirty="0"/>
-          </a:p>
-        </p:txBody>
-      </p:sp>
-      <p:sp>
-        <p:nvSpPr>
-          <p:cNvPr id="21" name="Text 19"/>
-          <p:cNvSpPr/>
-          <p:nvPr/>
-        </p:nvSpPr>
-        <p:spPr>
-          <a:xfrm>
-            <a:off x="1325880" y="4425696"/>
-            <a:ext cx="5760720" cy="731520"/>
-          </a:xfrm>
-          <a:prstGeom prst="rect">
-            <a:avLst/>
-          </a:prstGeom>
-          <a:noFill/>
-          <a:ln/>
-        </p:spPr>
-        <p:txBody>
-          <a:bodyPr wrap="square" lIns="0" tIns="0" rIns="0" bIns="0" rtlCol="0" anchor="ctr"/>
-          <a:lstStyle/>
-          <a:p>
-            <a:pPr indent="0" marL="0">
-              <a:buNone/>
-            </a:pPr>
-            <a:r>
-              <a:rPr lang="en-US" sz="1500" b="1" dirty="0">
-                <a:solidFill>
-                  <a:srgbClr val="FFFFFF"/>
-                </a:solidFill>
-                <a:latin typeface="Segoe UI Semibold" pitchFamily="34" charset="0"/>
-                <a:ea typeface="Segoe UI Semibold" pitchFamily="34" charset="-122"/>
-                <a:cs typeface="Segoe UI Semibold" pitchFamily="34" charset="-120"/>
-              </a:rPr>
-              <a:t>Two anomaly profiles (airports vs core)</a:t>
-            </a:r>
-            <a:endParaRPr lang="en-US" sz="1500" dirty="0"/>
-          </a:p>
-        </p:txBody>
-      </p:sp>
-      <p:sp>
-        <p:nvSpPr>
-          <p:cNvPr id="22" name="Text 20"/>
-          <p:cNvSpPr/>
-          <p:nvPr/>
-        </p:nvSpPr>
-        <p:spPr>
-          <a:xfrm>
-            <a:off x="7086600" y="4425696"/>
-            <a:ext cx="457200" cy="731520"/>
-          </a:xfrm>
-          <a:prstGeom prst="rect">
-            <a:avLst/>
-          </a:prstGeom>
-          <a:noFill/>
-          <a:ln/>
-        </p:spPr>
-        <p:txBody>
-          <a:bodyPr wrap="square" lIns="0" tIns="0" rIns="0" bIns="0" rtlCol="0" anchor="ctr"/>
-          <a:lstStyle/>
-          <a:p>
-            <a:pPr algn="ctr" indent="0" marL="0">
-              <a:buNone/>
-            </a:pPr>
-            <a:r>
-              <a:rPr lang="en-US" sz="1800" dirty="0">
-                <a:solidFill>
-                  <a:srgbClr val="5B9BD5"/>
-                </a:solidFill>
-                <a:latin typeface="Segoe UI Semibold" pitchFamily="34" charset="0"/>
-                <a:ea typeface="Segoe UI Semibold" pitchFamily="34" charset="-122"/>
-                <a:cs typeface="Segoe UI Semibold" pitchFamily="34" charset="-120"/>
-              </a:rPr>
-              <a:t>→</a:t>
-            </a:r>
-            <a:endParaRPr lang="en-US" sz="1800" dirty="0"/>
-          </a:p>
-        </p:txBody>
-      </p:sp>
-      <p:sp>
-        <p:nvSpPr>
-          <p:cNvPr id="23" name="Text 21"/>
-          <p:cNvSpPr/>
-          <p:nvPr/>
-        </p:nvSpPr>
-        <p:spPr>
-          <a:xfrm>
-            <a:off x="7589520" y="4425696"/>
-            <a:ext cx="4023360" cy="731520"/>
-          </a:xfrm>
-          <a:prstGeom prst="rect">
-            <a:avLst/>
-          </a:prstGeom>
-          <a:noFill/>
-          <a:ln/>
-        </p:spPr>
-        <p:txBody>
-          <a:bodyPr wrap="square" lIns="0" tIns="0" rIns="0" bIns="0" rtlCol="0" anchor="ctr"/>
-          <a:lstStyle/>
-          <a:p>
-            <a:pPr indent="0" marL="0">
-              <a:buNone/>
-            </a:pPr>
-            <a:r>
-              <a:rPr lang="en-US" sz="1300" dirty="0">
-                <a:solidFill>
-                  <a:srgbClr val="BDD7EE"/>
+              <a:t>• Counter-intuitively, lead time gets ~3.8 min faster and the average fare falls.</a:t>
+            </a:r>
+            <a:endParaRPr lang="en-US" sz="1200" dirty="0"/>
+          </a:p>
+          <a:p>
+            <a:pPr marL="0" indent="0">
+              <a:buNone/>
+            </a:pPr>
+            <a:endParaRPr lang="en-US" sz="1200" dirty="0"/>
+          </a:p>
+          <a:p>
+            <a:pPr marL="0" indent="0">
+              <a:buNone/>
+            </a:pPr>
+            <a:r>
+              <a:rPr lang="en-US" sz="1200" dirty="0">
+                <a:solidFill>
+                  <a:srgbClr val="595959"/>
                 </a:solidFill>
                 <a:latin typeface="Segoe UI" pitchFamily="34" charset="0"/>
                 <a:ea typeface="Segoe UI" pitchFamily="34" charset="-122"/>
                 <a:cs typeface="Segoe UI" pitchFamily="34" charset="-120"/>
               </a:rPr>
-              <a:t>Tailored exception management</a:t>
-            </a:r>
-            <a:endParaRPr lang="en-US" sz="1300" dirty="0"/>
-          </a:p>
-        </p:txBody>
-      </p:sp>
-      <p:sp>
-        <p:nvSpPr>
-          <p:cNvPr id="24" name="Shape 22"/>
-          <p:cNvSpPr/>
-          <p:nvPr/>
-        </p:nvSpPr>
-        <p:spPr>
-          <a:xfrm>
-            <a:off x="548640" y="5458968"/>
-            <a:ext cx="548640" cy="548640"/>
-          </a:xfrm>
-          <a:prstGeom prst="ellipse">
-            <a:avLst/>
-          </a:prstGeom>
-          <a:solidFill>
-            <a:srgbClr val="27406E"/>
-          </a:solidFill>
-          <a:ln w="12700">
-            <a:solidFill>
-              <a:srgbClr val="5B9BD5"/>
-            </a:solidFill>
-            <a:prstDash val="solid"/>
-          </a:ln>
-        </p:spPr>
-      </p:sp>
-      <p:sp>
-        <p:nvSpPr>
-          <p:cNvPr id="25" name="Text 23"/>
-          <p:cNvSpPr/>
-          <p:nvPr/>
-        </p:nvSpPr>
-        <p:spPr>
-          <a:xfrm>
-            <a:off x="548640" y="5458968"/>
-            <a:ext cx="548640" cy="548640"/>
-          </a:xfrm>
-          <a:prstGeom prst="rect">
-            <a:avLst/>
-          </a:prstGeom>
-          <a:noFill/>
-          <a:ln/>
-        </p:spPr>
-        <p:txBody>
-          <a:bodyPr wrap="square" lIns="0" tIns="0" rIns="0" bIns="0" rtlCol="0" anchor="ctr"/>
-          <a:lstStyle/>
-          <a:p>
-            <a:pPr algn="ctr" indent="0" marL="0">
-              <a:buNone/>
-            </a:pPr>
-            <a:r>
-              <a:rPr lang="en-US" sz="1800" b="1" dirty="0">
-                <a:solidFill>
-                  <a:srgbClr val="FFFFFF"/>
-                </a:solidFill>
-                <a:latin typeface="Segoe UI Semibold" pitchFamily="34" charset="0"/>
-                <a:ea typeface="Segoe UI Semibold" pitchFamily="34" charset="-122"/>
-                <a:cs typeface="Segoe UI Semibold" pitchFamily="34" charset="-120"/>
-              </a:rPr>
-              <a:t>5</a:t>
-            </a:r>
-            <a:endParaRPr lang="en-US" sz="1800" dirty="0"/>
-          </a:p>
-        </p:txBody>
-      </p:sp>
-      <p:sp>
-        <p:nvSpPr>
-          <p:cNvPr id="26" name="Text 24"/>
-          <p:cNvSpPr/>
-          <p:nvPr/>
-        </p:nvSpPr>
-        <p:spPr>
-          <a:xfrm>
-            <a:off x="1325880" y="5367528"/>
-            <a:ext cx="5760720" cy="731520"/>
-          </a:xfrm>
-          <a:prstGeom prst="rect">
-            <a:avLst/>
-          </a:prstGeom>
-          <a:noFill/>
-          <a:ln/>
-        </p:spPr>
-        <p:txBody>
-          <a:bodyPr wrap="square" lIns="0" tIns="0" rIns="0" bIns="0" rtlCol="0" anchor="ctr"/>
-          <a:lstStyle/>
-          <a:p>
-            <a:pPr indent="0" marL="0">
-              <a:buNone/>
-            </a:pPr>
-            <a:r>
-              <a:rPr lang="en-US" sz="1500" b="1" dirty="0">
-                <a:solidFill>
-                  <a:srgbClr val="FFFFFF"/>
-                </a:solidFill>
-                <a:latin typeface="Segoe UI Semibold" pitchFamily="34" charset="0"/>
-                <a:ea typeface="Segoe UI Semibold" pitchFamily="34" charset="-122"/>
-                <a:cs typeface="Segoe UI Semibold" pitchFamily="34" charset="-120"/>
-              </a:rPr>
-              <a:t>Seasonal &amp; weather stress (NOAA)</a:t>
-            </a:r>
-            <a:endParaRPr lang="en-US" sz="1500" dirty="0"/>
-          </a:p>
-        </p:txBody>
-      </p:sp>
-      <p:sp>
-        <p:nvSpPr>
-          <p:cNvPr id="27" name="Text 25"/>
-          <p:cNvSpPr/>
-          <p:nvPr/>
-        </p:nvSpPr>
-        <p:spPr>
-          <a:xfrm>
-            <a:off x="7086600" y="5367528"/>
-            <a:ext cx="457200" cy="731520"/>
-          </a:xfrm>
-          <a:prstGeom prst="rect">
-            <a:avLst/>
-          </a:prstGeom>
-          <a:noFill/>
-          <a:ln/>
-        </p:spPr>
-        <p:txBody>
-          <a:bodyPr wrap="square" lIns="0" tIns="0" rIns="0" bIns="0" rtlCol="0" anchor="ctr"/>
-          <a:lstStyle/>
-          <a:p>
-            <a:pPr algn="ctr" indent="0" marL="0">
-              <a:buNone/>
-            </a:pPr>
-            <a:r>
-              <a:rPr lang="en-US" sz="1800" dirty="0">
-                <a:solidFill>
-                  <a:srgbClr val="5B9BD5"/>
-                </a:solidFill>
-                <a:latin typeface="Segoe UI Semibold" pitchFamily="34" charset="0"/>
-                <a:ea typeface="Segoe UI Semibold" pitchFamily="34" charset="-122"/>
-                <a:cs typeface="Segoe UI Semibold" pitchFamily="34" charset="-120"/>
-              </a:rPr>
-              <a:t>→</a:t>
-            </a:r>
-            <a:endParaRPr lang="en-US" sz="1800" dirty="0"/>
-          </a:p>
-        </p:txBody>
-      </p:sp>
-      <p:sp>
-        <p:nvSpPr>
-          <p:cNvPr id="28" name="Text 26"/>
-          <p:cNvSpPr/>
-          <p:nvPr/>
-        </p:nvSpPr>
-        <p:spPr>
-          <a:xfrm>
-            <a:off x="7589520" y="5367528"/>
-            <a:ext cx="4023360" cy="731520"/>
-          </a:xfrm>
-          <a:prstGeom prst="rect">
-            <a:avLst/>
-          </a:prstGeom>
-          <a:noFill/>
-          <a:ln/>
-        </p:spPr>
-        <p:txBody>
-          <a:bodyPr wrap="square" lIns="0" tIns="0" rIns="0" bIns="0" rtlCol="0" anchor="ctr"/>
-          <a:lstStyle/>
-          <a:p>
-            <a:pPr indent="0" marL="0">
-              <a:buNone/>
-            </a:pPr>
-            <a:r>
-              <a:rPr lang="en-US" sz="1300" dirty="0">
-                <a:solidFill>
-                  <a:srgbClr val="BDD7EE"/>
+              <a:t>• Demand self-selection: only the essential trips remain, and with less traffic the cycle shortens.</a:t>
+            </a:r>
+            <a:endParaRPr lang="en-US" sz="1200" dirty="0"/>
+          </a:p>
+          <a:p>
+            <a:pPr marL="0" indent="0">
+              <a:buNone/>
+            </a:pPr>
+            <a:endParaRPr lang="en-US" sz="1200" dirty="0"/>
+          </a:p>
+          <a:p>
+            <a:pPr marL="0" indent="0">
+              <a:buNone/>
+            </a:pPr>
+            <a:r>
+              <a:rPr lang="en-US" sz="1200" dirty="0">
+                <a:solidFill>
+                  <a:srgbClr val="595959"/>
                 </a:solidFill>
                 <a:latin typeface="Segoe UI" pitchFamily="34" charset="0"/>
                 <a:ea typeface="Segoe UI" pitchFamily="34" charset="-122"/>
                 <a:cs typeface="Segoe UI" pitchFamily="34" charset="-120"/>
               </a:rPr>
-              <a:t>Capacity planning &amp; disruption readiness</a:t>
-            </a:r>
-            <a:endParaRPr lang="en-US" sz="1300" dirty="0"/>
+              <a:t>Supply-chain parallel: a disruption that cuts volume but reshapes the network.</a:t>
+            </a:r>
+            <a:endParaRPr lang="en-US" sz="1200" dirty="0"/>
+          </a:p>
+        </p:txBody>
+      </p:sp>
+      <p:sp>
+        <p:nvSpPr>
+          <p:cNvPr id="12" name="Text 10"/>
+          <p:cNvSpPr/>
+          <p:nvPr/>
+        </p:nvSpPr>
+        <p:spPr>
+          <a:xfrm>
+            <a:off x="548640" y="6455664"/>
+            <a:ext cx="7315200" cy="274320"/>
+          </a:xfrm>
+          <a:prstGeom prst="rect">
+            <a:avLst/>
+          </a:prstGeom>
+          <a:noFill/>
+          <a:ln/>
+        </p:spPr>
+        <p:txBody>
+          <a:bodyPr wrap="square" lIns="0" tIns="0" rIns="0" bIns="0" rtlCol="0" anchor="ctr"/>
+          <a:lstStyle/>
+          <a:p>
+            <a:pPr marL="0" indent="0">
+              <a:buNone/>
+            </a:pPr>
+            <a:r>
+              <a:rPr lang="en-US" sz="900" dirty="0">
+                <a:solidFill>
+                  <a:srgbClr val="808080"/>
+                </a:solidFill>
+                <a:latin typeface="Segoe UI" pitchFamily="34" charset="0"/>
+                <a:ea typeface="Segoe UI" pitchFamily="34" charset="-122"/>
+                <a:cs typeface="Segoe UI" pitchFamily="34" charset="-120"/>
+              </a:rPr>
+              <a:t>NYC TLC Yellow Taxi  ·  3M Technical Case</a:t>
+            </a:r>
+            <a:endParaRPr lang="en-US" sz="900" dirty="0"/>
+          </a:p>
+        </p:txBody>
+      </p:sp>
+      <p:sp>
+        <p:nvSpPr>
+          <p:cNvPr id="13" name="Text 11"/>
+          <p:cNvSpPr/>
+          <p:nvPr/>
+        </p:nvSpPr>
+        <p:spPr>
+          <a:xfrm>
+            <a:off x="11430000" y="6455664"/>
+            <a:ext cx="365760" cy="274320"/>
+          </a:xfrm>
+          <a:prstGeom prst="rect">
+            <a:avLst/>
+          </a:prstGeom>
+          <a:noFill/>
+          <a:ln/>
+        </p:spPr>
+        <p:txBody>
+          <a:bodyPr wrap="square" lIns="0" tIns="0" rIns="0" bIns="0" rtlCol="0" anchor="ctr"/>
+          <a:lstStyle/>
+          <a:p>
+            <a:pPr marL="0" indent="0" algn="r">
+              <a:buNone/>
+            </a:pPr>
+            <a:r>
+              <a:rPr lang="en-US" sz="900" dirty="0">
+                <a:solidFill>
+                  <a:srgbClr val="808080"/>
+                </a:solidFill>
+                <a:latin typeface="Segoe UI" pitchFamily="34" charset="0"/>
+                <a:ea typeface="Segoe UI" pitchFamily="34" charset="-122"/>
+                <a:cs typeface="Segoe UI" pitchFamily="34" charset="-120"/>
+              </a:rPr>
+              <a:t>13</a:t>
+            </a:r>
+            <a:endParaRPr lang="en-US" sz="900" dirty="0"/>
           </a:p>
         </p:txBody>
       </p:sp>
@@ -5798,12 +5343,13 @@
 
 <file path=ppt/slides/slide14.xml><?xml version="1.0" encoding="utf-8"?>
 <p:sld xmlns:a="http://schemas.openxmlformats.org/drawingml/2006/main" xmlns:r="http://schemas.openxmlformats.org/officeDocument/2006/relationships" xmlns:p="http://schemas.openxmlformats.org/presentationml/2006/main">
-  <p:cSld name="Slide 14">
+  <p:cSld name="Slide 13">
     <p:bg>
       <p:bgPr>
         <a:solidFill>
           <a:srgbClr val="1F3864"/>
         </a:solidFill>
+        <a:effectLst/>
       </p:bgPr>
     </p:bg>
     <p:spTree>
@@ -5841,11 +5387,11 @@
           <a:bodyPr wrap="square" lIns="0" tIns="0" rIns="0" bIns="0" rtlCol="0" anchor="ctr"/>
           <a:lstStyle/>
           <a:p>
-            <a:pPr indent="0" marL="0">
-              <a:buNone/>
-            </a:pPr>
-            <a:r>
-              <a:rPr lang="en-US" sz="1250" b="1" spc="200" kern="0" dirty="0">
+            <a:pPr marL="0" indent="0">
+              <a:buNone/>
+            </a:pPr>
+            <a:r>
+              <a:rPr lang="en-US" sz="1250" b="1" kern="0" spc="200" dirty="0">
                 <a:solidFill>
                   <a:srgbClr val="5B9BD5"/>
                 </a:solidFill>
@@ -5853,7 +5399,7 @@
                 <a:ea typeface="Segoe UI" pitchFamily="34" charset="-122"/>
                 <a:cs typeface="Segoe UI" pitchFamily="34" charset="-120"/>
               </a:rPr>
-              <a:t>08 · NEXT STEPS</a:t>
+              <a:t>07 · KEY INSIGHTS</a:t>
             </a:r>
             <a:endParaRPr lang="en-US" sz="1250" dirty="0"/>
           </a:p>
@@ -5880,7 +5426,7 @@
           <a:bodyPr wrap="square" lIns="0" tIns="0" rIns="0" bIns="0" rtlCol="0" anchor="ctr"/>
           <a:lstStyle/>
           <a:p>
-            <a:pPr indent="0" marL="0">
+            <a:pPr marL="0" indent="0">
               <a:buNone/>
             </a:pPr>
             <a:r>
@@ -5892,7 +5438,7 @@
                 <a:ea typeface="Segoe UI Semibold" pitchFamily="34" charset="-122"/>
                 <a:cs typeface="Segoe UI Semibold" pitchFamily="34" charset="-120"/>
               </a:rPr>
-              <a:t>Where I'd take this next</a:t>
+              <a:t>Translated to supply-chain decisions</a:t>
             </a:r>
             <a:endParaRPr lang="en-US" sz="2900" dirty="0"/>
           </a:p>
@@ -5906,10 +5452,10 @@
         </p:nvSpPr>
         <p:spPr>
           <a:xfrm>
-            <a:off x="548640" y="1645920"/>
-            <a:ext cx="5440680" cy="822960"/>
-          </a:xfrm>
-          <a:prstGeom prst="rect">
+            <a:off x="548640" y="1691640"/>
+            <a:ext cx="548640" cy="548640"/>
+          </a:xfrm>
+          <a:prstGeom prst="ellipse">
             <a:avLst/>
           </a:prstGeom>
           <a:solidFill>
@@ -5917,11 +5463,18 @@
           </a:solidFill>
           <a:ln w="12700">
             <a:solidFill>
-              <a:srgbClr val="3A5488"/>
+              <a:srgbClr val="5B9BD5"/>
             </a:solidFill>
             <a:prstDash val="solid"/>
           </a:ln>
         </p:spPr>
+        <p:txBody>
+          <a:bodyPr/>
+          <a:lstStyle/>
+          <a:p>
+            <a:endParaRPr lang="pt-BR"/>
+          </a:p>
+        </p:txBody>
       </p:sp>
       <p:sp>
         <p:nvSpPr>
@@ -5931,24 +5484,24 @@
         </p:nvSpPr>
         <p:spPr>
           <a:xfrm>
-            <a:off x="777240" y="1755648"/>
-            <a:ext cx="5029200" cy="320040"/>
-          </a:xfrm>
-          <a:prstGeom prst="rect">
-            <a:avLst/>
-          </a:prstGeom>
-          <a:noFill/>
-          <a:ln/>
-        </p:spPr>
-        <p:txBody>
-          <a:bodyPr wrap="square" lIns="0" tIns="0" rIns="0" bIns="0" rtlCol="0" anchor="ctr"/>
-          <a:lstStyle/>
-          <a:p>
-            <a:pPr indent="0" marL="0">
-              <a:buNone/>
-            </a:pPr>
-            <a:r>
-              <a:rPr lang="en-US" sz="1400" b="1" dirty="0">
+            <a:off x="548640" y="1691640"/>
+            <a:ext cx="548640" cy="548640"/>
+          </a:xfrm>
+          <a:prstGeom prst="rect">
+            <a:avLst/>
+          </a:prstGeom>
+          <a:noFill/>
+          <a:ln/>
+        </p:spPr>
+        <p:txBody>
+          <a:bodyPr wrap="square" lIns="0" tIns="0" rIns="0" bIns="0" rtlCol="0" anchor="ctr"/>
+          <a:lstStyle/>
+          <a:p>
+            <a:pPr marL="0" indent="0" algn="ctr">
+              <a:buNone/>
+            </a:pPr>
+            <a:r>
+              <a:rPr lang="en-US" sz="1800" b="1" dirty="0">
                 <a:solidFill>
                   <a:srgbClr val="FFFFFF"/>
                 </a:solidFill>
@@ -5956,9 +5509,9 @@
                 <a:ea typeface="Segoe UI Semibold" pitchFamily="34" charset="-122"/>
                 <a:cs typeface="Segoe UI Semibold" pitchFamily="34" charset="-120"/>
               </a:rPr>
-              <a:t>Real-time refresh</a:t>
-            </a:r>
-            <a:endParaRPr lang="en-US" sz="1400" dirty="0"/>
+              <a:t>1</a:t>
+            </a:r>
+            <a:endParaRPr lang="en-US" sz="1800" dirty="0"/>
           </a:p>
         </p:txBody>
       </p:sp>
@@ -5970,24 +5523,102 @@
         </p:nvSpPr>
         <p:spPr>
           <a:xfrm>
-            <a:off x="777240" y="2084832"/>
-            <a:ext cx="5029200" cy="320040"/>
-          </a:xfrm>
-          <a:prstGeom prst="rect">
-            <a:avLst/>
-          </a:prstGeom>
-          <a:noFill/>
-          <a:ln/>
-        </p:spPr>
-        <p:txBody>
-          <a:bodyPr wrap="square" lIns="0" tIns="0" rIns="0" bIns="0" rtlCol="0" anchor="ctr"/>
-          <a:lstStyle/>
-          <a:p>
-            <a:pPr indent="0" marL="0">
-              <a:buNone/>
-            </a:pPr>
-            <a:r>
-              <a:rPr lang="en-US" sz="1150" dirty="0">
+            <a:off x="1325880" y="1600200"/>
+            <a:ext cx="5760720" cy="731520"/>
+          </a:xfrm>
+          <a:prstGeom prst="rect">
+            <a:avLst/>
+          </a:prstGeom>
+          <a:noFill/>
+          <a:ln/>
+        </p:spPr>
+        <p:txBody>
+          <a:bodyPr wrap="square" lIns="0" tIns="0" rIns="0" bIns="0" rtlCol="0" anchor="ctr"/>
+          <a:lstStyle/>
+          <a:p>
+            <a:pPr marL="0" indent="0">
+              <a:buNone/>
+            </a:pPr>
+            <a:r>
+              <a:rPr lang="en-US" sz="1500" b="1" dirty="0">
+                <a:solidFill>
+                  <a:srgbClr val="FFFFFF"/>
+                </a:solidFill>
+                <a:latin typeface="Segoe UI Semibold" pitchFamily="34" charset="0"/>
+                <a:ea typeface="Segoe UI Semibold" pitchFamily="34" charset="-122"/>
+                <a:cs typeface="Segoe UI Semibold" pitchFamily="34" charset="-120"/>
+              </a:rPr>
+              <a:t>Stable lead time (78% in 5–30 min)</a:t>
+            </a:r>
+            <a:endParaRPr lang="en-US" sz="1500" dirty="0"/>
+          </a:p>
+        </p:txBody>
+      </p:sp>
+      <p:sp>
+        <p:nvSpPr>
+          <p:cNvPr id="7" name="Text 5"/>
+          <p:cNvSpPr/>
+          <p:nvPr/>
+        </p:nvSpPr>
+        <p:spPr>
+          <a:xfrm>
+            <a:off x="7086600" y="1600200"/>
+            <a:ext cx="457200" cy="731520"/>
+          </a:xfrm>
+          <a:prstGeom prst="rect">
+            <a:avLst/>
+          </a:prstGeom>
+          <a:noFill/>
+          <a:ln/>
+        </p:spPr>
+        <p:txBody>
+          <a:bodyPr wrap="square" lIns="0" tIns="0" rIns="0" bIns="0" rtlCol="0" anchor="ctr"/>
+          <a:lstStyle/>
+          <a:p>
+            <a:pPr marL="0" indent="0" algn="ctr">
+              <a:buNone/>
+            </a:pPr>
+            <a:r>
+              <a:rPr lang="en-US" sz="1800" dirty="0">
+                <a:solidFill>
+                  <a:srgbClr val="5B9BD5"/>
+                </a:solidFill>
+                <a:latin typeface="Segoe UI Semibold" pitchFamily="34" charset="0"/>
+                <a:ea typeface="Segoe UI Semibold" pitchFamily="34" charset="-122"/>
+                <a:cs typeface="Segoe UI Semibold" pitchFamily="34" charset="-120"/>
+              </a:rPr>
+              <a:t>→</a:t>
+            </a:r>
+            <a:endParaRPr lang="en-US" sz="1800" dirty="0"/>
+          </a:p>
+        </p:txBody>
+      </p:sp>
+      <p:sp>
+        <p:nvSpPr>
+          <p:cNvPr id="8" name="Text 6"/>
+          <p:cNvSpPr/>
+          <p:nvPr/>
+        </p:nvSpPr>
+        <p:spPr>
+          <a:xfrm>
+            <a:off x="7589520" y="1600200"/>
+            <a:ext cx="4023360" cy="731520"/>
+          </a:xfrm>
+          <a:prstGeom prst="rect">
+            <a:avLst/>
+          </a:prstGeom>
+          <a:noFill/>
+          <a:ln/>
+        </p:spPr>
+        <p:txBody>
+          <a:bodyPr wrap="square" lIns="0" tIns="0" rIns="0" bIns="0" rtlCol="0" anchor="ctr"/>
+          <a:lstStyle/>
+          <a:p>
+            <a:pPr marL="0" indent="0">
+              <a:buNone/>
+            </a:pPr>
+            <a:r>
+              <a:rPr lang="en-US" sz="1300" dirty="0">
                 <a:solidFill>
                   <a:srgbClr val="BDD7EE"/>
                 </a:solidFill>
@@ -5995,24 +5626,24 @@
                 <a:ea typeface="Segoe UI" pitchFamily="34" charset="-122"/>
                 <a:cs typeface="Segoe UI" pitchFamily="34" charset="-120"/>
               </a:rPr>
-              <a:t>scheduled pipeline in production</a:t>
-            </a:r>
-            <a:endParaRPr lang="en-US" sz="1150" dirty="0"/>
-          </a:p>
-        </p:txBody>
-      </p:sp>
-      <p:sp>
-        <p:nvSpPr>
-          <p:cNvPr id="7" name="Shape 5"/>
-          <p:cNvSpPr/>
-          <p:nvPr/>
-        </p:nvSpPr>
-        <p:spPr>
-          <a:xfrm>
-            <a:off x="6263640" y="1645920"/>
-            <a:ext cx="5440680" cy="822960"/>
-          </a:xfrm>
-          <a:prstGeom prst="rect">
+              <a:t>Reliable forecast → lower safety stock</a:t>
+            </a:r>
+            <a:endParaRPr lang="en-US" sz="1300" dirty="0"/>
+          </a:p>
+        </p:txBody>
+      </p:sp>
+      <p:sp>
+        <p:nvSpPr>
+          <p:cNvPr id="9" name="Shape 7"/>
+          <p:cNvSpPr/>
+          <p:nvPr/>
+        </p:nvSpPr>
+        <p:spPr>
+          <a:xfrm>
+            <a:off x="548640" y="2633472"/>
+            <a:ext cx="548640" cy="548640"/>
+          </a:xfrm>
+          <a:prstGeom prst="ellipse">
             <a:avLst/>
           </a:prstGeom>
           <a:solidFill>
@@ -6020,38 +5651,45 @@
           </a:solidFill>
           <a:ln w="12700">
             <a:solidFill>
-              <a:srgbClr val="3A5488"/>
+              <a:srgbClr val="5B9BD5"/>
             </a:solidFill>
             <a:prstDash val="solid"/>
           </a:ln>
         </p:spPr>
-      </p:sp>
-      <p:sp>
-        <p:nvSpPr>
-          <p:cNvPr id="8" name="Text 6"/>
-          <p:cNvSpPr/>
-          <p:nvPr/>
-        </p:nvSpPr>
-        <p:spPr>
-          <a:xfrm>
-            <a:off x="6492240" y="1755648"/>
-            <a:ext cx="5029200" cy="320040"/>
-          </a:xfrm>
-          <a:prstGeom prst="rect">
-            <a:avLst/>
-          </a:prstGeom>
-          <a:noFill/>
-          <a:ln/>
-        </p:spPr>
-        <p:txBody>
-          <a:bodyPr wrap="square" lIns="0" tIns="0" rIns="0" bIns="0" rtlCol="0" anchor="ctr"/>
-          <a:lstStyle/>
-          <a:p>
-            <a:pPr indent="0" marL="0">
-              <a:buNone/>
-            </a:pPr>
-            <a:r>
-              <a:rPr lang="en-US" sz="1400" b="1" dirty="0">
+        <p:txBody>
+          <a:bodyPr/>
+          <a:lstStyle/>
+          <a:p>
+            <a:endParaRPr lang="pt-BR"/>
+          </a:p>
+        </p:txBody>
+      </p:sp>
+      <p:sp>
+        <p:nvSpPr>
+          <p:cNvPr id="10" name="Text 8"/>
+          <p:cNvSpPr/>
+          <p:nvPr/>
+        </p:nvSpPr>
+        <p:spPr>
+          <a:xfrm>
+            <a:off x="548640" y="2633472"/>
+            <a:ext cx="548640" cy="548640"/>
+          </a:xfrm>
+          <a:prstGeom prst="rect">
+            <a:avLst/>
+          </a:prstGeom>
+          <a:noFill/>
+          <a:ln/>
+        </p:spPr>
+        <p:txBody>
+          <a:bodyPr wrap="square" lIns="0" tIns="0" rIns="0" bIns="0" rtlCol="0" anchor="ctr"/>
+          <a:lstStyle/>
+          <a:p>
+            <a:pPr marL="0" indent="0" algn="ctr">
+              <a:buNone/>
+            </a:pPr>
+            <a:r>
+              <a:rPr lang="en-US" sz="1800" b="1" dirty="0">
                 <a:solidFill>
                   <a:srgbClr val="FFFFFF"/>
                 </a:solidFill>
@@ -6059,38 +5697,116 @@
                 <a:ea typeface="Segoe UI Semibold" pitchFamily="34" charset="-122"/>
                 <a:cs typeface="Segoe UI Semibold" pitchFamily="34" charset="-120"/>
               </a:rPr>
-              <a:t>Zone-level enrichment</a:t>
-            </a:r>
-            <a:endParaRPr lang="en-US" sz="1400" dirty="0"/>
-          </a:p>
-        </p:txBody>
-      </p:sp>
-      <p:sp>
-        <p:nvSpPr>
-          <p:cNvPr id="9" name="Text 7"/>
-          <p:cNvSpPr/>
-          <p:nvPr/>
-        </p:nvSpPr>
-        <p:spPr>
-          <a:xfrm>
-            <a:off x="6492240" y="2084832"/>
-            <a:ext cx="5029200" cy="320040"/>
-          </a:xfrm>
-          <a:prstGeom prst="rect">
-            <a:avLst/>
-          </a:prstGeom>
-          <a:noFill/>
-          <a:ln/>
-        </p:spPr>
-        <p:txBody>
-          <a:bodyPr wrap="square" lIns="0" tIns="0" rIns="0" bIns="0" rtlCol="0" anchor="ctr"/>
-          <a:lstStyle/>
-          <a:p>
-            <a:pPr indent="0" marL="0">
-              <a:buNone/>
-            </a:pPr>
-            <a:r>
-              <a:rPr lang="en-US" sz="1150" dirty="0">
+              <a:t>2</a:t>
+            </a:r>
+            <a:endParaRPr lang="en-US" sz="1800" dirty="0"/>
+          </a:p>
+        </p:txBody>
+      </p:sp>
+      <p:sp>
+        <p:nvSpPr>
+          <p:cNvPr id="11" name="Text 9"/>
+          <p:cNvSpPr/>
+          <p:nvPr/>
+        </p:nvSpPr>
+        <p:spPr>
+          <a:xfrm>
+            <a:off x="1325880" y="2542032"/>
+            <a:ext cx="5760720" cy="731520"/>
+          </a:xfrm>
+          <a:prstGeom prst="rect">
+            <a:avLst/>
+          </a:prstGeom>
+          <a:noFill/>
+          <a:ln/>
+        </p:spPr>
+        <p:txBody>
+          <a:bodyPr wrap="square" lIns="0" tIns="0" rIns="0" bIns="0" rtlCol="0" anchor="ctr"/>
+          <a:lstStyle/>
+          <a:p>
+            <a:pPr marL="0" indent="0">
+              <a:buNone/>
+            </a:pPr>
+            <a:r>
+              <a:rPr lang="en-US" sz="1500" b="1" dirty="0">
+                <a:solidFill>
+                  <a:srgbClr val="FFFFFF"/>
+                </a:solidFill>
+                <a:latin typeface="Segoe UI Semibold" pitchFamily="34" charset="0"/>
+                <a:ea typeface="Segoe UI Semibold" pitchFamily="34" charset="-122"/>
+                <a:cs typeface="Segoe UI Semibold" pitchFamily="34" charset="-120"/>
+              </a:rPr>
+              <a:t>Demand concentration (2 boroughs ≈ 93%)</a:t>
+            </a:r>
+            <a:endParaRPr lang="en-US" sz="1500" dirty="0"/>
+          </a:p>
+        </p:txBody>
+      </p:sp>
+      <p:sp>
+        <p:nvSpPr>
+          <p:cNvPr id="12" name="Text 10"/>
+          <p:cNvSpPr/>
+          <p:nvPr/>
+        </p:nvSpPr>
+        <p:spPr>
+          <a:xfrm>
+            <a:off x="7086600" y="2542032"/>
+            <a:ext cx="457200" cy="731520"/>
+          </a:xfrm>
+          <a:prstGeom prst="rect">
+            <a:avLst/>
+          </a:prstGeom>
+          <a:noFill/>
+          <a:ln/>
+        </p:spPr>
+        <p:txBody>
+          <a:bodyPr wrap="square" lIns="0" tIns="0" rIns="0" bIns="0" rtlCol="0" anchor="ctr"/>
+          <a:lstStyle/>
+          <a:p>
+            <a:pPr marL="0" indent="0" algn="ctr">
+              <a:buNone/>
+            </a:pPr>
+            <a:r>
+              <a:rPr lang="en-US" sz="1800" dirty="0">
+                <a:solidFill>
+                  <a:srgbClr val="5B9BD5"/>
+                </a:solidFill>
+                <a:latin typeface="Segoe UI Semibold" pitchFamily="34" charset="0"/>
+                <a:ea typeface="Segoe UI Semibold" pitchFamily="34" charset="-122"/>
+                <a:cs typeface="Segoe UI Semibold" pitchFamily="34" charset="-120"/>
+              </a:rPr>
+              <a:t>→</a:t>
+            </a:r>
+            <a:endParaRPr lang="en-US" sz="1800" dirty="0"/>
+          </a:p>
+        </p:txBody>
+      </p:sp>
+      <p:sp>
+        <p:nvSpPr>
+          <p:cNvPr id="13" name="Text 11"/>
+          <p:cNvSpPr/>
+          <p:nvPr/>
+        </p:nvSpPr>
+        <p:spPr>
+          <a:xfrm>
+            <a:off x="7589520" y="2542032"/>
+            <a:ext cx="4023360" cy="731520"/>
+          </a:xfrm>
+          <a:prstGeom prst="rect">
+            <a:avLst/>
+          </a:prstGeom>
+          <a:noFill/>
+          <a:ln/>
+        </p:spPr>
+        <p:txBody>
+          <a:bodyPr wrap="square" lIns="0" tIns="0" rIns="0" bIns="0" rtlCol="0" anchor="ctr"/>
+          <a:lstStyle/>
+          <a:p>
+            <a:pPr marL="0" indent="0">
+              <a:buNone/>
+            </a:pPr>
+            <a:r>
+              <a:rPr lang="en-US" sz="1300" dirty="0">
                 <a:solidFill>
                   <a:srgbClr val="BDD7EE"/>
                 </a:solidFill>
@@ -6098,24 +5814,24 @@
                 <a:ea typeface="Segoe UI" pitchFamily="34" charset="-122"/>
                 <a:cs typeface="Segoe UI" pitchFamily="34" charset="-120"/>
               </a:rPr>
-              <a:t>NTA↔zone spatial join (Geopandas)</a:t>
-            </a:r>
-            <a:endParaRPr lang="en-US" sz="1150" dirty="0"/>
-          </a:p>
-        </p:txBody>
-      </p:sp>
-      <p:sp>
-        <p:nvSpPr>
-          <p:cNvPr id="10" name="Shape 8"/>
-          <p:cNvSpPr/>
-          <p:nvPr/>
-        </p:nvSpPr>
-        <p:spPr>
-          <a:xfrm>
-            <a:off x="548640" y="2606040"/>
-            <a:ext cx="5440680" cy="822960"/>
-          </a:xfrm>
-          <a:prstGeom prst="rect">
+              <a:t>Network design / capacity placement</a:t>
+            </a:r>
+            <a:endParaRPr lang="en-US" sz="1300" dirty="0"/>
+          </a:p>
+        </p:txBody>
+      </p:sp>
+      <p:sp>
+        <p:nvSpPr>
+          <p:cNvPr id="14" name="Shape 12"/>
+          <p:cNvSpPr/>
+          <p:nvPr/>
+        </p:nvSpPr>
+        <p:spPr>
+          <a:xfrm>
+            <a:off x="548640" y="3575304"/>
+            <a:ext cx="548640" cy="548640"/>
+          </a:xfrm>
+          <a:prstGeom prst="ellipse">
             <a:avLst/>
           </a:prstGeom>
           <a:solidFill>
@@ -6123,38 +5839,45 @@
           </a:solidFill>
           <a:ln w="12700">
             <a:solidFill>
-              <a:srgbClr val="3A5488"/>
+              <a:srgbClr val="5B9BD5"/>
             </a:solidFill>
             <a:prstDash val="solid"/>
           </a:ln>
         </p:spPr>
-      </p:sp>
-      <p:sp>
-        <p:nvSpPr>
-          <p:cNvPr id="11" name="Text 9"/>
-          <p:cNvSpPr/>
-          <p:nvPr/>
-        </p:nvSpPr>
-        <p:spPr>
-          <a:xfrm>
-            <a:off x="777240" y="2715768"/>
-            <a:ext cx="5029200" cy="320040"/>
-          </a:xfrm>
-          <a:prstGeom prst="rect">
-            <a:avLst/>
-          </a:prstGeom>
-          <a:noFill/>
-          <a:ln/>
-        </p:spPr>
-        <p:txBody>
-          <a:bodyPr wrap="square" lIns="0" tIns="0" rIns="0" bIns="0" rtlCol="0" anchor="ctr"/>
-          <a:lstStyle/>
-          <a:p>
-            <a:pPr indent="0" marL="0">
-              <a:buNone/>
-            </a:pPr>
-            <a:r>
-              <a:rPr lang="en-US" sz="1400" b="1" dirty="0">
+        <p:txBody>
+          <a:bodyPr/>
+          <a:lstStyle/>
+          <a:p>
+            <a:endParaRPr lang="pt-BR"/>
+          </a:p>
+        </p:txBody>
+      </p:sp>
+      <p:sp>
+        <p:nvSpPr>
+          <p:cNvPr id="15" name="Text 13"/>
+          <p:cNvSpPr/>
+          <p:nvPr/>
+        </p:nvSpPr>
+        <p:spPr>
+          <a:xfrm>
+            <a:off x="548640" y="3575304"/>
+            <a:ext cx="548640" cy="548640"/>
+          </a:xfrm>
+          <a:prstGeom prst="rect">
+            <a:avLst/>
+          </a:prstGeom>
+          <a:noFill/>
+          <a:ln/>
+        </p:spPr>
+        <p:txBody>
+          <a:bodyPr wrap="square" lIns="0" tIns="0" rIns="0" bIns="0" rtlCol="0" anchor="ctr"/>
+          <a:lstStyle/>
+          <a:p>
+            <a:pPr marL="0" indent="0" algn="ctr">
+              <a:buNone/>
+            </a:pPr>
+            <a:r>
+              <a:rPr lang="en-US" sz="1800" b="1" dirty="0">
                 <a:solidFill>
                   <a:srgbClr val="FFFFFF"/>
                 </a:solidFill>
@@ -6162,38 +5885,116 @@
                 <a:ea typeface="Segoe UI Semibold" pitchFamily="34" charset="-122"/>
                 <a:cs typeface="Segoe UI Semibold" pitchFamily="34" charset="-120"/>
               </a:rPr>
-              <a:t>Demand forecasting</a:t>
-            </a:r>
-            <a:endParaRPr lang="en-US" sz="1400" dirty="0"/>
-          </a:p>
-        </p:txBody>
-      </p:sp>
-      <p:sp>
-        <p:nvSpPr>
-          <p:cNvPr id="12" name="Text 10"/>
-          <p:cNvSpPr/>
-          <p:nvPr/>
-        </p:nvSpPr>
-        <p:spPr>
-          <a:xfrm>
-            <a:off x="777240" y="3044952"/>
-            <a:ext cx="5029200" cy="320040"/>
-          </a:xfrm>
-          <a:prstGeom prst="rect">
-            <a:avLst/>
-          </a:prstGeom>
-          <a:noFill/>
-          <a:ln/>
-        </p:spPr>
-        <p:txBody>
-          <a:bodyPr wrap="square" lIns="0" tIns="0" rIns="0" bIns="0" rtlCol="0" anchor="ctr"/>
-          <a:lstStyle/>
-          <a:p>
-            <a:pPr indent="0" marL="0">
-              <a:buNone/>
-            </a:pPr>
-            <a:r>
-              <a:rPr lang="en-US" sz="1150" dirty="0">
+              <a:t>3</a:t>
+            </a:r>
+            <a:endParaRPr lang="en-US" sz="1800" dirty="0"/>
+          </a:p>
+        </p:txBody>
+      </p:sp>
+      <p:sp>
+        <p:nvSpPr>
+          <p:cNvPr id="16" name="Text 14"/>
+          <p:cNvSpPr/>
+          <p:nvPr/>
+        </p:nvSpPr>
+        <p:spPr>
+          <a:xfrm>
+            <a:off x="1325880" y="3483864"/>
+            <a:ext cx="5760720" cy="731520"/>
+          </a:xfrm>
+          <a:prstGeom prst="rect">
+            <a:avLst/>
+          </a:prstGeom>
+          <a:noFill/>
+          <a:ln/>
+        </p:spPr>
+        <p:txBody>
+          <a:bodyPr wrap="square" lIns="0" tIns="0" rIns="0" bIns="0" rtlCol="0" anchor="ctr"/>
+          <a:lstStyle/>
+          <a:p>
+            <a:pPr marL="0" indent="0">
+              <a:buNone/>
+            </a:pPr>
+            <a:r>
+              <a:rPr lang="en-US" sz="1500" b="1" dirty="0">
+                <a:solidFill>
+                  <a:srgbClr val="FFFFFF"/>
+                </a:solidFill>
+                <a:latin typeface="Segoe UI Semibold" pitchFamily="34" charset="0"/>
+                <a:ea typeface="Segoe UI Semibold" pitchFamily="34" charset="-122"/>
+                <a:cs typeface="Segoe UI Semibold" pitchFamily="34" charset="-120"/>
+              </a:rPr>
+              <a:t>Over- vs under-served boroughs</a:t>
+            </a:r>
+            <a:endParaRPr lang="en-US" sz="1500" dirty="0"/>
+          </a:p>
+        </p:txBody>
+      </p:sp>
+      <p:sp>
+        <p:nvSpPr>
+          <p:cNvPr id="17" name="Text 15"/>
+          <p:cNvSpPr/>
+          <p:nvPr/>
+        </p:nvSpPr>
+        <p:spPr>
+          <a:xfrm>
+            <a:off x="7086600" y="3483864"/>
+            <a:ext cx="457200" cy="731520"/>
+          </a:xfrm>
+          <a:prstGeom prst="rect">
+            <a:avLst/>
+          </a:prstGeom>
+          <a:noFill/>
+          <a:ln/>
+        </p:spPr>
+        <p:txBody>
+          <a:bodyPr wrap="square" lIns="0" tIns="0" rIns="0" bIns="0" rtlCol="0" anchor="ctr"/>
+          <a:lstStyle/>
+          <a:p>
+            <a:pPr marL="0" indent="0" algn="ctr">
+              <a:buNone/>
+            </a:pPr>
+            <a:r>
+              <a:rPr lang="en-US" sz="1800" dirty="0">
+                <a:solidFill>
+                  <a:srgbClr val="5B9BD5"/>
+                </a:solidFill>
+                <a:latin typeface="Segoe UI Semibold" pitchFamily="34" charset="0"/>
+                <a:ea typeface="Segoe UI Semibold" pitchFamily="34" charset="-122"/>
+                <a:cs typeface="Segoe UI Semibold" pitchFamily="34" charset="-120"/>
+              </a:rPr>
+              <a:t>→</a:t>
+            </a:r>
+            <a:endParaRPr lang="en-US" sz="1800" dirty="0"/>
+          </a:p>
+        </p:txBody>
+      </p:sp>
+      <p:sp>
+        <p:nvSpPr>
+          <p:cNvPr id="18" name="Text 16"/>
+          <p:cNvSpPr/>
+          <p:nvPr/>
+        </p:nvSpPr>
+        <p:spPr>
+          <a:xfrm>
+            <a:off x="7589520" y="3483864"/>
+            <a:ext cx="4023360" cy="731520"/>
+          </a:xfrm>
+          <a:prstGeom prst="rect">
+            <a:avLst/>
+          </a:prstGeom>
+          <a:noFill/>
+          <a:ln/>
+        </p:spPr>
+        <p:txBody>
+          <a:bodyPr wrap="square" lIns="0" tIns="0" rIns="0" bIns="0" rtlCol="0" anchor="ctr"/>
+          <a:lstStyle/>
+          <a:p>
+            <a:pPr marL="0" indent="0">
+              <a:buNone/>
+            </a:pPr>
+            <a:r>
+              <a:rPr lang="en-US" sz="1300" dirty="0">
                 <a:solidFill>
                   <a:srgbClr val="BDD7EE"/>
                 </a:solidFill>
@@ -6201,24 +6002,24 @@
                 <a:ea typeface="Segoe UI" pitchFamily="34" charset="-122"/>
                 <a:cs typeface="Segoe UI" pitchFamily="34" charset="-120"/>
               </a:rPr>
-              <a:t>time-series per zone/hour, weather-aware</a:t>
-            </a:r>
-            <a:endParaRPr lang="en-US" sz="1150" dirty="0"/>
-          </a:p>
-        </p:txBody>
-      </p:sp>
-      <p:sp>
-        <p:nvSpPr>
-          <p:cNvPr id="13" name="Shape 11"/>
-          <p:cNvSpPr/>
-          <p:nvPr/>
-        </p:nvSpPr>
-        <p:spPr>
-          <a:xfrm>
-            <a:off x="6263640" y="2606040"/>
-            <a:ext cx="5440680" cy="822960"/>
-          </a:xfrm>
-          <a:prstGeom prst="rect">
+              <a:t>Where to expand the market</a:t>
+            </a:r>
+            <a:endParaRPr lang="en-US" sz="1300" dirty="0"/>
+          </a:p>
+        </p:txBody>
+      </p:sp>
+      <p:sp>
+        <p:nvSpPr>
+          <p:cNvPr id="19" name="Shape 17"/>
+          <p:cNvSpPr/>
+          <p:nvPr/>
+        </p:nvSpPr>
+        <p:spPr>
+          <a:xfrm>
+            <a:off x="548640" y="4517136"/>
+            <a:ext cx="548640" cy="548640"/>
+          </a:xfrm>
+          <a:prstGeom prst="ellipse">
             <a:avLst/>
           </a:prstGeom>
           <a:solidFill>
@@ -6226,38 +6027,45 @@
           </a:solidFill>
           <a:ln w="12700">
             <a:solidFill>
-              <a:srgbClr val="3A5488"/>
+              <a:srgbClr val="5B9BD5"/>
             </a:solidFill>
             <a:prstDash val="solid"/>
           </a:ln>
         </p:spPr>
-      </p:sp>
-      <p:sp>
-        <p:nvSpPr>
-          <p:cNvPr id="14" name="Text 12"/>
-          <p:cNvSpPr/>
-          <p:nvPr/>
-        </p:nvSpPr>
-        <p:spPr>
-          <a:xfrm>
-            <a:off x="6492240" y="2715768"/>
-            <a:ext cx="5029200" cy="320040"/>
-          </a:xfrm>
-          <a:prstGeom prst="rect">
-            <a:avLst/>
-          </a:prstGeom>
-          <a:noFill/>
-          <a:ln/>
-        </p:spPr>
-        <p:txBody>
-          <a:bodyPr wrap="square" lIns="0" tIns="0" rIns="0" bIns="0" rtlCol="0" anchor="ctr"/>
-          <a:lstStyle/>
-          <a:p>
-            <a:pPr indent="0" marL="0">
-              <a:buNone/>
-            </a:pPr>
-            <a:r>
-              <a:rPr lang="en-US" sz="1400" b="1" dirty="0">
+        <p:txBody>
+          <a:bodyPr/>
+          <a:lstStyle/>
+          <a:p>
+            <a:endParaRPr lang="pt-BR"/>
+          </a:p>
+        </p:txBody>
+      </p:sp>
+      <p:sp>
+        <p:nvSpPr>
+          <p:cNvPr id="20" name="Text 18"/>
+          <p:cNvSpPr/>
+          <p:nvPr/>
+        </p:nvSpPr>
+        <p:spPr>
+          <a:xfrm>
+            <a:off x="548640" y="4517136"/>
+            <a:ext cx="548640" cy="548640"/>
+          </a:xfrm>
+          <a:prstGeom prst="rect">
+            <a:avLst/>
+          </a:prstGeom>
+          <a:noFill/>
+          <a:ln/>
+        </p:spPr>
+        <p:txBody>
+          <a:bodyPr wrap="square" lIns="0" tIns="0" rIns="0" bIns="0" rtlCol="0" anchor="ctr"/>
+          <a:lstStyle/>
+          <a:p>
+            <a:pPr marL="0" indent="0" algn="ctr">
+              <a:buNone/>
+            </a:pPr>
+            <a:r>
+              <a:rPr lang="en-US" sz="1800" b="1" dirty="0">
                 <a:solidFill>
                   <a:srgbClr val="FFFFFF"/>
                 </a:solidFill>
@@ -6265,38 +6073,116 @@
                 <a:ea typeface="Segoe UI Semibold" pitchFamily="34" charset="-122"/>
                 <a:cs typeface="Segoe UI Semibold" pitchFamily="34" charset="-120"/>
               </a:rPr>
-              <a:t>Anomaly detection (ML)</a:t>
-            </a:r>
-            <a:endParaRPr lang="en-US" sz="1400" dirty="0"/>
-          </a:p>
-        </p:txBody>
-      </p:sp>
-      <p:sp>
-        <p:nvSpPr>
-          <p:cNvPr id="15" name="Text 13"/>
-          <p:cNvSpPr/>
-          <p:nvPr/>
-        </p:nvSpPr>
-        <p:spPr>
-          <a:xfrm>
-            <a:off x="6492240" y="3044952"/>
-            <a:ext cx="5029200" cy="320040"/>
-          </a:xfrm>
-          <a:prstGeom prst="rect">
-            <a:avLst/>
-          </a:prstGeom>
-          <a:noFill/>
-          <a:ln/>
-        </p:spPr>
-        <p:txBody>
-          <a:bodyPr wrap="square" lIns="0" tIns="0" rIns="0" bIns="0" rtlCol="0" anchor="ctr"/>
-          <a:lstStyle/>
-          <a:p>
-            <a:pPr indent="0" marL="0">
-              <a:buNone/>
-            </a:pPr>
-            <a:r>
-              <a:rPr lang="en-US" sz="1150" dirty="0">
+              <a:t>4</a:t>
+            </a:r>
+            <a:endParaRPr lang="en-US" sz="1800" dirty="0"/>
+          </a:p>
+        </p:txBody>
+      </p:sp>
+      <p:sp>
+        <p:nvSpPr>
+          <p:cNvPr id="21" name="Text 19"/>
+          <p:cNvSpPr/>
+          <p:nvPr/>
+        </p:nvSpPr>
+        <p:spPr>
+          <a:xfrm>
+            <a:off x="1325880" y="4425696"/>
+            <a:ext cx="5760720" cy="731520"/>
+          </a:xfrm>
+          <a:prstGeom prst="rect">
+            <a:avLst/>
+          </a:prstGeom>
+          <a:noFill/>
+          <a:ln/>
+        </p:spPr>
+        <p:txBody>
+          <a:bodyPr wrap="square" lIns="0" tIns="0" rIns="0" bIns="0" rtlCol="0" anchor="ctr"/>
+          <a:lstStyle/>
+          <a:p>
+            <a:pPr marL="0" indent="0">
+              <a:buNone/>
+            </a:pPr>
+            <a:r>
+              <a:rPr lang="en-US" sz="1500" b="1" dirty="0">
+                <a:solidFill>
+                  <a:srgbClr val="FFFFFF"/>
+                </a:solidFill>
+                <a:latin typeface="Segoe UI Semibold" pitchFamily="34" charset="0"/>
+                <a:ea typeface="Segoe UI Semibold" pitchFamily="34" charset="-122"/>
+                <a:cs typeface="Segoe UI Semibold" pitchFamily="34" charset="-120"/>
+              </a:rPr>
+              <a:t>Two anomaly profiles (airports vs core)</a:t>
+            </a:r>
+            <a:endParaRPr lang="en-US" sz="1500" dirty="0"/>
+          </a:p>
+        </p:txBody>
+      </p:sp>
+      <p:sp>
+        <p:nvSpPr>
+          <p:cNvPr id="22" name="Text 20"/>
+          <p:cNvSpPr/>
+          <p:nvPr/>
+        </p:nvSpPr>
+        <p:spPr>
+          <a:xfrm>
+            <a:off x="7086600" y="4425696"/>
+            <a:ext cx="457200" cy="731520"/>
+          </a:xfrm>
+          <a:prstGeom prst="rect">
+            <a:avLst/>
+          </a:prstGeom>
+          <a:noFill/>
+          <a:ln/>
+        </p:spPr>
+        <p:txBody>
+          <a:bodyPr wrap="square" lIns="0" tIns="0" rIns="0" bIns="0" rtlCol="0" anchor="ctr"/>
+          <a:lstStyle/>
+          <a:p>
+            <a:pPr marL="0" indent="0" algn="ctr">
+              <a:buNone/>
+            </a:pPr>
+            <a:r>
+              <a:rPr lang="en-US" sz="1800" dirty="0">
+                <a:solidFill>
+                  <a:srgbClr val="5B9BD5"/>
+                </a:solidFill>
+                <a:latin typeface="Segoe UI Semibold" pitchFamily="34" charset="0"/>
+                <a:ea typeface="Segoe UI Semibold" pitchFamily="34" charset="-122"/>
+                <a:cs typeface="Segoe UI Semibold" pitchFamily="34" charset="-120"/>
+              </a:rPr>
+              <a:t>→</a:t>
+            </a:r>
+            <a:endParaRPr lang="en-US" sz="1800" dirty="0"/>
+          </a:p>
+        </p:txBody>
+      </p:sp>
+      <p:sp>
+        <p:nvSpPr>
+          <p:cNvPr id="23" name="Text 21"/>
+          <p:cNvSpPr/>
+          <p:nvPr/>
+        </p:nvSpPr>
+        <p:spPr>
+          <a:xfrm>
+            <a:off x="7589520" y="4425696"/>
+            <a:ext cx="4023360" cy="731520"/>
+          </a:xfrm>
+          <a:prstGeom prst="rect">
+            <a:avLst/>
+          </a:prstGeom>
+          <a:noFill/>
+          <a:ln/>
+        </p:spPr>
+        <p:txBody>
+          <a:bodyPr wrap="square" lIns="0" tIns="0" rIns="0" bIns="0" rtlCol="0" anchor="ctr"/>
+          <a:lstStyle/>
+          <a:p>
+            <a:pPr marL="0" indent="0">
+              <a:buNone/>
+            </a:pPr>
+            <a:r>
+              <a:rPr lang="en-US" sz="1300" dirty="0">
                 <a:solidFill>
                   <a:srgbClr val="BDD7EE"/>
                 </a:solidFill>
@@ -6304,24 +6190,24 @@
                 <a:ea typeface="Segoe UI" pitchFamily="34" charset="-122"/>
                 <a:cs typeface="Segoe UI" pitchFamily="34" charset="-120"/>
               </a:rPr>
-              <a:t>beyond rule-based flags</a:t>
-            </a:r>
-            <a:endParaRPr lang="en-US" sz="1150" dirty="0"/>
-          </a:p>
-        </p:txBody>
-      </p:sp>
-      <p:sp>
-        <p:nvSpPr>
-          <p:cNvPr id="16" name="Shape 14"/>
-          <p:cNvSpPr/>
-          <p:nvPr/>
-        </p:nvSpPr>
-        <p:spPr>
-          <a:xfrm>
-            <a:off x="548640" y="3566160"/>
-            <a:ext cx="5440680" cy="822960"/>
-          </a:xfrm>
-          <a:prstGeom prst="rect">
+              <a:t>Tailored exception management</a:t>
+            </a:r>
+            <a:endParaRPr lang="en-US" sz="1300" dirty="0"/>
+          </a:p>
+        </p:txBody>
+      </p:sp>
+      <p:sp>
+        <p:nvSpPr>
+          <p:cNvPr id="24" name="Shape 22"/>
+          <p:cNvSpPr/>
+          <p:nvPr/>
+        </p:nvSpPr>
+        <p:spPr>
+          <a:xfrm>
+            <a:off x="548640" y="5458968"/>
+            <a:ext cx="548640" cy="548640"/>
+          </a:xfrm>
+          <a:prstGeom prst="ellipse">
             <a:avLst/>
           </a:prstGeom>
           <a:solidFill>
@@ -6329,38 +6215,45 @@
           </a:solidFill>
           <a:ln w="12700">
             <a:solidFill>
-              <a:srgbClr val="3A5488"/>
+              <a:srgbClr val="5B9BD5"/>
             </a:solidFill>
             <a:prstDash val="solid"/>
           </a:ln>
         </p:spPr>
-      </p:sp>
-      <p:sp>
-        <p:nvSpPr>
-          <p:cNvPr id="17" name="Text 15"/>
-          <p:cNvSpPr/>
-          <p:nvPr/>
-        </p:nvSpPr>
-        <p:spPr>
-          <a:xfrm>
-            <a:off x="777240" y="3675888"/>
-            <a:ext cx="5029200" cy="320040"/>
-          </a:xfrm>
-          <a:prstGeom prst="rect">
-            <a:avLst/>
-          </a:prstGeom>
-          <a:noFill/>
-          <a:ln/>
-        </p:spPr>
-        <p:txBody>
-          <a:bodyPr wrap="square" lIns="0" tIns="0" rIns="0" bIns="0" rtlCol="0" anchor="ctr"/>
-          <a:lstStyle/>
-          <a:p>
-            <a:pPr indent="0" marL="0">
-              <a:buNone/>
-            </a:pPr>
-            <a:r>
-              <a:rPr lang="en-US" sz="1400" b="1" dirty="0">
+        <p:txBody>
+          <a:bodyPr/>
+          <a:lstStyle/>
+          <a:p>
+            <a:endParaRPr lang="pt-BR"/>
+          </a:p>
+        </p:txBody>
+      </p:sp>
+      <p:sp>
+        <p:nvSpPr>
+          <p:cNvPr id="25" name="Text 23"/>
+          <p:cNvSpPr/>
+          <p:nvPr/>
+        </p:nvSpPr>
+        <p:spPr>
+          <a:xfrm>
+            <a:off x="548640" y="5458968"/>
+            <a:ext cx="548640" cy="548640"/>
+          </a:xfrm>
+          <a:prstGeom prst="rect">
+            <a:avLst/>
+          </a:prstGeom>
+          <a:noFill/>
+          <a:ln/>
+        </p:spPr>
+        <p:txBody>
+          <a:bodyPr wrap="square" lIns="0" tIns="0" rIns="0" bIns="0" rtlCol="0" anchor="ctr"/>
+          <a:lstStyle/>
+          <a:p>
+            <a:pPr marL="0" indent="0" algn="ctr">
+              <a:buNone/>
+            </a:pPr>
+            <a:r>
+              <a:rPr lang="en-US" sz="1800" b="1" dirty="0">
                 <a:solidFill>
                   <a:srgbClr val="FFFFFF"/>
                 </a:solidFill>
@@ -6368,38 +6261,116 @@
                 <a:ea typeface="Segoe UI Semibold" pitchFamily="34" charset="-122"/>
                 <a:cs typeface="Segoe UI Semibold" pitchFamily="34" charset="-120"/>
               </a:rPr>
-              <a:t>Deploy &amp; govern</a:t>
-            </a:r>
-            <a:endParaRPr lang="en-US" sz="1400" dirty="0"/>
-          </a:p>
-        </p:txBody>
-      </p:sp>
-      <p:sp>
-        <p:nvSpPr>
-          <p:cNvPr id="18" name="Text 16"/>
-          <p:cNvSpPr/>
-          <p:nvPr/>
-        </p:nvSpPr>
-        <p:spPr>
-          <a:xfrm>
-            <a:off x="777240" y="4005072"/>
-            <a:ext cx="5029200" cy="320040"/>
-          </a:xfrm>
-          <a:prstGeom prst="rect">
-            <a:avLst/>
-          </a:prstGeom>
-          <a:noFill/>
-          <a:ln/>
-        </p:spPr>
-        <p:txBody>
-          <a:bodyPr wrap="square" lIns="0" tIns="0" rIns="0" bIns="0" rtlCol="0" anchor="ctr"/>
-          <a:lstStyle/>
-          <a:p>
-            <a:pPr indent="0" marL="0">
-              <a:buNone/>
-            </a:pPr>
-            <a:r>
-              <a:rPr lang="en-US" sz="1150" dirty="0">
+              <a:t>5</a:t>
+            </a:r>
+            <a:endParaRPr lang="en-US" sz="1800" dirty="0"/>
+          </a:p>
+        </p:txBody>
+      </p:sp>
+      <p:sp>
+        <p:nvSpPr>
+          <p:cNvPr id="26" name="Text 24"/>
+          <p:cNvSpPr/>
+          <p:nvPr/>
+        </p:nvSpPr>
+        <p:spPr>
+          <a:xfrm>
+            <a:off x="1325880" y="5367528"/>
+            <a:ext cx="5760720" cy="731520"/>
+          </a:xfrm>
+          <a:prstGeom prst="rect">
+            <a:avLst/>
+          </a:prstGeom>
+          <a:noFill/>
+          <a:ln/>
+        </p:spPr>
+        <p:txBody>
+          <a:bodyPr wrap="square" lIns="0" tIns="0" rIns="0" bIns="0" rtlCol="0" anchor="ctr"/>
+          <a:lstStyle/>
+          <a:p>
+            <a:pPr marL="0" indent="0">
+              <a:buNone/>
+            </a:pPr>
+            <a:r>
+              <a:rPr lang="en-US" sz="1500" b="1" dirty="0">
+                <a:solidFill>
+                  <a:srgbClr val="FFFFFF"/>
+                </a:solidFill>
+                <a:latin typeface="Segoe UI Semibold" pitchFamily="34" charset="0"/>
+                <a:ea typeface="Segoe UI Semibold" pitchFamily="34" charset="-122"/>
+                <a:cs typeface="Segoe UI Semibold" pitchFamily="34" charset="-120"/>
+              </a:rPr>
+              <a:t>Seasonal &amp; weather stress (NOAA)</a:t>
+            </a:r>
+            <a:endParaRPr lang="en-US" sz="1500" dirty="0"/>
+          </a:p>
+        </p:txBody>
+      </p:sp>
+      <p:sp>
+        <p:nvSpPr>
+          <p:cNvPr id="27" name="Text 25"/>
+          <p:cNvSpPr/>
+          <p:nvPr/>
+        </p:nvSpPr>
+        <p:spPr>
+          <a:xfrm>
+            <a:off x="7086600" y="5367528"/>
+            <a:ext cx="457200" cy="731520"/>
+          </a:xfrm>
+          <a:prstGeom prst="rect">
+            <a:avLst/>
+          </a:prstGeom>
+          <a:noFill/>
+          <a:ln/>
+        </p:spPr>
+        <p:txBody>
+          <a:bodyPr wrap="square" lIns="0" tIns="0" rIns="0" bIns="0" rtlCol="0" anchor="ctr"/>
+          <a:lstStyle/>
+          <a:p>
+            <a:pPr marL="0" indent="0" algn="ctr">
+              <a:buNone/>
+            </a:pPr>
+            <a:r>
+              <a:rPr lang="en-US" sz="1800" dirty="0">
+                <a:solidFill>
+                  <a:srgbClr val="5B9BD5"/>
+                </a:solidFill>
+                <a:latin typeface="Segoe UI Semibold" pitchFamily="34" charset="0"/>
+                <a:ea typeface="Segoe UI Semibold" pitchFamily="34" charset="-122"/>
+                <a:cs typeface="Segoe UI Semibold" pitchFamily="34" charset="-120"/>
+              </a:rPr>
+              <a:t>→</a:t>
+            </a:r>
+            <a:endParaRPr lang="en-US" sz="1800" dirty="0"/>
+          </a:p>
+        </p:txBody>
+      </p:sp>
+      <p:sp>
+        <p:nvSpPr>
+          <p:cNvPr id="28" name="Text 26"/>
+          <p:cNvSpPr/>
+          <p:nvPr/>
+        </p:nvSpPr>
+        <p:spPr>
+          <a:xfrm>
+            <a:off x="7589520" y="5367528"/>
+            <a:ext cx="4023360" cy="731520"/>
+          </a:xfrm>
+          <a:prstGeom prst="rect">
+            <a:avLst/>
+          </a:prstGeom>
+          <a:noFill/>
+          <a:ln/>
+        </p:spPr>
+        <p:txBody>
+          <a:bodyPr wrap="square" lIns="0" tIns="0" rIns="0" bIns="0" rtlCol="0" anchor="ctr"/>
+          <a:lstStyle/>
+          <a:p>
+            <a:pPr marL="0" indent="0">
+              <a:buNone/>
+            </a:pPr>
+            <a:r>
+              <a:rPr lang="en-US" sz="1300" dirty="0">
                 <a:solidFill>
                   <a:srgbClr val="BDD7EE"/>
                 </a:solidFill>
@@ -6407,188 +6378,7 @@
                 <a:ea typeface="Segoe UI" pitchFamily="34" charset="-122"/>
                 <a:cs typeface="Segoe UI" pitchFamily="34" charset="-120"/>
               </a:rPr>
-              <a:t>Fabric deployment pipelines + expand RLS</a:t>
-            </a:r>
-            <a:endParaRPr lang="en-US" sz="1150" dirty="0"/>
-          </a:p>
-        </p:txBody>
-      </p:sp>
-      <p:sp>
-        <p:nvSpPr>
-          <p:cNvPr id="19" name="Shape 17"/>
-          <p:cNvSpPr/>
-          <p:nvPr/>
-        </p:nvSpPr>
-        <p:spPr>
-          <a:xfrm>
-            <a:off x="6263640" y="3566160"/>
-            <a:ext cx="5440680" cy="822960"/>
-          </a:xfrm>
-          <a:prstGeom prst="rect">
-            <a:avLst/>
-          </a:prstGeom>
-          <a:solidFill>
-            <a:srgbClr val="27406E"/>
-          </a:solidFill>
-          <a:ln w="12700">
-            <a:solidFill>
-              <a:srgbClr val="3A5488"/>
-            </a:solidFill>
-            <a:prstDash val="solid"/>
-          </a:ln>
-        </p:spPr>
-      </p:sp>
-      <p:sp>
-        <p:nvSpPr>
-          <p:cNvPr id="20" name="Text 18"/>
-          <p:cNvSpPr/>
-          <p:nvPr/>
-        </p:nvSpPr>
-        <p:spPr>
-          <a:xfrm>
-            <a:off x="6492240" y="3675888"/>
-            <a:ext cx="5029200" cy="320040"/>
-          </a:xfrm>
-          <a:prstGeom prst="rect">
-            <a:avLst/>
-          </a:prstGeom>
-          <a:noFill/>
-          <a:ln/>
-        </p:spPr>
-        <p:txBody>
-          <a:bodyPr wrap="square" lIns="0" tIns="0" rIns="0" bIns="0" rtlCol="0" anchor="ctr"/>
-          <a:lstStyle/>
-          <a:p>
-            <a:pPr indent="0" marL="0">
-              <a:buNone/>
-            </a:pPr>
-            <a:r>
-              <a:rPr lang="en-US" sz="1400" b="1" dirty="0">
-                <a:solidFill>
-                  <a:srgbClr val="FFFFFF"/>
-                </a:solidFill>
-                <a:latin typeface="Segoe UI Semibold" pitchFamily="34" charset="0"/>
-                <a:ea typeface="Segoe UI Semibold" pitchFamily="34" charset="-122"/>
-                <a:cs typeface="Segoe UI Semibold" pitchFamily="34" charset="-120"/>
-              </a:rPr>
-              <a:t>Portfolio case (Part 2)</a:t>
-            </a:r>
-            <a:endParaRPr lang="en-US" sz="1400" dirty="0"/>
-          </a:p>
-        </p:txBody>
-      </p:sp>
-      <p:sp>
-        <p:nvSpPr>
-          <p:cNvPr id="21" name="Text 19"/>
-          <p:cNvSpPr/>
-          <p:nvPr/>
-        </p:nvSpPr>
-        <p:spPr>
-          <a:xfrm>
-            <a:off x="6492240" y="4005072"/>
-            <a:ext cx="5029200" cy="320040"/>
-          </a:xfrm>
-          <a:prstGeom prst="rect">
-            <a:avLst/>
-          </a:prstGeom>
-          <a:noFill/>
-          <a:ln/>
-        </p:spPr>
-        <p:txBody>
-          <a:bodyPr wrap="square" lIns="0" tIns="0" rIns="0" bIns="0" rtlCol="0" anchor="ctr"/>
-          <a:lstStyle/>
-          <a:p>
-            <a:pPr indent="0" marL="0">
-              <a:buNone/>
-            </a:pPr>
-            <a:r>
-              <a:rPr lang="en-US" sz="1150" dirty="0">
-                <a:solidFill>
-                  <a:srgbClr val="BDD7EE"/>
-                </a:solidFill>
-                <a:latin typeface="Segoe UI" pitchFamily="34" charset="0"/>
-                <a:ea typeface="Segoe UI" pitchFamily="34" charset="-122"/>
-                <a:cs typeface="Segoe UI" pitchFamily="34" charset="-120"/>
-              </a:rPr>
-              <a:t>apply the same method to a real project</a:t>
-            </a:r>
-            <a:endParaRPr lang="en-US" sz="1150" dirty="0"/>
-          </a:p>
-        </p:txBody>
-      </p:sp>
-      <p:sp>
-        <p:nvSpPr>
-          <p:cNvPr id="22" name="Text 20"/>
-          <p:cNvSpPr/>
-          <p:nvPr/>
-        </p:nvSpPr>
-        <p:spPr>
-          <a:xfrm>
-            <a:off x="548640" y="5029200"/>
-            <a:ext cx="11064240" cy="548640"/>
-          </a:xfrm>
-          <a:prstGeom prst="rect">
-            <a:avLst/>
-          </a:prstGeom>
-          <a:noFill/>
-          <a:ln/>
-        </p:spPr>
-        <p:txBody>
-          <a:bodyPr wrap="square" lIns="0" tIns="0" rIns="0" bIns="0" rtlCol="0" anchor="ctr"/>
-          <a:lstStyle/>
-          <a:p>
-            <a:pPr algn="ctr" indent="0" marL="0">
-              <a:buNone/>
-            </a:pPr>
-            <a:r>
-              <a:rPr lang="en-US" sz="2400" b="1" dirty="0">
-                <a:solidFill>
-                  <a:srgbClr val="FFFFFF"/>
-                </a:solidFill>
-                <a:latin typeface="Segoe UI Semibold" pitchFamily="34" charset="0"/>
-                <a:ea typeface="Segoe UI Semibold" pitchFamily="34" charset="-122"/>
-                <a:cs typeface="Segoe UI Semibold" pitchFamily="34" charset="-120"/>
-              </a:rPr>
-              <a:t>Thank you  ·  Questions?</a:t>
-            </a:r>
-            <a:endParaRPr lang="en-US" sz="2400" dirty="0"/>
-          </a:p>
-        </p:txBody>
-      </p:sp>
-      <p:sp>
-        <p:nvSpPr>
-          <p:cNvPr id="23" name="Text 21"/>
-          <p:cNvSpPr/>
-          <p:nvPr/>
-        </p:nvSpPr>
-        <p:spPr>
-          <a:xfrm>
-            <a:off x="548640" y="5669280"/>
-            <a:ext cx="11064240" cy="365760"/>
-          </a:xfrm>
-          <a:prstGeom prst="rect">
-            <a:avLst/>
-          </a:prstGeom>
-          <a:noFill/>
-          <a:ln/>
-        </p:spPr>
-        <p:txBody>
-          <a:bodyPr wrap="square" lIns="0" tIns="0" rIns="0" bIns="0" rtlCol="0" anchor="ctr"/>
-          <a:lstStyle/>
-          <a:p>
-            <a:pPr algn="ctr" indent="0" marL="0">
-              <a:buNone/>
-            </a:pPr>
-            <a:r>
-              <a:rPr lang="en-US" sz="1300" dirty="0">
-                <a:solidFill>
-                  <a:srgbClr val="BDD7EE"/>
-                </a:solidFill>
-                <a:latin typeface="Segoe UI" pitchFamily="34" charset="0"/>
-                <a:ea typeface="Segoe UI" pitchFamily="34" charset="-122"/>
-                <a:cs typeface="Segoe UI" pitchFamily="34" charset="-120"/>
-              </a:rPr>
-              <a:t>Nicolas Augusto  ·  github.com/Nicolas-arch/3m-techcase-nyc-tlc</a:t>
+              <a:t>Capacity planning &amp; disruption readiness</a:t>
             </a:r>
             <a:endParaRPr lang="en-US" sz="1300" dirty="0"/>
           </a:p>
@@ -6604,12 +6394,13 @@
 
 <file path=ppt/slides/slide15.xml><?xml version="1.0" encoding="utf-8"?>
 <p:sld xmlns:a="http://schemas.openxmlformats.org/drawingml/2006/main" xmlns:r="http://schemas.openxmlformats.org/officeDocument/2006/relationships" xmlns:p="http://schemas.openxmlformats.org/presentationml/2006/main">
-  <p:cSld name="Slide 12">
+  <p:cSld name="Slide 14">
     <p:bg>
       <p:bgPr>
         <a:solidFill>
-          <a:srgbClr val="FFFFFF"/>
+          <a:srgbClr val="1F3864"/>
         </a:solidFill>
+        <a:effectLst/>
       </p:bgPr>
     </p:bg>
     <p:spTree>
@@ -6634,32 +6425,32 @@
         </p:nvSpPr>
         <p:spPr>
           <a:xfrm>
-            <a:off x="548640" y="384048"/>
-            <a:ext cx="11064240" cy="274320"/>
-          </a:xfrm>
-          <a:prstGeom prst="rect">
-            <a:avLst/>
-          </a:prstGeom>
-          <a:noFill/>
-          <a:ln/>
-        </p:spPr>
-        <p:txBody>
-          <a:bodyPr wrap="square" lIns="0" tIns="0" rIns="0" bIns="0" rtlCol="0" anchor="ctr"/>
-          <a:lstStyle/>
-          <a:p>
-            <a:pPr indent="0" marL="0">
-              <a:buNone/>
-            </a:pPr>
-            <a:r>
-              <a:rPr lang="en-US" sz="1250" b="1" spc="200" kern="0" dirty="0">
-                <a:solidFill>
-                  <a:srgbClr val="2E75B6"/>
+            <a:off x="548640" y="457200"/>
+            <a:ext cx="10972800" cy="274320"/>
+          </a:xfrm>
+          <a:prstGeom prst="rect">
+            <a:avLst/>
+          </a:prstGeom>
+          <a:noFill/>
+          <a:ln/>
+        </p:spPr>
+        <p:txBody>
+          <a:bodyPr wrap="square" lIns="0" tIns="0" rIns="0" bIns="0" rtlCol="0" anchor="ctr"/>
+          <a:lstStyle/>
+          <a:p>
+            <a:pPr marL="0" indent="0">
+              <a:buNone/>
+            </a:pPr>
+            <a:r>
+              <a:rPr lang="en-US" sz="1250" b="1" kern="0" spc="200" dirty="0">
+                <a:solidFill>
+                  <a:srgbClr val="5B9BD5"/>
                 </a:solidFill>
                 <a:latin typeface="Segoe UI" pitchFamily="34" charset="0"/>
                 <a:ea typeface="Segoe UI" pitchFamily="34" charset="-122"/>
                 <a:cs typeface="Segoe UI" pitchFamily="34" charset="-120"/>
               </a:rPr>
-              <a:t>06 · DASHBOARD</a:t>
+              <a:t>08 · NEXT STEPS</a:t>
             </a:r>
             <a:endParaRPr lang="en-US" sz="1250" dirty="0"/>
           </a:p>
@@ -6673,32 +6464,32 @@
         </p:nvSpPr>
         <p:spPr>
           <a:xfrm>
-            <a:off x="548640" y="640080"/>
-            <a:ext cx="11064240" cy="640080"/>
-          </a:xfrm>
-          <a:prstGeom prst="rect">
-            <a:avLst/>
-          </a:prstGeom>
-          <a:noFill/>
-          <a:ln/>
-        </p:spPr>
-        <p:txBody>
-          <a:bodyPr wrap="square" lIns="0" tIns="0" rIns="0" bIns="0" rtlCol="0" anchor="ctr"/>
-          <a:lstStyle/>
-          <a:p>
-            <a:pPr indent="0" marL="0">
+            <a:off x="548640" y="731520"/>
+            <a:ext cx="10972800" cy="548640"/>
+          </a:xfrm>
+          <a:prstGeom prst="rect">
+            <a:avLst/>
+          </a:prstGeom>
+          <a:noFill/>
+          <a:ln/>
+        </p:spPr>
+        <p:txBody>
+          <a:bodyPr wrap="square" lIns="0" tIns="0" rIns="0" bIns="0" rtlCol="0" anchor="ctr"/>
+          <a:lstStyle/>
+          <a:p>
+            <a:pPr marL="0" indent="0">
               <a:buNone/>
             </a:pPr>
             <a:r>
               <a:rPr lang="en-US" sz="2900" b="1" dirty="0">
                 <a:solidFill>
-                  <a:srgbClr val="1F3864"/>
+                  <a:srgbClr val="FFFFFF"/>
                 </a:solidFill>
                 <a:latin typeface="Segoe UI Semibold" pitchFamily="34" charset="0"/>
                 <a:ea typeface="Segoe UI Semibold" pitchFamily="34" charset="-122"/>
                 <a:cs typeface="Segoe UI Semibold" pitchFamily="34" charset="-120"/>
               </a:rPr>
-              <a:t>Weather &amp; Operational Risk</a:t>
+              <a:t>Where I'd take this next</a:t>
             </a:r>
             <a:endParaRPr lang="en-US" sz="2900" dirty="0"/>
           </a:p>
@@ -6712,517 +6503,733 @@
         </p:nvSpPr>
         <p:spPr>
           <a:xfrm>
-            <a:off x="548640" y="1691640"/>
-            <a:ext cx="5486400" cy="4023360"/>
+            <a:off x="548640" y="1645920"/>
+            <a:ext cx="5440680" cy="822960"/>
           </a:xfrm>
           <a:prstGeom prst="rect">
             <a:avLst/>
           </a:prstGeom>
           <a:solidFill>
-            <a:srgbClr val="FFFFFF"/>
+            <a:srgbClr val="27406E"/>
           </a:solidFill>
           <a:ln w="12700">
             <a:solidFill>
-              <a:srgbClr val="E0E0E0"/>
+              <a:srgbClr val="3A5488"/>
             </a:solidFill>
             <a:prstDash val="solid"/>
           </a:ln>
-          <a:effectLst>
-            <a:outerShdw sx="100000" sy="100000" kx="0" ky="0" algn="bl" rotWithShape="0" blurRad="101600" dist="38100" dir="8100000">
-              <a:srgbClr val="1F3864">
-                <a:alpha val="16000"/>
-              </a:srgbClr>
-            </a:outerShdw>
-          </a:effectLst>
-        </p:spPr>
-      </p:sp>
-      <p:sp>
-        <p:nvSpPr>
-          <p:cNvPr id="5" name="Shape 3"/>
-          <p:cNvSpPr/>
-          <p:nvPr/>
-        </p:nvSpPr>
-        <p:spPr>
-          <a:xfrm>
-            <a:off x="548640" y="1691640"/>
-            <a:ext cx="82296" cy="4023360"/>
-          </a:xfrm>
-          <a:prstGeom prst="rect">
-            <a:avLst/>
-          </a:prstGeom>
-          <a:solidFill>
-            <a:srgbClr val="2E75B6"/>
-          </a:solidFill>
-          <a:ln/>
-        </p:spPr>
-      </p:sp>
-      <p:sp>
-        <p:nvSpPr>
-          <p:cNvPr id="6" name="Text 4"/>
-          <p:cNvSpPr/>
-          <p:nvPr/>
-        </p:nvSpPr>
-        <p:spPr>
-          <a:xfrm>
-            <a:off x="777240" y="1837944"/>
-            <a:ext cx="5120640" cy="320040"/>
-          </a:xfrm>
-          <a:prstGeom prst="rect">
-            <a:avLst/>
-          </a:prstGeom>
-          <a:noFill/>
-          <a:ln/>
-        </p:spPr>
-        <p:txBody>
-          <a:bodyPr wrap="square" lIns="0" tIns="0" rIns="0" bIns="0" rtlCol="0" anchor="ctr"/>
-          <a:lstStyle/>
-          <a:p>
-            <a:pPr indent="0" marL="0">
-              <a:buNone/>
-            </a:pPr>
-            <a:r>
-              <a:rPr lang="en-US" sz="1450" b="1" dirty="0">
-                <a:solidFill>
-                  <a:srgbClr val="1F3864"/>
+        </p:spPr>
+        <p:txBody>
+          <a:bodyPr/>
+          <a:lstStyle/>
+          <a:p>
+            <a:endParaRPr lang="pt-BR"/>
+          </a:p>
+        </p:txBody>
+      </p:sp>
+      <p:sp>
+        <p:nvSpPr>
+          <p:cNvPr id="5" name="Text 3"/>
+          <p:cNvSpPr/>
+          <p:nvPr/>
+        </p:nvSpPr>
+        <p:spPr>
+          <a:xfrm>
+            <a:off x="777240" y="1755648"/>
+            <a:ext cx="5029200" cy="320040"/>
+          </a:xfrm>
+          <a:prstGeom prst="rect">
+            <a:avLst/>
+          </a:prstGeom>
+          <a:noFill/>
+          <a:ln/>
+        </p:spPr>
+        <p:txBody>
+          <a:bodyPr wrap="square" lIns="0" tIns="0" rIns="0" bIns="0" rtlCol="0" anchor="ctr"/>
+          <a:lstStyle/>
+          <a:p>
+            <a:pPr marL="0" indent="0">
+              <a:buNone/>
+            </a:pPr>
+            <a:r>
+              <a:rPr lang="en-US" sz="1400" b="1" dirty="0">
+                <a:solidFill>
+                  <a:srgbClr val="FFFFFF"/>
                 </a:solidFill>
                 <a:latin typeface="Segoe UI Semibold" pitchFamily="34" charset="0"/>
                 <a:ea typeface="Segoe UI Semibold" pitchFamily="34" charset="-122"/>
                 <a:cs typeface="Segoe UI Semibold" pitchFamily="34" charset="-120"/>
               </a:rPr>
-              <a:t>Page 6 — Seasonality (NOAA)</a:t>
-            </a:r>
-            <a:endParaRPr lang="en-US" sz="1450" dirty="0"/>
-          </a:p>
-        </p:txBody>
-      </p:sp>
-      <p:sp>
-        <p:nvSpPr>
-          <p:cNvPr id="7" name="Text 5"/>
-          <p:cNvSpPr/>
-          <p:nvPr/>
-        </p:nvSpPr>
-        <p:spPr>
-          <a:xfrm>
-            <a:off x="777240" y="2203704"/>
-            <a:ext cx="5120640" cy="3383280"/>
-          </a:xfrm>
-          <a:prstGeom prst="rect">
-            <a:avLst/>
-          </a:prstGeom>
-          <a:noFill/>
-          <a:ln/>
-        </p:spPr>
-        <p:txBody>
-          <a:bodyPr wrap="square" lIns="0" tIns="0" rIns="0" bIns="0" rtlCol="0" anchor="t"/>
-          <a:lstStyle/>
-          <a:p>
-            <a:pPr indent="0" marL="0">
-              <a:buNone/>
-            </a:pPr>
-            <a:r>
-              <a:rPr lang="en-US" sz="1200" dirty="0">
-                <a:solidFill>
-                  <a:srgbClr val="595959"/>
+              <a:t>Real-time refresh</a:t>
+            </a:r>
+            <a:endParaRPr lang="en-US" sz="1400" dirty="0"/>
+          </a:p>
+        </p:txBody>
+      </p:sp>
+      <p:sp>
+        <p:nvSpPr>
+          <p:cNvPr id="6" name="Text 4"/>
+          <p:cNvSpPr/>
+          <p:nvPr/>
+        </p:nvSpPr>
+        <p:spPr>
+          <a:xfrm>
+            <a:off x="777240" y="2084832"/>
+            <a:ext cx="5029200" cy="320040"/>
+          </a:xfrm>
+          <a:prstGeom prst="rect">
+            <a:avLst/>
+          </a:prstGeom>
+          <a:noFill/>
+          <a:ln/>
+        </p:spPr>
+        <p:txBody>
+          <a:bodyPr wrap="square" lIns="0" tIns="0" rIns="0" bIns="0" rtlCol="0" anchor="ctr"/>
+          <a:lstStyle/>
+          <a:p>
+            <a:pPr marL="0" indent="0">
+              <a:buNone/>
+            </a:pPr>
+            <a:r>
+              <a:rPr lang="en-US" sz="1150" dirty="0">
+                <a:solidFill>
+                  <a:srgbClr val="BDD7EE"/>
                 </a:solidFill>
                 <a:latin typeface="Segoe UI" pitchFamily="34" charset="0"/>
                 <a:ea typeface="Segoe UI" pitchFamily="34" charset="-122"/>
                 <a:cs typeface="Segoe UI" pitchFamily="34" charset="-120"/>
               </a:rPr>
-              <a:t>The 2nd external source: NOAA weather joined onto dim_date.</a:t>
-            </a:r>
-            <a:endParaRPr lang="en-US" sz="1200" dirty="0"/>
-          </a:p>
-          <a:p>
-            <a:pPr indent="0" marL="0">
-              <a:buNone/>
-            </a:pPr>
-            <a:endParaRPr lang="en-US" sz="1200" dirty="0"/>
-          </a:p>
-          <a:p>
-            <a:pPr indent="0" marL="0">
-              <a:buNone/>
-            </a:pPr>
-            <a:r>
-              <a:rPr lang="en-US" sz="1200" dirty="0">
-                <a:solidFill>
-                  <a:srgbClr val="595959"/>
+              <a:t>scheduled pipeline in production</a:t>
+            </a:r>
+            <a:endParaRPr lang="en-US" sz="1150" dirty="0"/>
+          </a:p>
+        </p:txBody>
+      </p:sp>
+      <p:sp>
+        <p:nvSpPr>
+          <p:cNvPr id="7" name="Shape 5"/>
+          <p:cNvSpPr/>
+          <p:nvPr/>
+        </p:nvSpPr>
+        <p:spPr>
+          <a:xfrm>
+            <a:off x="6263640" y="1645920"/>
+            <a:ext cx="5440680" cy="822960"/>
+          </a:xfrm>
+          <a:prstGeom prst="rect">
+            <a:avLst/>
+          </a:prstGeom>
+          <a:solidFill>
+            <a:srgbClr val="27406E"/>
+          </a:solidFill>
+          <a:ln w="12700">
+            <a:solidFill>
+              <a:srgbClr val="3A5488"/>
+            </a:solidFill>
+            <a:prstDash val="solid"/>
+          </a:ln>
+        </p:spPr>
+        <p:txBody>
+          <a:bodyPr/>
+          <a:lstStyle/>
+          <a:p>
+            <a:endParaRPr lang="pt-BR"/>
+          </a:p>
+        </p:txBody>
+      </p:sp>
+      <p:sp>
+        <p:nvSpPr>
+          <p:cNvPr id="8" name="Text 6"/>
+          <p:cNvSpPr/>
+          <p:nvPr/>
+        </p:nvSpPr>
+        <p:spPr>
+          <a:xfrm>
+            <a:off x="6492240" y="1755648"/>
+            <a:ext cx="5029200" cy="320040"/>
+          </a:xfrm>
+          <a:prstGeom prst="rect">
+            <a:avLst/>
+          </a:prstGeom>
+          <a:noFill/>
+          <a:ln/>
+        </p:spPr>
+        <p:txBody>
+          <a:bodyPr wrap="square" lIns="0" tIns="0" rIns="0" bIns="0" rtlCol="0" anchor="ctr"/>
+          <a:lstStyle/>
+          <a:p>
+            <a:pPr marL="0" indent="0">
+              <a:buNone/>
+            </a:pPr>
+            <a:r>
+              <a:rPr lang="en-US" sz="1400" b="1" dirty="0">
+                <a:solidFill>
+                  <a:srgbClr val="FFFFFF"/>
+                </a:solidFill>
+                <a:latin typeface="Segoe UI Semibold" pitchFamily="34" charset="0"/>
+                <a:ea typeface="Segoe UI Semibold" pitchFamily="34" charset="-122"/>
+                <a:cs typeface="Segoe UI Semibold" pitchFamily="34" charset="-120"/>
+              </a:rPr>
+              <a:t>Zone-level enrichment</a:t>
+            </a:r>
+            <a:endParaRPr lang="en-US" sz="1400" dirty="0"/>
+          </a:p>
+        </p:txBody>
+      </p:sp>
+      <p:sp>
+        <p:nvSpPr>
+          <p:cNvPr id="9" name="Text 7"/>
+          <p:cNvSpPr/>
+          <p:nvPr/>
+        </p:nvSpPr>
+        <p:spPr>
+          <a:xfrm>
+            <a:off x="6492240" y="2084832"/>
+            <a:ext cx="5029200" cy="320040"/>
+          </a:xfrm>
+          <a:prstGeom prst="rect">
+            <a:avLst/>
+          </a:prstGeom>
+          <a:noFill/>
+          <a:ln/>
+        </p:spPr>
+        <p:txBody>
+          <a:bodyPr wrap="square" lIns="0" tIns="0" rIns="0" bIns="0" rtlCol="0" anchor="ctr"/>
+          <a:lstStyle/>
+          <a:p>
+            <a:pPr marL="0" indent="0">
+              <a:buNone/>
+            </a:pPr>
+            <a:r>
+              <a:rPr lang="en-US" sz="1150" dirty="0">
+                <a:solidFill>
+                  <a:srgbClr val="BDD7EE"/>
                 </a:solidFill>
                 <a:latin typeface="Segoe UI" pitchFamily="34" charset="0"/>
                 <a:ea typeface="Segoe UI" pitchFamily="34" charset="-122"/>
                 <a:cs typeface="Segoe UI" pitchFamily="34" charset="-120"/>
               </a:rPr>
-              <a:t>• Fall is the stress season: 2nd-highest volume (109k trips/day) with the worst lead time (18.46 min).</a:t>
-            </a:r>
-            <a:endParaRPr lang="en-US" sz="1200" dirty="0"/>
-          </a:p>
-          <a:p>
-            <a:pPr indent="0" marL="0">
-              <a:buNone/>
-            </a:pPr>
-            <a:endParaRPr lang="en-US" sz="1200" dirty="0"/>
-          </a:p>
-          <a:p>
-            <a:pPr indent="0" marL="0">
-              <a:buNone/>
-            </a:pPr>
-            <a:r>
-              <a:rPr lang="en-US" sz="1200" dirty="0">
-                <a:solidFill>
-                  <a:srgbClr val="595959"/>
+              <a:t>NTA↔zone spatial join (Geopandas)</a:t>
+            </a:r>
+            <a:endParaRPr lang="en-US" sz="1150" dirty="0"/>
+          </a:p>
+        </p:txBody>
+      </p:sp>
+      <p:sp>
+        <p:nvSpPr>
+          <p:cNvPr id="10" name="Shape 8"/>
+          <p:cNvSpPr/>
+          <p:nvPr/>
+        </p:nvSpPr>
+        <p:spPr>
+          <a:xfrm>
+            <a:off x="548640" y="2606040"/>
+            <a:ext cx="5440680" cy="822960"/>
+          </a:xfrm>
+          <a:prstGeom prst="rect">
+            <a:avLst/>
+          </a:prstGeom>
+          <a:solidFill>
+            <a:srgbClr val="27406E"/>
+          </a:solidFill>
+          <a:ln w="12700">
+            <a:solidFill>
+              <a:srgbClr val="3A5488"/>
+            </a:solidFill>
+            <a:prstDash val="solid"/>
+          </a:ln>
+        </p:spPr>
+        <p:txBody>
+          <a:bodyPr/>
+          <a:lstStyle/>
+          <a:p>
+            <a:endParaRPr lang="pt-BR"/>
+          </a:p>
+        </p:txBody>
+      </p:sp>
+      <p:sp>
+        <p:nvSpPr>
+          <p:cNvPr id="11" name="Text 9"/>
+          <p:cNvSpPr/>
+          <p:nvPr/>
+        </p:nvSpPr>
+        <p:spPr>
+          <a:xfrm>
+            <a:off x="777240" y="2715768"/>
+            <a:ext cx="5029200" cy="320040"/>
+          </a:xfrm>
+          <a:prstGeom prst="rect">
+            <a:avLst/>
+          </a:prstGeom>
+          <a:noFill/>
+          <a:ln/>
+        </p:spPr>
+        <p:txBody>
+          <a:bodyPr wrap="square" lIns="0" tIns="0" rIns="0" bIns="0" rtlCol="0" anchor="ctr"/>
+          <a:lstStyle/>
+          <a:p>
+            <a:pPr marL="0" indent="0">
+              <a:buNone/>
+            </a:pPr>
+            <a:r>
+              <a:rPr lang="en-US" sz="1400" b="1" dirty="0">
+                <a:solidFill>
+                  <a:srgbClr val="FFFFFF"/>
+                </a:solidFill>
+                <a:latin typeface="Segoe UI Semibold" pitchFamily="34" charset="0"/>
+                <a:ea typeface="Segoe UI Semibold" pitchFamily="34" charset="-122"/>
+                <a:cs typeface="Segoe UI Semibold" pitchFamily="34" charset="-120"/>
+              </a:rPr>
+              <a:t>Demand forecasting</a:t>
+            </a:r>
+            <a:endParaRPr lang="en-US" sz="1400" dirty="0"/>
+          </a:p>
+        </p:txBody>
+      </p:sp>
+      <p:sp>
+        <p:nvSpPr>
+          <p:cNvPr id="12" name="Text 10"/>
+          <p:cNvSpPr/>
+          <p:nvPr/>
+        </p:nvSpPr>
+        <p:spPr>
+          <a:xfrm>
+            <a:off x="777240" y="3044952"/>
+            <a:ext cx="5029200" cy="320040"/>
+          </a:xfrm>
+          <a:prstGeom prst="rect">
+            <a:avLst/>
+          </a:prstGeom>
+          <a:noFill/>
+          <a:ln/>
+        </p:spPr>
+        <p:txBody>
+          <a:bodyPr wrap="square" lIns="0" tIns="0" rIns="0" bIns="0" rtlCol="0" anchor="ctr"/>
+          <a:lstStyle/>
+          <a:p>
+            <a:pPr marL="0" indent="0">
+              <a:buNone/>
+            </a:pPr>
+            <a:r>
+              <a:rPr lang="en-US" sz="1150" dirty="0">
+                <a:solidFill>
+                  <a:srgbClr val="BDD7EE"/>
                 </a:solidFill>
                 <a:latin typeface="Segoe UI" pitchFamily="34" charset="0"/>
                 <a:ea typeface="Segoe UI" pitchFamily="34" charset="-122"/>
                 <a:cs typeface="Segoe UI" pitchFamily="34" charset="-120"/>
               </a:rPr>
-              <a:t>• +1.71 min vs the winter baseline — high volume × slow cycle = peak cost-to-serve.</a:t>
-            </a:r>
-            <a:endParaRPr lang="en-US" sz="1200" dirty="0"/>
-          </a:p>
-          <a:p>
-            <a:pPr indent="0" marL="0">
-              <a:buNone/>
-            </a:pPr>
-            <a:endParaRPr lang="en-US" sz="1200" dirty="0"/>
-          </a:p>
-          <a:p>
-            <a:pPr indent="0" marL="0">
-              <a:buNone/>
-            </a:pPr>
-            <a:r>
-              <a:rPr lang="en-US" sz="1200" dirty="0">
-                <a:solidFill>
-                  <a:srgbClr val="595959"/>
+              <a:t>time-series per zone/hour, weather-aware</a:t>
+            </a:r>
+            <a:endParaRPr lang="en-US" sz="1150" dirty="0"/>
+          </a:p>
+        </p:txBody>
+      </p:sp>
+      <p:sp>
+        <p:nvSpPr>
+          <p:cNvPr id="13" name="Shape 11"/>
+          <p:cNvSpPr/>
+          <p:nvPr/>
+        </p:nvSpPr>
+        <p:spPr>
+          <a:xfrm>
+            <a:off x="6263640" y="2606040"/>
+            <a:ext cx="5440680" cy="822960"/>
+          </a:xfrm>
+          <a:prstGeom prst="rect">
+            <a:avLst/>
+          </a:prstGeom>
+          <a:solidFill>
+            <a:srgbClr val="27406E"/>
+          </a:solidFill>
+          <a:ln w="12700">
+            <a:solidFill>
+              <a:srgbClr val="3A5488"/>
+            </a:solidFill>
+            <a:prstDash val="solid"/>
+          </a:ln>
+        </p:spPr>
+        <p:txBody>
+          <a:bodyPr/>
+          <a:lstStyle/>
+          <a:p>
+            <a:endParaRPr lang="pt-BR"/>
+          </a:p>
+        </p:txBody>
+      </p:sp>
+      <p:sp>
+        <p:nvSpPr>
+          <p:cNvPr id="14" name="Text 12"/>
+          <p:cNvSpPr/>
+          <p:nvPr/>
+        </p:nvSpPr>
+        <p:spPr>
+          <a:xfrm>
+            <a:off x="6492240" y="2715768"/>
+            <a:ext cx="5029200" cy="320040"/>
+          </a:xfrm>
+          <a:prstGeom prst="rect">
+            <a:avLst/>
+          </a:prstGeom>
+          <a:noFill/>
+          <a:ln/>
+        </p:spPr>
+        <p:txBody>
+          <a:bodyPr wrap="square" lIns="0" tIns="0" rIns="0" bIns="0" rtlCol="0" anchor="ctr"/>
+          <a:lstStyle/>
+          <a:p>
+            <a:pPr marL="0" indent="0">
+              <a:buNone/>
+            </a:pPr>
+            <a:r>
+              <a:rPr lang="en-US" sz="1400" b="1" dirty="0">
+                <a:solidFill>
+                  <a:srgbClr val="FFFFFF"/>
+                </a:solidFill>
+                <a:latin typeface="Segoe UI Semibold" pitchFamily="34" charset="0"/>
+                <a:ea typeface="Segoe UI Semibold" pitchFamily="34" charset="-122"/>
+                <a:cs typeface="Segoe UI Semibold" pitchFamily="34" charset="-120"/>
+              </a:rPr>
+              <a:t>Anomaly detection (ML)</a:t>
+            </a:r>
+            <a:endParaRPr lang="en-US" sz="1400" dirty="0"/>
+          </a:p>
+        </p:txBody>
+      </p:sp>
+      <p:sp>
+        <p:nvSpPr>
+          <p:cNvPr id="15" name="Text 13"/>
+          <p:cNvSpPr/>
+          <p:nvPr/>
+        </p:nvSpPr>
+        <p:spPr>
+          <a:xfrm>
+            <a:off x="6492240" y="3044952"/>
+            <a:ext cx="5029200" cy="320040"/>
+          </a:xfrm>
+          <a:prstGeom prst="rect">
+            <a:avLst/>
+          </a:prstGeom>
+          <a:noFill/>
+          <a:ln/>
+        </p:spPr>
+        <p:txBody>
+          <a:bodyPr wrap="square" lIns="0" tIns="0" rIns="0" bIns="0" rtlCol="0" anchor="ctr"/>
+          <a:lstStyle/>
+          <a:p>
+            <a:pPr marL="0" indent="0">
+              <a:buNone/>
+            </a:pPr>
+            <a:r>
+              <a:rPr lang="en-US" sz="1150" dirty="0">
+                <a:solidFill>
+                  <a:srgbClr val="BDD7EE"/>
                 </a:solidFill>
                 <a:latin typeface="Segoe UI" pitchFamily="34" charset="0"/>
                 <a:ea typeface="Segoe UI" pitchFamily="34" charset="-122"/>
                 <a:cs typeface="Segoe UI" pitchFamily="34" charset="-120"/>
               </a:rPr>
-              <a:t>• Spring is the true volume peak (113k trips/day) but operationally efficient (17.44 min).</a:t>
-            </a:r>
-            <a:endParaRPr lang="en-US" sz="1200" dirty="0"/>
-          </a:p>
-          <a:p>
-            <a:pPr indent="0" marL="0">
-              <a:buNone/>
-            </a:pPr>
-            <a:endParaRPr lang="en-US" sz="1200" dirty="0"/>
-          </a:p>
-          <a:p>
-            <a:pPr indent="0" marL="0">
-              <a:buNone/>
-            </a:pPr>
-            <a:r>
-              <a:rPr lang="en-US" sz="1200" dirty="0">
-                <a:solidFill>
-                  <a:srgbClr val="595959"/>
+              <a:t>beyond rule-based flags</a:t>
+            </a:r>
+            <a:endParaRPr lang="en-US" sz="1150" dirty="0"/>
+          </a:p>
+        </p:txBody>
+      </p:sp>
+      <p:sp>
+        <p:nvSpPr>
+          <p:cNvPr id="16" name="Shape 14"/>
+          <p:cNvSpPr/>
+          <p:nvPr/>
+        </p:nvSpPr>
+        <p:spPr>
+          <a:xfrm>
+            <a:off x="548640" y="3566160"/>
+            <a:ext cx="5440680" cy="822960"/>
+          </a:xfrm>
+          <a:prstGeom prst="rect">
+            <a:avLst/>
+          </a:prstGeom>
+          <a:solidFill>
+            <a:srgbClr val="27406E"/>
+          </a:solidFill>
+          <a:ln w="12700">
+            <a:solidFill>
+              <a:srgbClr val="3A5488"/>
+            </a:solidFill>
+            <a:prstDash val="solid"/>
+          </a:ln>
+        </p:spPr>
+        <p:txBody>
+          <a:bodyPr/>
+          <a:lstStyle/>
+          <a:p>
+            <a:endParaRPr lang="pt-BR"/>
+          </a:p>
+        </p:txBody>
+      </p:sp>
+      <p:sp>
+        <p:nvSpPr>
+          <p:cNvPr id="17" name="Text 15"/>
+          <p:cNvSpPr/>
+          <p:nvPr/>
+        </p:nvSpPr>
+        <p:spPr>
+          <a:xfrm>
+            <a:off x="777240" y="3675888"/>
+            <a:ext cx="5029200" cy="320040"/>
+          </a:xfrm>
+          <a:prstGeom prst="rect">
+            <a:avLst/>
+          </a:prstGeom>
+          <a:noFill/>
+          <a:ln/>
+        </p:spPr>
+        <p:txBody>
+          <a:bodyPr wrap="square" lIns="0" tIns="0" rIns="0" bIns="0" rtlCol="0" anchor="ctr"/>
+          <a:lstStyle/>
+          <a:p>
+            <a:pPr marL="0" indent="0">
+              <a:buNone/>
+            </a:pPr>
+            <a:r>
+              <a:rPr lang="en-US" sz="1400" b="1" dirty="0">
+                <a:solidFill>
+                  <a:srgbClr val="FFFFFF"/>
+                </a:solidFill>
+                <a:latin typeface="Segoe UI Semibold" pitchFamily="34" charset="0"/>
+                <a:ea typeface="Segoe UI Semibold" pitchFamily="34" charset="-122"/>
+                <a:cs typeface="Segoe UI Semibold" pitchFamily="34" charset="-120"/>
+              </a:rPr>
+              <a:t>Deploy &amp; govern</a:t>
+            </a:r>
+            <a:endParaRPr lang="en-US" sz="1400" dirty="0"/>
+          </a:p>
+        </p:txBody>
+      </p:sp>
+      <p:sp>
+        <p:nvSpPr>
+          <p:cNvPr id="18" name="Text 16"/>
+          <p:cNvSpPr/>
+          <p:nvPr/>
+        </p:nvSpPr>
+        <p:spPr>
+          <a:xfrm>
+            <a:off x="777240" y="4005072"/>
+            <a:ext cx="5029200" cy="320040"/>
+          </a:xfrm>
+          <a:prstGeom prst="rect">
+            <a:avLst/>
+          </a:prstGeom>
+          <a:noFill/>
+          <a:ln/>
+        </p:spPr>
+        <p:txBody>
+          <a:bodyPr wrap="square" lIns="0" tIns="0" rIns="0" bIns="0" rtlCol="0" anchor="ctr"/>
+          <a:lstStyle/>
+          <a:p>
+            <a:pPr marL="0" indent="0">
+              <a:buNone/>
+            </a:pPr>
+            <a:r>
+              <a:rPr lang="en-US" sz="1150" dirty="0">
+                <a:solidFill>
+                  <a:srgbClr val="BDD7EE"/>
                 </a:solidFill>
                 <a:latin typeface="Segoe UI" pitchFamily="34" charset="0"/>
                 <a:ea typeface="Segoe UI" pitchFamily="34" charset="-122"/>
                 <a:cs typeface="Segoe UI" pitchFamily="34" charset="-120"/>
               </a:rPr>
-              <a:t>• Winter = low demand + fastest cycle (16.75 min) → maintenance &amp; capacity window.</a:t>
-            </a:r>
-            <a:endParaRPr lang="en-US" sz="1200" dirty="0"/>
-          </a:p>
-        </p:txBody>
-      </p:sp>
-      <p:sp>
-        <p:nvSpPr>
-          <p:cNvPr id="8" name="Shape 6"/>
-          <p:cNvSpPr/>
-          <p:nvPr/>
-        </p:nvSpPr>
-        <p:spPr>
-          <a:xfrm>
-            <a:off x="6309360" y="1691640"/>
-            <a:ext cx="5303520" cy="4023360"/>
+              <a:t>Fabric deployment pipelines + expand RLS</a:t>
+            </a:r>
+            <a:endParaRPr lang="en-US" sz="1150" dirty="0"/>
+          </a:p>
+        </p:txBody>
+      </p:sp>
+      <p:sp>
+        <p:nvSpPr>
+          <p:cNvPr id="19" name="Shape 17"/>
+          <p:cNvSpPr/>
+          <p:nvPr/>
+        </p:nvSpPr>
+        <p:spPr>
+          <a:xfrm>
+            <a:off x="6263640" y="3566160"/>
+            <a:ext cx="5440680" cy="822960"/>
           </a:xfrm>
           <a:prstGeom prst="rect">
             <a:avLst/>
           </a:prstGeom>
           <a:solidFill>
-            <a:srgbClr val="FFFFFF"/>
+            <a:srgbClr val="27406E"/>
           </a:solidFill>
           <a:ln w="12700">
             <a:solidFill>
-              <a:srgbClr val="E0E0E0"/>
+              <a:srgbClr val="3A5488"/>
             </a:solidFill>
             <a:prstDash val="solid"/>
           </a:ln>
-          <a:effectLst>
-            <a:outerShdw sx="100000" sy="100000" kx="0" ky="0" algn="bl" rotWithShape="0" blurRad="101600" dist="38100" dir="8100000">
-              <a:srgbClr val="1F3864">
-                <a:alpha val="16000"/>
-              </a:srgbClr>
-            </a:outerShdw>
-          </a:effectLst>
-        </p:spPr>
-      </p:sp>
-      <p:sp>
-        <p:nvSpPr>
-          <p:cNvPr id="9" name="Shape 7"/>
-          <p:cNvSpPr/>
-          <p:nvPr/>
-        </p:nvSpPr>
-        <p:spPr>
-          <a:xfrm>
-            <a:off x="6309360" y="1691640"/>
-            <a:ext cx="82296" cy="4023360"/>
-          </a:xfrm>
-          <a:prstGeom prst="rect">
-            <a:avLst/>
-          </a:prstGeom>
-          <a:solidFill>
-            <a:srgbClr val="22A06B"/>
-          </a:solidFill>
-          <a:ln/>
-        </p:spPr>
-      </p:sp>
-      <p:sp>
-        <p:nvSpPr>
-          <p:cNvPr id="10" name="Text 8"/>
-          <p:cNvSpPr/>
-          <p:nvPr/>
-        </p:nvSpPr>
-        <p:spPr>
-          <a:xfrm>
-            <a:off x="6537960" y="1837944"/>
-            <a:ext cx="4937760" cy="320040"/>
-          </a:xfrm>
-          <a:prstGeom prst="rect">
-            <a:avLst/>
-          </a:prstGeom>
-          <a:noFill/>
-          <a:ln/>
-        </p:spPr>
-        <p:txBody>
-          <a:bodyPr wrap="square" lIns="0" tIns="0" rIns="0" bIns="0" rtlCol="0" anchor="ctr"/>
-          <a:lstStyle/>
-          <a:p>
-            <a:pPr indent="0" marL="0">
-              <a:buNone/>
-            </a:pPr>
-            <a:r>
-              <a:rPr lang="en-US" sz="1450" b="1" dirty="0">
-                <a:solidFill>
-                  <a:srgbClr val="1F3864"/>
+        </p:spPr>
+        <p:txBody>
+          <a:bodyPr/>
+          <a:lstStyle/>
+          <a:p>
+            <a:endParaRPr lang="pt-BR"/>
+          </a:p>
+        </p:txBody>
+      </p:sp>
+      <p:sp>
+        <p:nvSpPr>
+          <p:cNvPr id="20" name="Text 18"/>
+          <p:cNvSpPr/>
+          <p:nvPr/>
+        </p:nvSpPr>
+        <p:spPr>
+          <a:xfrm>
+            <a:off x="6492240" y="3675888"/>
+            <a:ext cx="5029200" cy="320040"/>
+          </a:xfrm>
+          <a:prstGeom prst="rect">
+            <a:avLst/>
+          </a:prstGeom>
+          <a:noFill/>
+          <a:ln/>
+        </p:spPr>
+        <p:txBody>
+          <a:bodyPr wrap="square" lIns="0" tIns="0" rIns="0" bIns="0" rtlCol="0" anchor="ctr"/>
+          <a:lstStyle/>
+          <a:p>
+            <a:pPr marL="0" indent="0">
+              <a:buNone/>
+            </a:pPr>
+            <a:r>
+              <a:rPr lang="en-US" sz="1400" b="1" dirty="0">
+                <a:solidFill>
+                  <a:srgbClr val="FFFFFF"/>
                 </a:solidFill>
                 <a:latin typeface="Segoe UI Semibold" pitchFamily="34" charset="0"/>
                 <a:ea typeface="Segoe UI Semibold" pitchFamily="34" charset="-122"/>
                 <a:cs typeface="Segoe UI Semibold" pitchFamily="34" charset="-120"/>
               </a:rPr>
-              <a:t>Page 6 — Extreme weather</a:t>
-            </a:r>
-            <a:endParaRPr lang="en-US" sz="1450" dirty="0"/>
-          </a:p>
-        </p:txBody>
-      </p:sp>
-      <p:sp>
-        <p:nvSpPr>
-          <p:cNvPr id="11" name="Text 9"/>
-          <p:cNvSpPr/>
-          <p:nvPr/>
-        </p:nvSpPr>
-        <p:spPr>
-          <a:xfrm>
-            <a:off x="6537960" y="2203704"/>
-            <a:ext cx="4937760" cy="3383280"/>
-          </a:xfrm>
-          <a:prstGeom prst="rect">
-            <a:avLst/>
-          </a:prstGeom>
-          <a:noFill/>
-          <a:ln/>
-        </p:spPr>
-        <p:txBody>
-          <a:bodyPr wrap="square" lIns="0" tIns="0" rIns="0" bIns="0" rtlCol="0" anchor="t"/>
-          <a:lstStyle/>
-          <a:p>
-            <a:pPr indent="0" marL="0">
-              <a:buNone/>
-            </a:pPr>
-            <a:r>
-              <a:rPr lang="en-US" sz="1200" dirty="0">
-                <a:solidFill>
-                  <a:srgbClr val="595959"/>
+              <a:t>Portfolio case (Part 2)</a:t>
+            </a:r>
+            <a:endParaRPr lang="en-US" sz="1400" dirty="0"/>
+          </a:p>
+        </p:txBody>
+      </p:sp>
+      <p:sp>
+        <p:nvSpPr>
+          <p:cNvPr id="21" name="Text 19"/>
+          <p:cNvSpPr/>
+          <p:nvPr/>
+        </p:nvSpPr>
+        <p:spPr>
+          <a:xfrm>
+            <a:off x="6492240" y="4005072"/>
+            <a:ext cx="5029200" cy="320040"/>
+          </a:xfrm>
+          <a:prstGeom prst="rect">
+            <a:avLst/>
+          </a:prstGeom>
+          <a:noFill/>
+          <a:ln/>
+        </p:spPr>
+        <p:txBody>
+          <a:bodyPr wrap="square" lIns="0" tIns="0" rIns="0" bIns="0" rtlCol="0" anchor="ctr"/>
+          <a:lstStyle/>
+          <a:p>
+            <a:pPr marL="0" indent="0">
+              <a:buNone/>
+            </a:pPr>
+            <a:r>
+              <a:rPr lang="en-US" sz="1150" dirty="0">
+                <a:solidFill>
+                  <a:srgbClr val="BDD7EE"/>
                 </a:solidFill>
                 <a:latin typeface="Segoe UI" pitchFamily="34" charset="0"/>
                 <a:ea typeface="Segoe UI" pitchFamily="34" charset="-122"/>
                 <a:cs typeface="Segoe UI" pitchFamily="34" charset="-120"/>
               </a:rPr>
-              <a:t>Do external shocks change the operation?</a:t>
-            </a:r>
-            <a:endParaRPr lang="en-US" sz="1200" dirty="0"/>
-          </a:p>
-          <a:p>
-            <a:pPr indent="0" marL="0">
-              <a:buNone/>
-            </a:pPr>
-            <a:endParaRPr lang="en-US" sz="1200" dirty="0"/>
-          </a:p>
-          <a:p>
-            <a:pPr indent="0" marL="0">
-              <a:buNone/>
-            </a:pPr>
-            <a:r>
-              <a:rPr lang="en-US" sz="1200" dirty="0">
-                <a:solidFill>
-                  <a:srgbClr val="595959"/>
+              <a:t>apply the same method to a real project</a:t>
+            </a:r>
+            <a:endParaRPr lang="en-US" sz="1150" dirty="0"/>
+          </a:p>
+        </p:txBody>
+      </p:sp>
+      <p:sp>
+        <p:nvSpPr>
+          <p:cNvPr id="22" name="Text 20"/>
+          <p:cNvSpPr/>
+          <p:nvPr/>
+        </p:nvSpPr>
+        <p:spPr>
+          <a:xfrm>
+            <a:off x="548640" y="5029200"/>
+            <a:ext cx="11064240" cy="548640"/>
+          </a:xfrm>
+          <a:prstGeom prst="rect">
+            <a:avLst/>
+          </a:prstGeom>
+          <a:noFill/>
+          <a:ln/>
+        </p:spPr>
+        <p:txBody>
+          <a:bodyPr wrap="square" lIns="0" tIns="0" rIns="0" bIns="0" rtlCol="0" anchor="ctr"/>
+          <a:lstStyle/>
+          <a:p>
+            <a:pPr marL="0" indent="0" algn="ctr">
+              <a:buNone/>
+            </a:pPr>
+            <a:r>
+              <a:rPr lang="en-US" sz="2400" b="1" dirty="0">
+                <a:solidFill>
+                  <a:srgbClr val="FFFFFF"/>
+                </a:solidFill>
+                <a:latin typeface="Segoe UI Semibold" pitchFamily="34" charset="0"/>
+                <a:ea typeface="Segoe UI Semibold" pitchFamily="34" charset="-122"/>
+                <a:cs typeface="Segoe UI Semibold" pitchFamily="34" charset="-120"/>
+              </a:rPr>
+              <a:t>Thank you  ·  Questions?</a:t>
+            </a:r>
+            <a:endParaRPr lang="en-US" sz="2400" dirty="0"/>
+          </a:p>
+        </p:txBody>
+      </p:sp>
+      <p:sp>
+        <p:nvSpPr>
+          <p:cNvPr id="23" name="Text 21"/>
+          <p:cNvSpPr/>
+          <p:nvPr/>
+        </p:nvSpPr>
+        <p:spPr>
+          <a:xfrm>
+            <a:off x="548640" y="5669280"/>
+            <a:ext cx="11064240" cy="365760"/>
+          </a:xfrm>
+          <a:prstGeom prst="rect">
+            <a:avLst/>
+          </a:prstGeom>
+          <a:noFill/>
+          <a:ln/>
+        </p:spPr>
+        <p:txBody>
+          <a:bodyPr wrap="square" lIns="0" tIns="0" rIns="0" bIns="0" rtlCol="0" anchor="ctr"/>
+          <a:lstStyle/>
+          <a:p>
+            <a:pPr marL="0" indent="0" algn="ctr">
+              <a:buNone/>
+            </a:pPr>
+            <a:r>
+              <a:rPr lang="en-US" sz="1300" dirty="0">
+                <a:solidFill>
+                  <a:srgbClr val="BDD7EE"/>
                 </a:solidFill>
                 <a:latin typeface="Segoe UI" pitchFamily="34" charset="0"/>
                 <a:ea typeface="Segoe UI" pitchFamily="34" charset="-122"/>
                 <a:cs typeface="Segoe UI" pitchFamily="34" charset="-120"/>
               </a:rPr>
-              <a:t>• Only 4 extreme days in 1,096 — but demand drops 36% (106k → 68k trips/day).</a:t>
-            </a:r>
-            <a:endParaRPr lang="en-US" sz="1200" dirty="0"/>
-          </a:p>
-          <a:p>
-            <a:pPr indent="0" marL="0">
-              <a:buNone/>
-            </a:pPr>
-            <a:endParaRPr lang="en-US" sz="1200" dirty="0"/>
-          </a:p>
-          <a:p>
-            <a:pPr indent="0" marL="0">
-              <a:buNone/>
-            </a:pPr>
-            <a:r>
-              <a:rPr lang="en-US" sz="1200" dirty="0">
-                <a:solidFill>
-                  <a:srgbClr val="595959"/>
-                </a:solidFill>
-                <a:latin typeface="Segoe UI" pitchFamily="34" charset="0"/>
-                <a:ea typeface="Segoe UI" pitchFamily="34" charset="-122"/>
-                <a:cs typeface="Segoe UI" pitchFamily="34" charset="-120"/>
-              </a:rPr>
-              <a:t>• Counter-intuitively, lead time gets ~3.8 min faster and the average fare falls.</a:t>
-            </a:r>
-            <a:endParaRPr lang="en-US" sz="1200" dirty="0"/>
-          </a:p>
-          <a:p>
-            <a:pPr indent="0" marL="0">
-              <a:buNone/>
-            </a:pPr>
-            <a:endParaRPr lang="en-US" sz="1200" dirty="0"/>
-          </a:p>
-          <a:p>
-            <a:pPr indent="0" marL="0">
-              <a:buNone/>
-            </a:pPr>
-            <a:r>
-              <a:rPr lang="en-US" sz="1200" dirty="0">
-                <a:solidFill>
-                  <a:srgbClr val="595959"/>
-                </a:solidFill>
-                <a:latin typeface="Segoe UI" pitchFamily="34" charset="0"/>
-                <a:ea typeface="Segoe UI" pitchFamily="34" charset="-122"/>
-                <a:cs typeface="Segoe UI" pitchFamily="34" charset="-120"/>
-              </a:rPr>
-              <a:t>• Demand self-selection: only the essential trips remain, and with less traffic the cycle shortens.</a:t>
-            </a:r>
-            <a:endParaRPr lang="en-US" sz="1200" dirty="0"/>
-          </a:p>
-          <a:p>
-            <a:pPr indent="0" marL="0">
-              <a:buNone/>
-            </a:pPr>
-            <a:endParaRPr lang="en-US" sz="1200" dirty="0"/>
-          </a:p>
-          <a:p>
-            <a:pPr indent="0" marL="0">
-              <a:buNone/>
-            </a:pPr>
-            <a:r>
-              <a:rPr lang="en-US" sz="1200" dirty="0">
-                <a:solidFill>
-                  <a:srgbClr val="595959"/>
-                </a:solidFill>
-                <a:latin typeface="Segoe UI" pitchFamily="34" charset="0"/>
-                <a:ea typeface="Segoe UI" pitchFamily="34" charset="-122"/>
-                <a:cs typeface="Segoe UI" pitchFamily="34" charset="-120"/>
-              </a:rPr>
-              <a:t>Supply-chain parallel: a disruption that cuts volume but reshapes the network.</a:t>
-            </a:r>
-            <a:endParaRPr lang="en-US" sz="1200" dirty="0"/>
-          </a:p>
-        </p:txBody>
-      </p:sp>
-      <p:sp>
-        <p:nvSpPr>
-          <p:cNvPr id="12" name="Text 10"/>
-          <p:cNvSpPr/>
-          <p:nvPr/>
-        </p:nvSpPr>
-        <p:spPr>
-          <a:xfrm>
-            <a:off x="548640" y="6455664"/>
-            <a:ext cx="7315200" cy="274320"/>
-          </a:xfrm>
-          <a:prstGeom prst="rect">
-            <a:avLst/>
-          </a:prstGeom>
-          <a:noFill/>
-          <a:ln/>
-        </p:spPr>
-        <p:txBody>
-          <a:bodyPr wrap="square" lIns="0" tIns="0" rIns="0" bIns="0" rtlCol="0" anchor="ctr"/>
-          <a:lstStyle/>
-          <a:p>
-            <a:pPr indent="0" marL="0">
-              <a:buNone/>
-            </a:pPr>
-            <a:r>
-              <a:rPr lang="en-US" sz="900" dirty="0">
-                <a:solidFill>
-                  <a:srgbClr val="808080"/>
-                </a:solidFill>
-                <a:latin typeface="Segoe UI" pitchFamily="34" charset="0"/>
-                <a:ea typeface="Segoe UI" pitchFamily="34" charset="-122"/>
-                <a:cs typeface="Segoe UI" pitchFamily="34" charset="-120"/>
-              </a:rPr>
-              <a:t>NYC TLC Yellow Taxi  ·  3M Technical Case</a:t>
-            </a:r>
-            <a:endParaRPr lang="en-US" sz="900" dirty="0"/>
-          </a:p>
-        </p:txBody>
-      </p:sp>
-      <p:sp>
-        <p:nvSpPr>
-          <p:cNvPr id="13" name="Text 11"/>
-          <p:cNvSpPr/>
-          <p:nvPr/>
-        </p:nvSpPr>
-        <p:spPr>
-          <a:xfrm>
-            <a:off x="11430000" y="6455664"/>
-            <a:ext cx="365760" cy="274320"/>
-          </a:xfrm>
-          <a:prstGeom prst="rect">
-            <a:avLst/>
-          </a:prstGeom>
-          <a:noFill/>
-          <a:ln/>
-        </p:spPr>
-        <p:txBody>
-          <a:bodyPr wrap="square" lIns="0" tIns="0" rIns="0" bIns="0" rtlCol="0" anchor="ctr"/>
-          <a:lstStyle/>
-          <a:p>
-            <a:pPr algn="r" indent="0" marL="0">
-              <a:buNone/>
-            </a:pPr>
-            <a:r>
-              <a:rPr lang="en-US" sz="900" dirty="0">
-                <a:solidFill>
-                  <a:srgbClr val="808080"/>
-                </a:solidFill>
-                <a:latin typeface="Segoe UI" pitchFamily="34" charset="0"/>
-                <a:ea typeface="Segoe UI" pitchFamily="34" charset="-122"/>
-                <a:cs typeface="Segoe UI" pitchFamily="34" charset="-120"/>
-              </a:rPr>
-              <a:t>13</a:t>
-            </a:r>
-            <a:endParaRPr lang="en-US" sz="900" dirty="0"/>
+              <a:t>Nicolas Augusto  ·  github.com/Nicolas-arch/3m-techcase-nyc-tlc</a:t>
+            </a:r>
+            <a:endParaRPr lang="en-US" sz="1300" dirty="0"/>
           </a:p>
         </p:txBody>
       </p:sp>
@@ -7242,6 +7249,7 @@
         <a:solidFill>
           <a:srgbClr val="FFFFFF"/>
         </a:solidFill>
+        <a:effectLst/>
       </p:bgPr>
     </p:bg>
     <p:spTree>
@@ -7279,11 +7287,11 @@
           <a:bodyPr wrap="square" lIns="0" tIns="0" rIns="0" bIns="0" rtlCol="0" anchor="ctr"/>
           <a:lstStyle/>
           <a:p>
-            <a:pPr indent="0" marL="0">
-              <a:buNone/>
-            </a:pPr>
-            <a:r>
-              <a:rPr lang="en-US" sz="1250" b="1" spc="200" kern="0" dirty="0">
+            <a:pPr marL="0" indent="0">
+              <a:buNone/>
+            </a:pPr>
+            <a:r>
+              <a:rPr lang="en-US" sz="1250" b="1" kern="0" spc="200" dirty="0">
                 <a:solidFill>
                   <a:srgbClr val="2E75B6"/>
                 </a:solidFill>
@@ -7318,7 +7326,7 @@
           <a:bodyPr wrap="square" lIns="0" tIns="0" rIns="0" bIns="0" rtlCol="0" anchor="ctr"/>
           <a:lstStyle/>
           <a:p>
-            <a:pPr indent="0" marL="0">
+            <a:pPr marL="0" indent="0">
               <a:buNone/>
             </a:pPr>
             <a:r>
@@ -7357,7 +7365,7 @@
           <a:bodyPr wrap="square" lIns="0" tIns="0" rIns="0" bIns="0" rtlCol="0" anchor="t"/>
           <a:lstStyle/>
           <a:p>
-            <a:pPr indent="0" marL="0">
+            <a:pPr marL="0" indent="0">
               <a:buNone/>
             </a:pPr>
             <a:r>
@@ -7371,13 +7379,13 @@
             <a:endParaRPr lang="en-US" sz="1500" dirty="0"/>
           </a:p>
           <a:p>
-            <a:pPr indent="0" marL="0">
+            <a:pPr marL="0" indent="0">
               <a:buNone/>
             </a:pPr>
             <a:endParaRPr lang="en-US" sz="1500" dirty="0"/>
           </a:p>
           <a:p>
-            <a:pPr indent="0" marL="0">
+            <a:pPr marL="0" indent="0">
               <a:buNone/>
             </a:pPr>
             <a:r>
@@ -7394,7 +7402,7 @@
       </p:sp>
       <p:graphicFrame>
         <p:nvGraphicFramePr>
-          <p:cNvPr id="3" name="Table 0"/>
+          <p:cNvPr id="5" name="Table 0"/>
           <p:cNvGraphicFramePr>
             <a:graphicFrameLocks noGrp="1"/>
           </p:cNvGraphicFramePr>
@@ -7408,15 +7416,27 @@
         </p:nvGraphicFramePr>
         <p:xfrm>
           <a:off x="5943600" y="1417320"/>
-          <a:ext cx="5669280" cy="914400"/>
+          <a:ext cx="5669280" cy="3364992"/>
         </p:xfrm>
         <a:graphic>
           <a:graphicData uri="http://schemas.openxmlformats.org/drawingml/2006/table">
             <a:tbl>
               <a:tblPr/>
               <a:tblGrid>
-                <a:gridCol w="2743200"/>
-                <a:gridCol w="2926080"/>
+                <a:gridCol w="2743200">
+                  <a:extLst>
+                    <a:ext uri="{9D8B030D-6E8A-4147-A177-3AD203B41FA5}">
+                      <a16:colId xmlns:a16="http://schemas.microsoft.com/office/drawing/2014/main" val="20000"/>
+                    </a:ext>
+                  </a:extLst>
+                </a:gridCol>
+                <a:gridCol w="2926080">
+                  <a:extLst>
+                    <a:ext uri="{9D8B030D-6E8A-4147-A177-3AD203B41FA5}">
+                      <a16:colId xmlns:a16="http://schemas.microsoft.com/office/drawing/2014/main" val="20001"/>
+                    </a:ext>
+                  </a:extLst>
+                </a:gridCol>
               </a:tblGrid>
               <a:tr h="420624">
                 <a:tc>
@@ -7424,7 +7444,7 @@
                     <a:bodyPr/>
                     <a:lstStyle/>
                     <a:p>
-                      <a:pPr indent="0" marL="0">
+                      <a:pPr marL="0" indent="0">
                         <a:buNone/>
                       </a:pPr>
                       <a:r>
@@ -7492,7 +7512,7 @@
                     <a:bodyPr/>
                     <a:lstStyle/>
                     <a:p>
-                      <a:pPr indent="0" marL="0">
+                      <a:pPr marL="0" indent="0">
                         <a:buNone/>
                       </a:pPr>
                       <a:r>
@@ -7555,6 +7575,11 @@
                     </a:solidFill>
                   </a:tcPr>
                 </a:tc>
+                <a:extLst>
+                  <a:ext uri="{0D108BD9-81ED-4DB2-BD59-A6C34878D82A}">
+                    <a16:rowId xmlns:a16="http://schemas.microsoft.com/office/drawing/2014/main" val="10000"/>
+                  </a:ext>
+                </a:extLst>
               </a:tr>
               <a:tr h="420624">
                 <a:tc>
@@ -7562,7 +7587,7 @@
                     <a:bodyPr/>
                     <a:lstStyle/>
                     <a:p>
-                      <a:pPr indent="0" marL="0">
+                      <a:pPr marL="0" indent="0">
                         <a:buNone/>
                       </a:pPr>
                       <a:r>
@@ -7630,7 +7655,7 @@
                     <a:bodyPr/>
                     <a:lstStyle/>
                     <a:p>
-                      <a:pPr indent="0" marL="0">
+                      <a:pPr marL="0" indent="0">
                         <a:buNone/>
                       </a:pPr>
                       <a:r>
@@ -7693,6 +7718,11 @@
                     </a:solidFill>
                   </a:tcPr>
                 </a:tc>
+                <a:extLst>
+                  <a:ext uri="{0D108BD9-81ED-4DB2-BD59-A6C34878D82A}">
+                    <a16:rowId xmlns:a16="http://schemas.microsoft.com/office/drawing/2014/main" val="10001"/>
+                  </a:ext>
+                </a:extLst>
               </a:tr>
               <a:tr h="420624">
                 <a:tc>
@@ -7700,7 +7730,7 @@
                     <a:bodyPr/>
                     <a:lstStyle/>
                     <a:p>
-                      <a:pPr indent="0" marL="0">
+                      <a:pPr marL="0" indent="0">
                         <a:buNone/>
                       </a:pPr>
                       <a:r>
@@ -7768,7 +7798,7 @@
                     <a:bodyPr/>
                     <a:lstStyle/>
                     <a:p>
-                      <a:pPr indent="0" marL="0">
+                      <a:pPr marL="0" indent="0">
                         <a:buNone/>
                       </a:pPr>
                       <a:r>
@@ -7831,6 +7861,11 @@
                     </a:solidFill>
                   </a:tcPr>
                 </a:tc>
+                <a:extLst>
+                  <a:ext uri="{0D108BD9-81ED-4DB2-BD59-A6C34878D82A}">
+                    <a16:rowId xmlns:a16="http://schemas.microsoft.com/office/drawing/2014/main" val="10002"/>
+                  </a:ext>
+                </a:extLst>
               </a:tr>
               <a:tr h="420624">
                 <a:tc>
@@ -7838,7 +7873,7 @@
                     <a:bodyPr/>
                     <a:lstStyle/>
                     <a:p>
-                      <a:pPr indent="0" marL="0">
+                      <a:pPr marL="0" indent="0">
                         <a:buNone/>
                       </a:pPr>
                       <a:r>
@@ -7906,7 +7941,7 @@
                     <a:bodyPr/>
                     <a:lstStyle/>
                     <a:p>
-                      <a:pPr indent="0" marL="0">
+                      <a:pPr marL="0" indent="0">
                         <a:buNone/>
                       </a:pPr>
                       <a:r>
@@ -7969,6 +8004,11 @@
                     </a:solidFill>
                   </a:tcPr>
                 </a:tc>
+                <a:extLst>
+                  <a:ext uri="{0D108BD9-81ED-4DB2-BD59-A6C34878D82A}">
+                    <a16:rowId xmlns:a16="http://schemas.microsoft.com/office/drawing/2014/main" val="10003"/>
+                  </a:ext>
+                </a:extLst>
               </a:tr>
               <a:tr h="420624">
                 <a:tc>
@@ -7976,7 +8016,7 @@
                     <a:bodyPr/>
                     <a:lstStyle/>
                     <a:p>
-                      <a:pPr indent="0" marL="0">
+                      <a:pPr marL="0" indent="0">
                         <a:buNone/>
                       </a:pPr>
                       <a:r>
@@ -8044,7 +8084,7 @@
                     <a:bodyPr/>
                     <a:lstStyle/>
                     <a:p>
-                      <a:pPr indent="0" marL="0">
+                      <a:pPr marL="0" indent="0">
                         <a:buNone/>
                       </a:pPr>
                       <a:r>
@@ -8107,6 +8147,11 @@
                     </a:solidFill>
                   </a:tcPr>
                 </a:tc>
+                <a:extLst>
+                  <a:ext uri="{0D108BD9-81ED-4DB2-BD59-A6C34878D82A}">
+                    <a16:rowId xmlns:a16="http://schemas.microsoft.com/office/drawing/2014/main" val="10004"/>
+                  </a:ext>
+                </a:extLst>
               </a:tr>
               <a:tr h="420624">
                 <a:tc>
@@ -8114,7 +8159,7 @@
                     <a:bodyPr/>
                     <a:lstStyle/>
                     <a:p>
-                      <a:pPr indent="0" marL="0">
+                      <a:pPr marL="0" indent="0">
                         <a:buNone/>
                       </a:pPr>
                       <a:r>
@@ -8182,7 +8227,7 @@
                     <a:bodyPr/>
                     <a:lstStyle/>
                     <a:p>
-                      <a:pPr indent="0" marL="0">
+                      <a:pPr marL="0" indent="0">
                         <a:buNone/>
                       </a:pPr>
                       <a:r>
@@ -8245,6 +8290,11 @@
                     </a:solidFill>
                   </a:tcPr>
                 </a:tc>
+                <a:extLst>
+                  <a:ext uri="{0D108BD9-81ED-4DB2-BD59-A6C34878D82A}">
+                    <a16:rowId xmlns:a16="http://schemas.microsoft.com/office/drawing/2014/main" val="10005"/>
+                  </a:ext>
+                </a:extLst>
               </a:tr>
               <a:tr h="420624">
                 <a:tc>
@@ -8252,7 +8302,7 @@
                     <a:bodyPr/>
                     <a:lstStyle/>
                     <a:p>
-                      <a:pPr indent="0" marL="0">
+                      <a:pPr marL="0" indent="0">
                         <a:buNone/>
                       </a:pPr>
                       <a:r>
@@ -8320,7 +8370,7 @@
                     <a:bodyPr/>
                     <a:lstStyle/>
                     <a:p>
-                      <a:pPr indent="0" marL="0">
+                      <a:pPr marL="0" indent="0">
                         <a:buNone/>
                       </a:pPr>
                       <a:r>
@@ -8383,6 +8433,11 @@
                     </a:solidFill>
                   </a:tcPr>
                 </a:tc>
+                <a:extLst>
+                  <a:ext uri="{0D108BD9-81ED-4DB2-BD59-A6C34878D82A}">
+                    <a16:rowId xmlns:a16="http://schemas.microsoft.com/office/drawing/2014/main" val="10006"/>
+                  </a:ext>
+                </a:extLst>
               </a:tr>
               <a:tr h="420624">
                 <a:tc>
@@ -8390,7 +8445,7 @@
                     <a:bodyPr/>
                     <a:lstStyle/>
                     <a:p>
-                      <a:pPr indent="0" marL="0">
+                      <a:pPr marL="0" indent="0">
                         <a:buNone/>
                       </a:pPr>
                       <a:r>
@@ -8458,7 +8513,7 @@
                     <a:bodyPr/>
                     <a:lstStyle/>
                     <a:p>
-                      <a:pPr indent="0" marL="0">
+                      <a:pPr marL="0" indent="0">
                         <a:buNone/>
                       </a:pPr>
                       <a:r>
@@ -8521,6 +8576,11 @@
                     </a:solidFill>
                   </a:tcPr>
                 </a:tc>
+                <a:extLst>
+                  <a:ext uri="{0D108BD9-81ED-4DB2-BD59-A6C34878D82A}">
+                    <a16:rowId xmlns:a16="http://schemas.microsoft.com/office/drawing/2014/main" val="10007"/>
+                  </a:ext>
+                </a:extLst>
               </a:tr>
             </a:tbl>
           </a:graphicData>
@@ -8547,7 +8607,7 @@
           <a:bodyPr wrap="square" lIns="0" tIns="0" rIns="0" bIns="0" rtlCol="0" anchor="ctr"/>
           <a:lstStyle/>
           <a:p>
-            <a:pPr indent="0" marL="0">
+            <a:pPr marL="0" indent="0">
               <a:buNone/>
             </a:pPr>
             <a:r>
@@ -8586,7 +8646,7 @@
           <a:bodyPr wrap="square" lIns="0" tIns="0" rIns="0" bIns="0" rtlCol="0" anchor="ctr"/>
           <a:lstStyle/>
           <a:p>
-            <a:pPr algn="r" indent="0" marL="0">
+            <a:pPr marL="0" indent="0" algn="r">
               <a:buNone/>
             </a:pPr>
             <a:r>
@@ -8620,6 +8680,7 @@
         <a:solidFill>
           <a:srgbClr val="FFFFFF"/>
         </a:solidFill>
+        <a:effectLst/>
       </p:bgPr>
     </p:bg>
     <p:spTree>
@@ -8657,11 +8718,11 @@
           <a:bodyPr wrap="square" lIns="0" tIns="0" rIns="0" bIns="0" rtlCol="0" anchor="ctr"/>
           <a:lstStyle/>
           <a:p>
-            <a:pPr indent="0" marL="0">
-              <a:buNone/>
-            </a:pPr>
-            <a:r>
-              <a:rPr lang="en-US" sz="1250" b="1" spc="200" kern="0" dirty="0">
+            <a:pPr marL="0" indent="0">
+              <a:buNone/>
+            </a:pPr>
+            <a:r>
+              <a:rPr lang="en-US" sz="1250" b="1" kern="0" spc="200" dirty="0">
                 <a:solidFill>
                   <a:srgbClr val="2E75B6"/>
                 </a:solidFill>
@@ -8696,7 +8757,7 @@
           <a:bodyPr wrap="square" lIns="0" tIns="0" rIns="0" bIns="0" rtlCol="0" anchor="ctr"/>
           <a:lstStyle/>
           <a:p>
-            <a:pPr indent="0" marL="0">
+            <a:pPr marL="0" indent="0">
               <a:buNone/>
             </a:pPr>
             <a:r>
@@ -8740,13 +8801,20 @@
             <a:prstDash val="solid"/>
           </a:ln>
           <a:effectLst>
-            <a:outerShdw sx="100000" sy="100000" kx="0" ky="0" algn="bl" rotWithShape="0" blurRad="101600" dist="38100" dir="8100000">
+            <a:outerShdw blurRad="101600" dist="38100" dir="8100000" algn="bl" rotWithShape="0">
               <a:srgbClr val="1F3864">
                 <a:alpha val="16000"/>
               </a:srgbClr>
             </a:outerShdw>
           </a:effectLst>
         </p:spPr>
+        <p:txBody>
+          <a:bodyPr/>
+          <a:lstStyle/>
+          <a:p>
+            <a:endParaRPr lang="pt-BR"/>
+          </a:p>
+        </p:txBody>
       </p:sp>
       <p:sp>
         <p:nvSpPr>
@@ -8769,7 +8837,7 @@
           <a:bodyPr wrap="square" lIns="0" tIns="0" rIns="0" bIns="0" rtlCol="0" anchor="ctr"/>
           <a:lstStyle/>
           <a:p>
-            <a:pPr indent="0" marL="0">
+            <a:pPr marL="0" indent="0">
               <a:buNone/>
             </a:pPr>
             <a:r>
@@ -8808,7 +8876,7 @@
           <a:bodyPr wrap="square" lIns="0" tIns="0" rIns="0" bIns="0" rtlCol="0" anchor="ctr"/>
           <a:lstStyle/>
           <a:p>
-            <a:pPr indent="0" marL="0">
+            <a:pPr marL="0" indent="0">
               <a:buNone/>
             </a:pPr>
             <a:r>
@@ -8847,7 +8915,7 @@
           <a:bodyPr wrap="square" lIns="0" tIns="0" rIns="0" bIns="0" rtlCol="0" anchor="t"/>
           <a:lstStyle/>
           <a:p>
-            <a:pPr indent="0" marL="0">
+            <a:pPr marL="0" indent="0">
               <a:buNone/>
             </a:pPr>
             <a:r>
@@ -8886,7 +8954,7 @@
           <a:bodyPr wrap="square" lIns="0" tIns="0" rIns="0" bIns="0" rtlCol="0" anchor="ctr"/>
           <a:lstStyle/>
           <a:p>
-            <a:pPr algn="ctr" indent="0" marL="0">
+            <a:pPr marL="0" indent="0" algn="ctr">
               <a:buNone/>
             </a:pPr>
             <a:r>
@@ -8930,13 +8998,20 @@
             <a:prstDash val="solid"/>
           </a:ln>
           <a:effectLst>
-            <a:outerShdw sx="100000" sy="100000" kx="0" ky="0" algn="bl" rotWithShape="0" blurRad="101600" dist="38100" dir="8100000">
+            <a:outerShdw blurRad="101600" dist="38100" dir="8100000" algn="bl" rotWithShape="0">
               <a:srgbClr val="1F3864">
                 <a:alpha val="16000"/>
               </a:srgbClr>
             </a:outerShdw>
           </a:effectLst>
         </p:spPr>
+        <p:txBody>
+          <a:bodyPr/>
+          <a:lstStyle/>
+          <a:p>
+            <a:endParaRPr lang="pt-BR"/>
+          </a:p>
+        </p:txBody>
       </p:sp>
       <p:sp>
         <p:nvSpPr>
@@ -8959,7 +9034,7 @@
           <a:bodyPr wrap="square" lIns="0" tIns="0" rIns="0" bIns="0" rtlCol="0" anchor="ctr"/>
           <a:lstStyle/>
           <a:p>
-            <a:pPr indent="0" marL="0">
+            <a:pPr marL="0" indent="0">
               <a:buNone/>
             </a:pPr>
             <a:r>
@@ -8998,7 +9073,7 @@
           <a:bodyPr wrap="square" lIns="0" tIns="0" rIns="0" bIns="0" rtlCol="0" anchor="ctr"/>
           <a:lstStyle/>
           <a:p>
-            <a:pPr indent="0" marL="0">
+            <a:pPr marL="0" indent="0">
               <a:buNone/>
             </a:pPr>
             <a:r>
@@ -9037,7 +9112,7 @@
           <a:bodyPr wrap="square" lIns="0" tIns="0" rIns="0" bIns="0" rtlCol="0" anchor="t"/>
           <a:lstStyle/>
           <a:p>
-            <a:pPr indent="0" marL="0">
+            <a:pPr marL="0" indent="0">
               <a:buNone/>
             </a:pPr>
             <a:r>
@@ -9076,7 +9151,7 @@
           <a:bodyPr wrap="square" lIns="0" tIns="0" rIns="0" bIns="0" rtlCol="0" anchor="ctr"/>
           <a:lstStyle/>
           <a:p>
-            <a:pPr algn="ctr" indent="0" marL="0">
+            <a:pPr marL="0" indent="0" algn="ctr">
               <a:buNone/>
             </a:pPr>
             <a:r>
@@ -9120,13 +9195,20 @@
             <a:prstDash val="solid"/>
           </a:ln>
           <a:effectLst>
-            <a:outerShdw sx="100000" sy="100000" kx="0" ky="0" algn="bl" rotWithShape="0" blurRad="101600" dist="38100" dir="8100000">
+            <a:outerShdw blurRad="101600" dist="38100" dir="8100000" algn="bl" rotWithShape="0">
               <a:srgbClr val="1F3864">
                 <a:alpha val="16000"/>
               </a:srgbClr>
             </a:outerShdw>
           </a:effectLst>
         </p:spPr>
+        <p:txBody>
+          <a:bodyPr/>
+          <a:lstStyle/>
+          <a:p>
+            <a:endParaRPr lang="pt-BR"/>
+          </a:p>
+        </p:txBody>
       </p:sp>
       <p:sp>
         <p:nvSpPr>
@@ -9149,7 +9231,7 @@
           <a:bodyPr wrap="square" lIns="0" tIns="0" rIns="0" bIns="0" rtlCol="0" anchor="ctr"/>
           <a:lstStyle/>
           <a:p>
-            <a:pPr indent="0" marL="0">
+            <a:pPr marL="0" indent="0">
               <a:buNone/>
             </a:pPr>
             <a:r>
@@ -9188,7 +9270,7 @@
           <a:bodyPr wrap="square" lIns="0" tIns="0" rIns="0" bIns="0" rtlCol="0" anchor="ctr"/>
           <a:lstStyle/>
           <a:p>
-            <a:pPr indent="0" marL="0">
+            <a:pPr marL="0" indent="0">
               <a:buNone/>
             </a:pPr>
             <a:r>
@@ -9227,7 +9309,7 @@
           <a:bodyPr wrap="square" lIns="0" tIns="0" rIns="0" bIns="0" rtlCol="0" anchor="t"/>
           <a:lstStyle/>
           <a:p>
-            <a:pPr indent="0" marL="0">
+            <a:pPr marL="0" indent="0">
               <a:buNone/>
             </a:pPr>
             <a:r>
@@ -9266,7 +9348,7 @@
           <a:bodyPr wrap="square" lIns="0" tIns="0" rIns="0" bIns="0" rtlCol="0" anchor="ctr"/>
           <a:lstStyle/>
           <a:p>
-            <a:pPr algn="ctr" indent="0" marL="0">
+            <a:pPr marL="0" indent="0" algn="ctr">
               <a:buNone/>
             </a:pPr>
             <a:r>
@@ -9310,13 +9392,20 @@
             <a:prstDash val="solid"/>
           </a:ln>
           <a:effectLst>
-            <a:outerShdw sx="100000" sy="100000" kx="0" ky="0" algn="bl" rotWithShape="0" blurRad="101600" dist="38100" dir="8100000">
+            <a:outerShdw blurRad="101600" dist="38100" dir="8100000" algn="bl" rotWithShape="0">
               <a:srgbClr val="1F3864">
                 <a:alpha val="16000"/>
               </a:srgbClr>
             </a:outerShdw>
           </a:effectLst>
         </p:spPr>
+        <p:txBody>
+          <a:bodyPr/>
+          <a:lstStyle/>
+          <a:p>
+            <a:endParaRPr lang="pt-BR"/>
+          </a:p>
+        </p:txBody>
       </p:sp>
       <p:sp>
         <p:nvSpPr>
@@ -9339,7 +9428,7 @@
           <a:bodyPr wrap="square" lIns="0" tIns="0" rIns="0" bIns="0" rtlCol="0" anchor="ctr"/>
           <a:lstStyle/>
           <a:p>
-            <a:pPr indent="0" marL="0">
+            <a:pPr marL="0" indent="0">
               <a:buNone/>
             </a:pPr>
             <a:r>
@@ -9378,7 +9467,7 @@
           <a:bodyPr wrap="square" lIns="0" tIns="0" rIns="0" bIns="0" rtlCol="0" anchor="ctr"/>
           <a:lstStyle/>
           <a:p>
-            <a:pPr indent="0" marL="0">
+            <a:pPr marL="0" indent="0">
               <a:buNone/>
             </a:pPr>
             <a:r>
@@ -9417,7 +9506,7 @@
           <a:bodyPr wrap="square" lIns="0" tIns="0" rIns="0" bIns="0" rtlCol="0" anchor="t"/>
           <a:lstStyle/>
           <a:p>
-            <a:pPr indent="0" marL="0">
+            <a:pPr marL="0" indent="0">
               <a:buNone/>
             </a:pPr>
             <a:r>
@@ -9456,7 +9545,7 @@
           <a:bodyPr wrap="square" lIns="0" tIns="0" rIns="0" bIns="0" rtlCol="0" anchor="ctr"/>
           <a:lstStyle/>
           <a:p>
-            <a:pPr algn="ctr" indent="0" marL="0">
+            <a:pPr marL="0" indent="0" algn="ctr">
               <a:buNone/>
             </a:pPr>
             <a:r>
@@ -9500,13 +9589,20 @@
             <a:prstDash val="solid"/>
           </a:ln>
           <a:effectLst>
-            <a:outerShdw sx="100000" sy="100000" kx="0" ky="0" algn="bl" rotWithShape="0" blurRad="101600" dist="38100" dir="8100000">
+            <a:outerShdw blurRad="101600" dist="38100" dir="8100000" algn="bl" rotWithShape="0">
               <a:srgbClr val="1F3864">
                 <a:alpha val="16000"/>
               </a:srgbClr>
             </a:outerShdw>
           </a:effectLst>
         </p:spPr>
+        <p:txBody>
+          <a:bodyPr/>
+          <a:lstStyle/>
+          <a:p>
+            <a:endParaRPr lang="pt-BR"/>
+          </a:p>
+        </p:txBody>
       </p:sp>
       <p:sp>
         <p:nvSpPr>
@@ -9529,7 +9625,7 @@
           <a:bodyPr wrap="square" lIns="0" tIns="0" rIns="0" bIns="0" rtlCol="0" anchor="ctr"/>
           <a:lstStyle/>
           <a:p>
-            <a:pPr indent="0" marL="0">
+            <a:pPr marL="0" indent="0">
               <a:buNone/>
             </a:pPr>
             <a:r>
@@ -9568,7 +9664,7 @@
           <a:bodyPr wrap="square" lIns="0" tIns="0" rIns="0" bIns="0" rtlCol="0" anchor="ctr"/>
           <a:lstStyle/>
           <a:p>
-            <a:pPr indent="0" marL="0">
+            <a:pPr marL="0" indent="0">
               <a:buNone/>
             </a:pPr>
             <a:r>
@@ -9607,7 +9703,7 @@
           <a:bodyPr wrap="square" lIns="0" tIns="0" rIns="0" bIns="0" rtlCol="0" anchor="t"/>
           <a:lstStyle/>
           <a:p>
-            <a:pPr indent="0" marL="0">
+            <a:pPr marL="0" indent="0">
               <a:buNone/>
             </a:pPr>
             <a:r>
@@ -9619,7 +9715,7 @@
                 <a:ea typeface="Segoe UI" pitchFamily="34" charset="-122"/>
                 <a:cs typeface="Segoe UI" pitchFamily="34" charset="-120"/>
               </a:rPr>
-              <a:t>Power BI · 5 pages</a:t>
+              <a:t>Power BI · 6 pages</a:t>
             </a:r>
             <a:endParaRPr lang="en-US" sz="1100" dirty="0"/>
           </a:p>
@@ -9646,7 +9742,7 @@
           <a:bodyPr wrap="square" lIns="0" tIns="0" rIns="0" bIns="0" rtlCol="0" anchor="t"/>
           <a:lstStyle/>
           <a:p>
-            <a:pPr indent="0" marL="0">
+            <a:pPr marL="0" indent="0">
               <a:buNone/>
             </a:pPr>
             <a:r>
@@ -9658,11 +9754,8 @@
                 <a:ea typeface="Segoe UI" pitchFamily="34" charset="-122"/>
                 <a:cs typeface="Segoe UI" pitchFamily="34" charset="-120"/>
               </a:rPr>
-              <a:t xml:space="preserve">Medallion architecture  </a:t>
-            </a:r>
-            <a:pPr indent="0" marL="0">
-              <a:buNone/>
-            </a:pPr>
+              <a:t>Medallion architecture  </a:t>
+            </a:r>
             <a:r>
               <a:rPr lang="en-US" sz="1300" dirty="0">
                 <a:solidFill>
@@ -9699,7 +9792,7 @@
           <a:bodyPr wrap="square" lIns="0" tIns="0" rIns="0" bIns="0" rtlCol="0" anchor="ctr"/>
           <a:lstStyle/>
           <a:p>
-            <a:pPr indent="0" marL="0">
+            <a:pPr marL="0" indent="0">
               <a:buNone/>
             </a:pPr>
             <a:r>
@@ -9711,11 +9804,8 @@
                 <a:ea typeface="Segoe UI" pitchFamily="34" charset="-122"/>
                 <a:cs typeface="Segoe UI" pitchFamily="34" charset="-120"/>
               </a:rPr>
-              <a:t xml:space="preserve">The 5 pipeline blocks the briefing asked to discuss: </a:t>
-            </a:r>
-            <a:pPr indent="0" marL="0">
-              <a:buNone/>
-            </a:pPr>
+              <a:t>The 5 pipeline blocks the briefing asked to discuss: </a:t>
+            </a:r>
             <a:r>
               <a:rPr lang="en-US" sz="1250" b="1" dirty="0">
                 <a:solidFill>
@@ -9752,7 +9842,7 @@
           <a:bodyPr wrap="square" lIns="0" tIns="0" rIns="0" bIns="0" rtlCol="0" anchor="ctr"/>
           <a:lstStyle/>
           <a:p>
-            <a:pPr indent="0" marL="0">
+            <a:pPr marL="0" indent="0">
               <a:buNone/>
             </a:pPr>
             <a:r>
@@ -9791,7 +9881,7 @@
           <a:bodyPr wrap="square" lIns="0" tIns="0" rIns="0" bIns="0" rtlCol="0" anchor="ctr"/>
           <a:lstStyle/>
           <a:p>
-            <a:pPr algn="r" indent="0" marL="0">
+            <a:pPr marL="0" indent="0" algn="r">
               <a:buNone/>
             </a:pPr>
             <a:r>
@@ -9825,6 +9915,7 @@
         <a:solidFill>
           <a:srgbClr val="FFFFFF"/>
         </a:solidFill>
+        <a:effectLst/>
       </p:bgPr>
     </p:bg>
     <p:spTree>
@@ -9862,11 +9953,11 @@
           <a:bodyPr wrap="square" lIns="0" tIns="0" rIns="0" bIns="0" rtlCol="0" anchor="ctr"/>
           <a:lstStyle/>
           <a:p>
-            <a:pPr indent="0" marL="0">
-              <a:buNone/>
-            </a:pPr>
-            <a:r>
-              <a:rPr lang="en-US" sz="1250" b="1" spc="200" kern="0" dirty="0">
+            <a:pPr marL="0" indent="0">
+              <a:buNone/>
+            </a:pPr>
+            <a:r>
+              <a:rPr lang="en-US" sz="1250" b="1" kern="0" spc="200" dirty="0">
                 <a:solidFill>
                   <a:srgbClr val="2E75B6"/>
                 </a:solidFill>
@@ -9901,7 +9992,7 @@
           <a:bodyPr wrap="square" lIns="0" tIns="0" rIns="0" bIns="0" rtlCol="0" anchor="ctr"/>
           <a:lstStyle/>
           <a:p>
-            <a:pPr indent="0" marL="0">
+            <a:pPr marL="0" indent="0">
               <a:buNone/>
             </a:pPr>
             <a:r>
@@ -9943,13 +10034,20 @@
             <a:prstDash val="solid"/>
           </a:ln>
           <a:effectLst>
-            <a:outerShdw sx="100000" sy="100000" kx="0" ky="0" algn="bl" rotWithShape="0" blurRad="101600" dist="38100" dir="8100000">
+            <a:outerShdw blurRad="101600" dist="38100" dir="8100000" algn="bl" rotWithShape="0">
               <a:srgbClr val="1F3864">
                 <a:alpha val="16000"/>
               </a:srgbClr>
             </a:outerShdw>
           </a:effectLst>
         </p:spPr>
+        <p:txBody>
+          <a:bodyPr/>
+          <a:lstStyle/>
+          <a:p>
+            <a:endParaRPr lang="pt-BR"/>
+          </a:p>
+        </p:txBody>
       </p:sp>
       <p:sp>
         <p:nvSpPr>
@@ -9972,7 +10070,7 @@
           <a:bodyPr wrap="square" lIns="0" tIns="0" rIns="0" bIns="0" rtlCol="0" anchor="ctr"/>
           <a:lstStyle/>
           <a:p>
-            <a:pPr algn="ctr" indent="0" marL="0">
+            <a:pPr marL="0" indent="0" algn="ctr">
               <a:buNone/>
             </a:pPr>
             <a:r>
@@ -10011,7 +10109,7 @@
           <a:bodyPr wrap="square" lIns="0" tIns="0" rIns="0" bIns="0" rtlCol="0" anchor="t"/>
           <a:lstStyle/>
           <a:p>
-            <a:pPr algn="ctr" indent="0" marL="0">
+            <a:pPr marL="0" indent="0" algn="ctr">
               <a:buNone/>
             </a:pPr>
             <a:r>
@@ -10053,13 +10151,20 @@
             <a:prstDash val="solid"/>
           </a:ln>
           <a:effectLst>
-            <a:outerShdw sx="100000" sy="100000" kx="0" ky="0" algn="bl" rotWithShape="0" blurRad="101600" dist="38100" dir="8100000">
+            <a:outerShdw blurRad="101600" dist="38100" dir="8100000" algn="bl" rotWithShape="0">
               <a:srgbClr val="1F3864">
                 <a:alpha val="16000"/>
               </a:srgbClr>
             </a:outerShdw>
           </a:effectLst>
         </p:spPr>
+        <p:txBody>
+          <a:bodyPr/>
+          <a:lstStyle/>
+          <a:p>
+            <a:endParaRPr lang="pt-BR"/>
+          </a:p>
+        </p:txBody>
       </p:sp>
       <p:sp>
         <p:nvSpPr>
@@ -10082,7 +10187,7 @@
           <a:bodyPr wrap="square" lIns="0" tIns="0" rIns="0" bIns="0" rtlCol="0" anchor="ctr"/>
           <a:lstStyle/>
           <a:p>
-            <a:pPr algn="ctr" indent="0" marL="0">
+            <a:pPr marL="0" indent="0" algn="ctr">
               <a:buNone/>
             </a:pPr>
             <a:r>
@@ -10121,7 +10226,7 @@
           <a:bodyPr wrap="square" lIns="0" tIns="0" rIns="0" bIns="0" rtlCol="0" anchor="t"/>
           <a:lstStyle/>
           <a:p>
-            <a:pPr algn="ctr" indent="0" marL="0">
+            <a:pPr marL="0" indent="0" algn="ctr">
               <a:buNone/>
             </a:pPr>
             <a:r>
@@ -10160,7 +10265,7 @@
           <a:bodyPr wrap="square" lIns="0" tIns="0" rIns="0" bIns="0" rtlCol="0" anchor="t"/>
           <a:lstStyle/>
           <a:p>
-            <a:pPr indent="0" marL="0">
+            <a:pPr marL="0" indent="0">
               <a:buNone/>
             </a:pPr>
             <a:r>
@@ -10202,13 +10307,20 @@
             <a:prstDash val="solid"/>
           </a:ln>
           <a:effectLst>
-            <a:outerShdw sx="100000" sy="100000" kx="0" ky="0" algn="bl" rotWithShape="0" blurRad="101600" dist="38100" dir="8100000">
+            <a:outerShdw blurRad="101600" dist="38100" dir="8100000" algn="bl" rotWithShape="0">
               <a:srgbClr val="1F3864">
                 <a:alpha val="16000"/>
               </a:srgbClr>
             </a:outerShdw>
           </a:effectLst>
         </p:spPr>
+        <p:txBody>
+          <a:bodyPr/>
+          <a:lstStyle/>
+          <a:p>
+            <a:endParaRPr lang="pt-BR"/>
+          </a:p>
+        </p:txBody>
       </p:sp>
       <p:sp>
         <p:nvSpPr>
@@ -10229,6 +10341,13 @@
           </a:solidFill>
           <a:ln/>
         </p:spPr>
+        <p:txBody>
+          <a:bodyPr/>
+          <a:lstStyle/>
+          <a:p>
+            <a:endParaRPr lang="pt-BR"/>
+          </a:p>
+        </p:txBody>
       </p:sp>
       <p:sp>
         <p:nvSpPr>
@@ -10251,7 +10370,7 @@
           <a:bodyPr wrap="square" lIns="0" tIns="0" rIns="0" bIns="0" rtlCol="0" anchor="ctr"/>
           <a:lstStyle/>
           <a:p>
-            <a:pPr indent="0" marL="0">
+            <a:pPr marL="0" indent="0">
               <a:buNone/>
             </a:pPr>
             <a:r>
@@ -10290,7 +10409,7 @@
           <a:bodyPr wrap="square" lIns="0" tIns="0" rIns="0" bIns="0" rtlCol="0" anchor="t"/>
           <a:lstStyle/>
           <a:p>
-            <a:pPr indent="0" marL="0">
+            <a:pPr marL="0" indent="0">
               <a:buNone/>
             </a:pPr>
             <a:r>
@@ -10307,13 +10426,13 @@
             <a:endParaRPr lang="en-US" sz="1200" dirty="0"/>
           </a:p>
           <a:p>
-            <a:pPr indent="0" marL="0">
+            <a:pPr marL="0" indent="0">
               <a:buNone/>
             </a:pPr>
             <a:endParaRPr lang="en-US" sz="1200" dirty="0"/>
           </a:p>
           <a:p>
-            <a:pPr indent="0" marL="0">
+            <a:pPr marL="0" indent="0">
               <a:buNone/>
             </a:pPr>
             <a:r>
@@ -10330,13 +10449,13 @@
             <a:endParaRPr lang="en-US" sz="1200" dirty="0"/>
           </a:p>
           <a:p>
-            <a:pPr indent="0" marL="0">
+            <a:pPr marL="0" indent="0">
               <a:buNone/>
             </a:pPr>
             <a:endParaRPr lang="en-US" sz="1200" dirty="0"/>
           </a:p>
           <a:p>
-            <a:pPr indent="0" marL="0">
+            <a:pPr marL="0" indent="0">
               <a:buNone/>
             </a:pPr>
             <a:r>
@@ -10375,7 +10494,7 @@
           <a:bodyPr wrap="square" lIns="0" tIns="0" rIns="0" bIns="0" rtlCol="0" anchor="ctr"/>
           <a:lstStyle/>
           <a:p>
-            <a:pPr indent="0" marL="0">
+            <a:pPr marL="0" indent="0">
               <a:buNone/>
             </a:pPr>
             <a:r>
@@ -10414,7 +10533,7 @@
           <a:bodyPr wrap="square" lIns="0" tIns="0" rIns="0" bIns="0" rtlCol="0" anchor="ctr"/>
           <a:lstStyle/>
           <a:p>
-            <a:pPr algn="r" indent="0" marL="0">
+            <a:pPr marL="0" indent="0" algn="r">
               <a:buNone/>
             </a:pPr>
             <a:r>
@@ -10448,6 +10567,7 @@
         <a:solidFill>
           <a:srgbClr val="FFFFFF"/>
         </a:solidFill>
+        <a:effectLst/>
       </p:bgPr>
     </p:bg>
     <p:spTree>
@@ -10485,11 +10605,11 @@
           <a:bodyPr wrap="square" lIns="0" tIns="0" rIns="0" bIns="0" rtlCol="0" anchor="ctr"/>
           <a:lstStyle/>
           <a:p>
-            <a:pPr indent="0" marL="0">
-              <a:buNone/>
-            </a:pPr>
-            <a:r>
-              <a:rPr lang="en-US" sz="1250" b="1" spc="200" kern="0" dirty="0">
+            <a:pPr marL="0" indent="0">
+              <a:buNone/>
+            </a:pPr>
+            <a:r>
+              <a:rPr lang="en-US" sz="1250" b="1" kern="0" spc="200" dirty="0">
                 <a:solidFill>
                   <a:srgbClr val="2E75B6"/>
                 </a:solidFill>
@@ -10524,7 +10644,7 @@
           <a:bodyPr wrap="square" lIns="0" tIns="0" rIns="0" bIns="0" rtlCol="0" anchor="ctr"/>
           <a:lstStyle/>
           <a:p>
-            <a:pPr indent="0" marL="0">
+            <a:pPr marL="0" indent="0">
               <a:buNone/>
             </a:pPr>
             <a:r>
@@ -10566,13 +10686,20 @@
             <a:prstDash val="solid"/>
           </a:ln>
           <a:effectLst>
-            <a:outerShdw sx="100000" sy="100000" kx="0" ky="0" algn="bl" rotWithShape="0" blurRad="101600" dist="38100" dir="8100000">
+            <a:outerShdw blurRad="101600" dist="38100" dir="8100000" algn="bl" rotWithShape="0">
               <a:srgbClr val="1F3864">
                 <a:alpha val="16000"/>
               </a:srgbClr>
             </a:outerShdw>
           </a:effectLst>
         </p:spPr>
+        <p:txBody>
+          <a:bodyPr/>
+          <a:lstStyle/>
+          <a:p>
+            <a:endParaRPr lang="pt-BR"/>
+          </a:p>
+        </p:txBody>
       </p:sp>
       <p:sp>
         <p:nvSpPr>
@@ -10595,7 +10722,7 @@
           <a:bodyPr wrap="square" lIns="0" tIns="0" rIns="0" bIns="0" rtlCol="0" anchor="ctr"/>
           <a:lstStyle/>
           <a:p>
-            <a:pPr algn="ctr" indent="0" marL="0">
+            <a:pPr marL="0" indent="0" algn="ctr">
               <a:buNone/>
             </a:pPr>
             <a:r>
@@ -10634,7 +10761,7 @@
           <a:bodyPr wrap="square" lIns="0" tIns="0" rIns="0" bIns="0" rtlCol="0" anchor="t"/>
           <a:lstStyle/>
           <a:p>
-            <a:pPr algn="ctr" indent="0" marL="0">
+            <a:pPr marL="0" indent="0" algn="ctr">
               <a:buNone/>
             </a:pPr>
             <a:r>
@@ -10676,13 +10803,20 @@
             <a:prstDash val="solid"/>
           </a:ln>
           <a:effectLst>
-            <a:outerShdw sx="100000" sy="100000" kx="0" ky="0" algn="bl" rotWithShape="0" blurRad="101600" dist="38100" dir="8100000">
+            <a:outerShdw blurRad="101600" dist="38100" dir="8100000" algn="bl" rotWithShape="0">
               <a:srgbClr val="1F3864">
                 <a:alpha val="16000"/>
               </a:srgbClr>
             </a:outerShdw>
           </a:effectLst>
         </p:spPr>
+        <p:txBody>
+          <a:bodyPr/>
+          <a:lstStyle/>
+          <a:p>
+            <a:endParaRPr lang="pt-BR"/>
+          </a:p>
+        </p:txBody>
       </p:sp>
       <p:sp>
         <p:nvSpPr>
@@ -10705,7 +10839,7 @@
           <a:bodyPr wrap="square" lIns="0" tIns="0" rIns="0" bIns="0" rtlCol="0" anchor="ctr"/>
           <a:lstStyle/>
           <a:p>
-            <a:pPr algn="ctr" indent="0" marL="0">
+            <a:pPr marL="0" indent="0" algn="ctr">
               <a:buNone/>
             </a:pPr>
             <a:r>
@@ -10744,7 +10878,7 @@
           <a:bodyPr wrap="square" lIns="0" tIns="0" rIns="0" bIns="0" rtlCol="0" anchor="t"/>
           <a:lstStyle/>
           <a:p>
-            <a:pPr algn="ctr" indent="0" marL="0">
+            <a:pPr marL="0" indent="0" algn="ctr">
               <a:buNone/>
             </a:pPr>
             <a:r>
@@ -10783,7 +10917,7 @@
           <a:bodyPr wrap="square" lIns="0" tIns="0" rIns="0" bIns="0" rtlCol="0" anchor="t"/>
           <a:lstStyle/>
           <a:p>
-            <a:pPr indent="0" marL="0">
+            <a:pPr marL="0" indent="0">
               <a:buNone/>
             </a:pPr>
             <a:r>
@@ -10822,7 +10956,7 @@
           <a:bodyPr wrap="square" lIns="0" tIns="0" rIns="0" bIns="0" rtlCol="0" anchor="ctr"/>
           <a:lstStyle/>
           <a:p>
-            <a:pPr indent="0" marL="0">
+            <a:pPr marL="0" indent="0">
               <a:buNone/>
             </a:pPr>
             <a:r>
@@ -10861,7 +10995,7 @@
           <a:bodyPr wrap="square" lIns="0" tIns="0" rIns="0" bIns="0" rtlCol="0" anchor="ctr"/>
           <a:lstStyle/>
           <a:p>
-            <a:pPr algn="r" indent="0" marL="0">
+            <a:pPr marL="0" indent="0" algn="r">
               <a:buNone/>
             </a:pPr>
             <a:r>
@@ -10898,6 +11032,13 @@
           </a:solidFill>
           <a:ln/>
         </p:spPr>
+        <p:txBody>
+          <a:bodyPr/>
+          <a:lstStyle/>
+          <a:p>
+            <a:endParaRPr lang="pt-BR"/>
+          </a:p>
+        </p:txBody>
       </p:sp>
       <p:sp>
         <p:nvSpPr>
@@ -10920,7 +11061,7 @@
           <a:bodyPr wrap="square" lIns="0" tIns="0" rIns="0" bIns="0" rtlCol="0" anchor="ctr"/>
           <a:lstStyle/>
           <a:p>
-            <a:pPr indent="0" marL="0">
+            <a:pPr marL="0" indent="0">
               <a:buNone/>
             </a:pPr>
             <a:r>
@@ -10959,7 +11100,7 @@
           <a:bodyPr wrap="square" lIns="0" tIns="0" rIns="0" bIns="0" rtlCol="0" anchor="ctr"/>
           <a:lstStyle/>
           <a:p>
-            <a:pPr algn="r" indent="0" marL="0">
+            <a:pPr marL="0" indent="0" algn="r">
               <a:buNone/>
             </a:pPr>
             <a:r>
@@ -10996,6 +11137,13 @@
           </a:solidFill>
           <a:ln/>
         </p:spPr>
+        <p:txBody>
+          <a:bodyPr/>
+          <a:lstStyle/>
+          <a:p>
+            <a:endParaRPr lang="pt-BR"/>
+          </a:p>
+        </p:txBody>
       </p:sp>
       <p:sp>
         <p:nvSpPr>
@@ -11018,7 +11166,7 @@
           <a:bodyPr wrap="square" lIns="0" tIns="0" rIns="0" bIns="0" rtlCol="0" anchor="ctr"/>
           <a:lstStyle/>
           <a:p>
-            <a:pPr indent="0" marL="0">
+            <a:pPr marL="0" indent="0">
               <a:buNone/>
             </a:pPr>
             <a:r>
@@ -11057,7 +11205,7 @@
           <a:bodyPr wrap="square" lIns="0" tIns="0" rIns="0" bIns="0" rtlCol="0" anchor="ctr"/>
           <a:lstStyle/>
           <a:p>
-            <a:pPr algn="r" indent="0" marL="0">
+            <a:pPr marL="0" indent="0" algn="r">
               <a:buNone/>
             </a:pPr>
             <a:r>
@@ -11094,6 +11242,13 @@
           </a:solidFill>
           <a:ln/>
         </p:spPr>
+        <p:txBody>
+          <a:bodyPr/>
+          <a:lstStyle/>
+          <a:p>
+            <a:endParaRPr lang="pt-BR"/>
+          </a:p>
+        </p:txBody>
       </p:sp>
       <p:sp>
         <p:nvSpPr>
@@ -11116,7 +11271,7 @@
           <a:bodyPr wrap="square" lIns="0" tIns="0" rIns="0" bIns="0" rtlCol="0" anchor="ctr"/>
           <a:lstStyle/>
           <a:p>
-            <a:pPr indent="0" marL="0">
+            <a:pPr marL="0" indent="0">
               <a:buNone/>
             </a:pPr>
             <a:r>
@@ -11155,7 +11310,7 @@
           <a:bodyPr wrap="square" lIns="0" tIns="0" rIns="0" bIns="0" rtlCol="0" anchor="ctr"/>
           <a:lstStyle/>
           <a:p>
-            <a:pPr algn="r" indent="0" marL="0">
+            <a:pPr marL="0" indent="0" algn="r">
               <a:buNone/>
             </a:pPr>
             <a:r>
@@ -11192,6 +11347,13 @@
           </a:solidFill>
           <a:ln/>
         </p:spPr>
+        <p:txBody>
+          <a:bodyPr/>
+          <a:lstStyle/>
+          <a:p>
+            <a:endParaRPr lang="pt-BR"/>
+          </a:p>
+        </p:txBody>
       </p:sp>
       <p:sp>
         <p:nvSpPr>
@@ -11214,7 +11376,7 @@
           <a:bodyPr wrap="square" lIns="0" tIns="0" rIns="0" bIns="0" rtlCol="0" anchor="ctr"/>
           <a:lstStyle/>
           <a:p>
-            <a:pPr indent="0" marL="0">
+            <a:pPr marL="0" indent="0">
               <a:buNone/>
             </a:pPr>
             <a:r>
@@ -11253,7 +11415,7 @@
           <a:bodyPr wrap="square" lIns="0" tIns="0" rIns="0" bIns="0" rtlCol="0" anchor="ctr"/>
           <a:lstStyle/>
           <a:p>
-            <a:pPr indent="0" marL="0">
+            <a:pPr marL="0" indent="0">
               <a:buNone/>
             </a:pPr>
             <a:r>
@@ -11292,7 +11454,7 @@
           <a:bodyPr wrap="square" lIns="0" tIns="0" rIns="0" bIns="0" rtlCol="0" anchor="ctr"/>
           <a:lstStyle/>
           <a:p>
-            <a:pPr algn="r" indent="0" marL="0">
+            <a:pPr marL="0" indent="0" algn="r">
               <a:buNone/>
             </a:pPr>
             <a:r>
@@ -11326,6 +11488,7 @@
         <a:solidFill>
           <a:srgbClr val="FFFFFF"/>
         </a:solidFill>
+        <a:effectLst/>
       </p:bgPr>
     </p:bg>
     <p:spTree>
@@ -11363,11 +11526,11 @@
           <a:bodyPr wrap="square" lIns="0" tIns="0" rIns="0" bIns="0" rtlCol="0" anchor="ctr"/>
           <a:lstStyle/>
           <a:p>
-            <a:pPr indent="0" marL="0">
-              <a:buNone/>
-            </a:pPr>
-            <a:r>
-              <a:rPr lang="en-US" sz="1250" b="1" spc="200" kern="0" dirty="0">
+            <a:pPr marL="0" indent="0">
+              <a:buNone/>
+            </a:pPr>
+            <a:r>
+              <a:rPr lang="en-US" sz="1250" b="1" kern="0" spc="200" dirty="0">
                 <a:solidFill>
                   <a:srgbClr val="2E75B6"/>
                 </a:solidFill>
@@ -11402,7 +11565,7 @@
           <a:bodyPr wrap="square" lIns="0" tIns="0" rIns="0" bIns="0" rtlCol="0" anchor="ctr"/>
           <a:lstStyle/>
           <a:p>
-            <a:pPr indent="0" marL="0">
+            <a:pPr marL="0" indent="0">
               <a:buNone/>
             </a:pPr>
             <a:r>
@@ -11444,13 +11607,20 @@
             <a:prstDash val="solid"/>
           </a:ln>
           <a:effectLst>
-            <a:outerShdw sx="100000" sy="100000" kx="0" ky="0" algn="bl" rotWithShape="0" blurRad="101600" dist="38100" dir="8100000">
+            <a:outerShdw blurRad="101600" dist="38100" dir="8100000" algn="bl" rotWithShape="0">
               <a:srgbClr val="1F3864">
                 <a:alpha val="16000"/>
               </a:srgbClr>
             </a:outerShdw>
           </a:effectLst>
         </p:spPr>
+        <p:txBody>
+          <a:bodyPr/>
+          <a:lstStyle/>
+          <a:p>
+            <a:endParaRPr lang="pt-BR"/>
+          </a:p>
+        </p:txBody>
       </p:sp>
       <p:sp>
         <p:nvSpPr>
@@ -11471,6 +11641,13 @@
           </a:solidFill>
           <a:ln/>
         </p:spPr>
+        <p:txBody>
+          <a:bodyPr/>
+          <a:lstStyle/>
+          <a:p>
+            <a:endParaRPr lang="pt-BR"/>
+          </a:p>
+        </p:txBody>
       </p:sp>
       <p:sp>
         <p:nvSpPr>
@@ -11493,7 +11670,7 @@
           <a:bodyPr wrap="square" lIns="0" tIns="0" rIns="0" bIns="0" rtlCol="0" anchor="ctr"/>
           <a:lstStyle/>
           <a:p>
-            <a:pPr indent="0" marL="0">
+            <a:pPr marL="0" indent="0">
               <a:buNone/>
             </a:pPr>
             <a:r>
@@ -11532,7 +11709,7 @@
           <a:bodyPr wrap="square" lIns="0" tIns="0" rIns="0" bIns="0" rtlCol="0" anchor="t"/>
           <a:lstStyle/>
           <a:p>
-            <a:pPr indent="0" marL="0">
+            <a:pPr marL="0" indent="0">
               <a:buNone/>
             </a:pPr>
             <a:r>
@@ -11549,13 +11726,13 @@
             <a:endParaRPr lang="en-US" sz="1200" dirty="0"/>
           </a:p>
           <a:p>
-            <a:pPr indent="0" marL="0">
+            <a:pPr marL="0" indent="0">
               <a:buNone/>
             </a:pPr>
             <a:endParaRPr lang="en-US" sz="1200" dirty="0"/>
           </a:p>
           <a:p>
-            <a:pPr indent="0" marL="0">
+            <a:pPr marL="0" indent="0">
               <a:buNone/>
             </a:pPr>
             <a:r>
@@ -11572,13 +11749,13 @@
             <a:endParaRPr lang="en-US" sz="1200" dirty="0"/>
           </a:p>
           <a:p>
-            <a:pPr indent="0" marL="0">
+            <a:pPr marL="0" indent="0">
               <a:buNone/>
             </a:pPr>
             <a:endParaRPr lang="en-US" sz="1200" dirty="0"/>
           </a:p>
           <a:p>
-            <a:pPr indent="0" marL="0">
+            <a:pPr marL="0" indent="0">
               <a:buNone/>
             </a:pPr>
             <a:r>
@@ -11620,13 +11797,20 @@
             <a:prstDash val="solid"/>
           </a:ln>
           <a:effectLst>
-            <a:outerShdw sx="100000" sy="100000" kx="0" ky="0" algn="bl" rotWithShape="0" blurRad="101600" dist="38100" dir="8100000">
+            <a:outerShdw blurRad="101600" dist="38100" dir="8100000" algn="bl" rotWithShape="0">
               <a:srgbClr val="1F3864">
                 <a:alpha val="16000"/>
               </a:srgbClr>
             </a:outerShdw>
           </a:effectLst>
         </p:spPr>
+        <p:txBody>
+          <a:bodyPr/>
+          <a:lstStyle/>
+          <a:p>
+            <a:endParaRPr lang="pt-BR"/>
+          </a:p>
+        </p:txBody>
       </p:sp>
       <p:sp>
         <p:nvSpPr>
@@ -11647,6 +11831,13 @@
           </a:solidFill>
           <a:ln/>
         </p:spPr>
+        <p:txBody>
+          <a:bodyPr/>
+          <a:lstStyle/>
+          <a:p>
+            <a:endParaRPr lang="pt-BR"/>
+          </a:p>
+        </p:txBody>
       </p:sp>
       <p:sp>
         <p:nvSpPr>
@@ -11669,7 +11860,7 @@
           <a:bodyPr wrap="square" lIns="0" tIns="0" rIns="0" bIns="0" rtlCol="0" anchor="ctr"/>
           <a:lstStyle/>
           <a:p>
-            <a:pPr indent="0" marL="0">
+            <a:pPr marL="0" indent="0">
               <a:buNone/>
             </a:pPr>
             <a:r>
@@ -11708,7 +11899,7 @@
           <a:bodyPr wrap="square" lIns="0" tIns="0" rIns="0" bIns="0" rtlCol="0" anchor="t"/>
           <a:lstStyle/>
           <a:p>
-            <a:pPr indent="0" marL="0">
+            <a:pPr marL="0" indent="0">
               <a:buNone/>
             </a:pPr>
             <a:r>
@@ -11725,13 +11916,13 @@
             <a:endParaRPr lang="en-US" sz="1200" dirty="0"/>
           </a:p>
           <a:p>
-            <a:pPr indent="0" marL="0">
+            <a:pPr marL="0" indent="0">
               <a:buNone/>
             </a:pPr>
             <a:endParaRPr lang="en-US" sz="1200" dirty="0"/>
           </a:p>
           <a:p>
-            <a:pPr indent="0" marL="0">
+            <a:pPr marL="0" indent="0">
               <a:buNone/>
             </a:pPr>
             <a:r>
@@ -11748,13 +11939,13 @@
             <a:endParaRPr lang="en-US" sz="1200" dirty="0"/>
           </a:p>
           <a:p>
-            <a:pPr indent="0" marL="0">
+            <a:pPr marL="0" indent="0">
               <a:buNone/>
             </a:pPr>
             <a:endParaRPr lang="en-US" sz="1200" dirty="0"/>
           </a:p>
           <a:p>
-            <a:pPr indent="0" marL="0">
+            <a:pPr marL="0" indent="0">
               <a:buNone/>
             </a:pPr>
             <a:r>
@@ -11793,7 +11984,7 @@
           <a:bodyPr wrap="square" lIns="0" tIns="0" rIns="0" bIns="0" rtlCol="0" anchor="ctr"/>
           <a:lstStyle/>
           <a:p>
-            <a:pPr indent="0" marL="0">
+            <a:pPr marL="0" indent="0">
               <a:buNone/>
             </a:pPr>
             <a:r>
@@ -11832,7 +12023,7 @@
           <a:bodyPr wrap="square" lIns="0" tIns="0" rIns="0" bIns="0" rtlCol="0" anchor="ctr"/>
           <a:lstStyle/>
           <a:p>
-            <a:pPr algn="r" indent="0" marL="0">
+            <a:pPr marL="0" indent="0" algn="r">
               <a:buNone/>
             </a:pPr>
             <a:r>
@@ -11866,6 +12057,7 @@
         <a:solidFill>
           <a:srgbClr val="FFFFFF"/>
         </a:solidFill>
+        <a:effectLst/>
       </p:bgPr>
     </p:bg>
     <p:spTree>
@@ -11903,11 +12095,11 @@
           <a:bodyPr wrap="square" lIns="0" tIns="0" rIns="0" bIns="0" rtlCol="0" anchor="ctr"/>
           <a:lstStyle/>
           <a:p>
-            <a:pPr indent="0" marL="0">
-              <a:buNone/>
-            </a:pPr>
-            <a:r>
-              <a:rPr lang="en-US" sz="1250" b="1" spc="200" kern="0" dirty="0">
+            <a:pPr marL="0" indent="0">
+              <a:buNone/>
+            </a:pPr>
+            <a:r>
+              <a:rPr lang="en-US" sz="1250" b="1" kern="0" spc="200" dirty="0">
                 <a:solidFill>
                   <a:srgbClr val="2E75B6"/>
                 </a:solidFill>
@@ -11942,7 +12134,7 @@
           <a:bodyPr wrap="square" lIns="0" tIns="0" rIns="0" bIns="0" rtlCol="0" anchor="ctr"/>
           <a:lstStyle/>
           <a:p>
-            <a:pPr indent="0" marL="0">
+            <a:pPr marL="0" indent="0">
               <a:buNone/>
             </a:pPr>
             <a:r>
@@ -11979,13 +12171,20 @@
           </a:solidFill>
           <a:ln/>
           <a:effectLst>
-            <a:outerShdw sx="100000" sy="100000" kx="0" ky="0" algn="bl" rotWithShape="0" blurRad="101600" dist="38100" dir="8100000">
+            <a:outerShdw blurRad="101600" dist="38100" dir="8100000" algn="bl" rotWithShape="0">
               <a:srgbClr val="1F3864">
                 <a:alpha val="16000"/>
               </a:srgbClr>
             </a:outerShdw>
           </a:effectLst>
         </p:spPr>
+        <p:txBody>
+          <a:bodyPr/>
+          <a:lstStyle/>
+          <a:p>
+            <a:endParaRPr lang="pt-BR"/>
+          </a:p>
+        </p:txBody>
       </p:sp>
       <p:sp>
         <p:nvSpPr>
@@ -12008,7 +12207,7 @@
           <a:bodyPr wrap="square" lIns="0" tIns="0" rIns="0" bIns="0" rtlCol="0" anchor="ctr"/>
           <a:lstStyle/>
           <a:p>
-            <a:pPr algn="ctr" indent="0" marL="0">
+            <a:pPr marL="0" indent="0" algn="ctr">
               <a:buNone/>
             </a:pPr>
             <a:r>
@@ -12025,7 +12224,7 @@
             <a:endParaRPr lang="en-US" sz="1500" dirty="0"/>
           </a:p>
           <a:p>
-            <a:pPr algn="ctr" indent="0" marL="0">
+            <a:pPr marL="0" indent="0" algn="ctr">
               <a:buNone/>
             </a:pPr>
             <a:r>
@@ -12066,6 +12265,13 @@
             <a:prstDash val="solid"/>
           </a:ln>
         </p:spPr>
+        <p:txBody>
+          <a:bodyPr/>
+          <a:lstStyle/>
+          <a:p>
+            <a:endParaRPr lang="pt-BR"/>
+          </a:p>
+        </p:txBody>
       </p:sp>
       <p:sp>
         <p:nvSpPr>
@@ -12088,7 +12294,7 @@
           <a:bodyPr wrap="square" lIns="0" tIns="0" rIns="0" bIns="0" rtlCol="0" anchor="ctr"/>
           <a:lstStyle/>
           <a:p>
-            <a:pPr algn="ctr" indent="0" marL="0">
+            <a:pPr marL="0" indent="0" algn="ctr">
               <a:buNone/>
             </a:pPr>
             <a:r>
@@ -12132,6 +12338,13 @@
             <a:prstDash val="solid"/>
           </a:ln>
         </p:spPr>
+        <p:txBody>
+          <a:bodyPr/>
+          <a:lstStyle/>
+          <a:p>
+            <a:endParaRPr lang="pt-BR"/>
+          </a:p>
+        </p:txBody>
       </p:sp>
       <p:sp>
         <p:nvSpPr>
@@ -12154,7 +12367,7 @@
           <a:bodyPr wrap="square" lIns="0" tIns="0" rIns="0" bIns="0" rtlCol="0" anchor="ctr"/>
           <a:lstStyle/>
           <a:p>
-            <a:pPr algn="ctr" indent="0" marL="0">
+            <a:pPr marL="0" indent="0" algn="ctr">
               <a:buNone/>
             </a:pPr>
             <a:r>
@@ -12198,6 +12411,13 @@
             <a:prstDash val="solid"/>
           </a:ln>
         </p:spPr>
+        <p:txBody>
+          <a:bodyPr/>
+          <a:lstStyle/>
+          <a:p>
+            <a:endParaRPr lang="pt-BR"/>
+          </a:p>
+        </p:txBody>
       </p:sp>
       <p:sp>
         <p:nvSpPr>
@@ -12220,7 +12440,7 @@
           <a:bodyPr wrap="square" lIns="0" tIns="0" rIns="0" bIns="0" rtlCol="0" anchor="ctr"/>
           <a:lstStyle/>
           <a:p>
-            <a:pPr algn="ctr" indent="0" marL="0">
+            <a:pPr marL="0" indent="0" algn="ctr">
               <a:buNone/>
             </a:pPr>
             <a:r>
@@ -12264,6 +12484,13 @@
             <a:prstDash val="solid"/>
           </a:ln>
         </p:spPr>
+        <p:txBody>
+          <a:bodyPr/>
+          <a:lstStyle/>
+          <a:p>
+            <a:endParaRPr lang="pt-BR"/>
+          </a:p>
+        </p:txBody>
       </p:sp>
       <p:sp>
         <p:nvSpPr>
@@ -12286,7 +12513,7 @@
           <a:bodyPr wrap="square" lIns="0" tIns="0" rIns="0" bIns="0" rtlCol="0" anchor="ctr"/>
           <a:lstStyle/>
           <a:p>
-            <a:pPr algn="ctr" indent="0" marL="0">
+            <a:pPr marL="0" indent="0" algn="ctr">
               <a:buNone/>
             </a:pPr>
             <a:r>
@@ -12330,6 +12557,13 @@
             <a:prstDash val="solid"/>
           </a:ln>
         </p:spPr>
+        <p:txBody>
+          <a:bodyPr/>
+          <a:lstStyle/>
+          <a:p>
+            <a:endParaRPr lang="pt-BR"/>
+          </a:p>
+        </p:txBody>
       </p:sp>
       <p:sp>
         <p:nvSpPr>
@@ -12352,7 +12586,7 @@
           <a:bodyPr wrap="square" lIns="0" tIns="0" rIns="0" bIns="0" rtlCol="0" anchor="ctr"/>
           <a:lstStyle/>
           <a:p>
-            <a:pPr algn="ctr" indent="0" marL="0">
+            <a:pPr marL="0" indent="0" algn="ctr">
               <a:buNone/>
             </a:pPr>
             <a:r>
@@ -12396,6 +12630,13 @@
             <a:prstDash val="solid"/>
           </a:ln>
         </p:spPr>
+        <p:txBody>
+          <a:bodyPr/>
+          <a:lstStyle/>
+          <a:p>
+            <a:endParaRPr lang="pt-BR"/>
+          </a:p>
+        </p:txBody>
       </p:sp>
       <p:sp>
         <p:nvSpPr>
@@ -12418,7 +12659,7 @@
           <a:bodyPr wrap="square" lIns="0" tIns="0" rIns="0" bIns="0" rtlCol="0" anchor="ctr"/>
           <a:lstStyle/>
           <a:p>
-            <a:pPr algn="ctr" indent="0" marL="0">
+            <a:pPr marL="0" indent="0" algn="ctr">
               <a:buNone/>
             </a:pPr>
             <a:r>
@@ -12462,6 +12703,13 @@
             <a:prstDash val="solid"/>
           </a:ln>
         </p:spPr>
+        <p:txBody>
+          <a:bodyPr/>
+          <a:lstStyle/>
+          <a:p>
+            <a:endParaRPr lang="pt-BR"/>
+          </a:p>
+        </p:txBody>
       </p:sp>
       <p:sp>
         <p:nvSpPr>
@@ -12484,7 +12732,7 @@
           <a:bodyPr wrap="square" lIns="0" tIns="0" rIns="0" bIns="0" rtlCol="0" anchor="ctr"/>
           <a:lstStyle/>
           <a:p>
-            <a:pPr algn="ctr" indent="0" marL="0">
+            <a:pPr marL="0" indent="0" algn="ctr">
               <a:buNone/>
             </a:pPr>
             <a:r>
@@ -12608,7 +12856,7 @@
           <a:bodyPr wrap="square" lIns="0" tIns="0" rIns="0" bIns="0" rtlCol="0" anchor="ctr"/>
           <a:lstStyle/>
           <a:p>
-            <a:pPr indent="0" marL="0">
+            <a:pPr marL="0" indent="0">
               <a:buNone/>
             </a:pPr>
             <a:r>
@@ -12647,7 +12895,7 @@
           <a:bodyPr wrap="square" lIns="0" tIns="0" rIns="0" bIns="0" rtlCol="0" anchor="ctr"/>
           <a:lstStyle/>
           <a:p>
-            <a:pPr algn="r" indent="0" marL="0">
+            <a:pPr marL="0" indent="0" algn="r">
               <a:buNone/>
             </a:pPr>
             <a:r>
@@ -12681,6 +12929,7 @@
         <a:solidFill>
           <a:srgbClr val="FFFFFF"/>
         </a:solidFill>
+        <a:effectLst/>
       </p:bgPr>
     </p:bg>
     <p:spTree>
@@ -12718,11 +12967,11 @@
           <a:bodyPr wrap="square" lIns="0" tIns="0" rIns="0" bIns="0" rtlCol="0" anchor="ctr"/>
           <a:lstStyle/>
           <a:p>
-            <a:pPr indent="0" marL="0">
-              <a:buNone/>
-            </a:pPr>
-            <a:r>
-              <a:rPr lang="en-US" sz="1250" b="1" spc="200" kern="0" dirty="0">
+            <a:pPr marL="0" indent="0">
+              <a:buNone/>
+            </a:pPr>
+            <a:r>
+              <a:rPr lang="en-US" sz="1250" b="1" kern="0" spc="200" dirty="0">
                 <a:solidFill>
                   <a:srgbClr val="2E75B6"/>
                 </a:solidFill>
@@ -12757,7 +13006,7 @@
           <a:bodyPr wrap="square" lIns="0" tIns="0" rIns="0" bIns="0" rtlCol="0" anchor="ctr"/>
           <a:lstStyle/>
           <a:p>
-            <a:pPr indent="0" marL="0">
+            <a:pPr marL="0" indent="0">
               <a:buNone/>
             </a:pPr>
             <a:r>
@@ -12799,13 +13048,20 @@
             <a:prstDash val="solid"/>
           </a:ln>
           <a:effectLst>
-            <a:outerShdw sx="100000" sy="100000" kx="0" ky="0" algn="bl" rotWithShape="0" blurRad="101600" dist="38100" dir="8100000">
+            <a:outerShdw blurRad="101600" dist="38100" dir="8100000" algn="bl" rotWithShape="0">
               <a:srgbClr val="1F3864">
                 <a:alpha val="16000"/>
               </a:srgbClr>
             </a:outerShdw>
           </a:effectLst>
         </p:spPr>
+        <p:txBody>
+          <a:bodyPr/>
+          <a:lstStyle/>
+          <a:p>
+            <a:endParaRPr lang="pt-BR"/>
+          </a:p>
+        </p:txBody>
       </p:sp>
       <p:sp>
         <p:nvSpPr>
@@ -12826,6 +13082,13 @@
           </a:solidFill>
           <a:ln/>
         </p:spPr>
+        <p:txBody>
+          <a:bodyPr/>
+          <a:lstStyle/>
+          <a:p>
+            <a:endParaRPr lang="pt-BR"/>
+          </a:p>
+        </p:txBody>
       </p:sp>
       <p:sp>
         <p:nvSpPr>
@@ -12848,7 +13111,7 @@
           <a:bodyPr wrap="square" lIns="0" tIns="0" rIns="0" bIns="0" rtlCol="0" anchor="ctr"/>
           <a:lstStyle/>
           <a:p>
-            <a:pPr algn="ctr" indent="0" marL="0">
+            <a:pPr marL="0" indent="0" algn="ctr">
               <a:buNone/>
             </a:pPr>
             <a:r>
@@ -12887,7 +13150,7 @@
           <a:bodyPr wrap="square" lIns="0" tIns="0" rIns="0" bIns="0" rtlCol="0" anchor="ctr"/>
           <a:lstStyle/>
           <a:p>
-            <a:pPr indent="0" marL="0">
+            <a:pPr marL="0" indent="0">
               <a:buNone/>
             </a:pPr>
             <a:r>
@@ -12926,7 +13189,7 @@
           <a:bodyPr wrap="square" lIns="0" tIns="0" rIns="0" bIns="0" rtlCol="0" anchor="t"/>
           <a:lstStyle/>
           <a:p>
-            <a:pPr indent="0" marL="0">
+            <a:pPr marL="0" indent="0">
               <a:buNone/>
             </a:pPr>
             <a:r>
@@ -12968,13 +13231,20 @@
             <a:prstDash val="solid"/>
           </a:ln>
           <a:effectLst>
-            <a:outerShdw sx="100000" sy="100000" kx="0" ky="0" algn="bl" rotWithShape="0" blurRad="101600" dist="38100" dir="8100000">
+            <a:outerShdw blurRad="101600" dist="38100" dir="8100000" algn="bl" rotWithShape="0">
               <a:srgbClr val="1F3864">
                 <a:alpha val="16000"/>
               </a:srgbClr>
             </a:outerShdw>
           </a:effectLst>
         </p:spPr>
+        <p:txBody>
+          <a:bodyPr/>
+          <a:lstStyle/>
+          <a:p>
+            <a:endParaRPr lang="pt-BR"/>
+          </a:p>
+        </p:txBody>
       </p:sp>
       <p:sp>
         <p:nvSpPr>
@@ -12995,6 +13265,13 @@
           </a:solidFill>
           <a:ln/>
         </p:spPr>
+        <p:txBody>
+          <a:bodyPr/>
+          <a:lstStyle/>
+          <a:p>
+            <a:endParaRPr lang="pt-BR"/>
+          </a:p>
+        </p:txBody>
       </p:sp>
       <p:sp>
         <p:nvSpPr>
@@ -13017,7 +13294,7 @@
           <a:bodyPr wrap="square" lIns="0" tIns="0" rIns="0" bIns="0" rtlCol="0" anchor="ctr"/>
           <a:lstStyle/>
           <a:p>
-            <a:pPr algn="ctr" indent="0" marL="0">
+            <a:pPr marL="0" indent="0" algn="ctr">
               <a:buNone/>
             </a:pPr>
             <a:r>
@@ -13056,7 +13333,7 @@
           <a:bodyPr wrap="square" lIns="0" tIns="0" rIns="0" bIns="0" rtlCol="0" anchor="ctr"/>
           <a:lstStyle/>
           <a:p>
-            <a:pPr indent="0" marL="0">
+            <a:pPr marL="0" indent="0">
               <a:buNone/>
             </a:pPr>
             <a:r>
@@ -13095,7 +13372,7 @@
           <a:bodyPr wrap="square" lIns="0" tIns="0" rIns="0" bIns="0" rtlCol="0" anchor="t"/>
           <a:lstStyle/>
           <a:p>
-            <a:pPr indent="0" marL="0">
+            <a:pPr marL="0" indent="0">
               <a:buNone/>
             </a:pPr>
             <a:r>
@@ -13137,13 +13414,20 @@
             <a:prstDash val="solid"/>
           </a:ln>
           <a:effectLst>
-            <a:outerShdw sx="100000" sy="100000" kx="0" ky="0" algn="bl" rotWithShape="0" blurRad="101600" dist="38100" dir="8100000">
+            <a:outerShdw blurRad="101600" dist="38100" dir="8100000" algn="bl" rotWithShape="0">
               <a:srgbClr val="1F3864">
                 <a:alpha val="16000"/>
               </a:srgbClr>
             </a:outerShdw>
           </a:effectLst>
         </p:spPr>
+        <p:txBody>
+          <a:bodyPr/>
+          <a:lstStyle/>
+          <a:p>
+            <a:endParaRPr lang="pt-BR"/>
+          </a:p>
+        </p:txBody>
       </p:sp>
       <p:sp>
         <p:nvSpPr>
@@ -13164,6 +13448,13 @@
           </a:solidFill>
           <a:ln/>
         </p:spPr>
+        <p:txBody>
+          <a:bodyPr/>
+          <a:lstStyle/>
+          <a:p>
+            <a:endParaRPr lang="pt-BR"/>
+          </a:p>
+        </p:txBody>
       </p:sp>
       <p:sp>
         <p:nvSpPr>
@@ -13186,7 +13477,7 @@
           <a:bodyPr wrap="square" lIns="0" tIns="0" rIns="0" bIns="0" rtlCol="0" anchor="ctr"/>
           <a:lstStyle/>
           <a:p>
-            <a:pPr algn="ctr" indent="0" marL="0">
+            <a:pPr marL="0" indent="0" algn="ctr">
               <a:buNone/>
             </a:pPr>
             <a:r>
@@ -13225,7 +13516,7 @@
           <a:bodyPr wrap="square" lIns="0" tIns="0" rIns="0" bIns="0" rtlCol="0" anchor="ctr"/>
           <a:lstStyle/>
           <a:p>
-            <a:pPr indent="0" marL="0">
+            <a:pPr marL="0" indent="0">
               <a:buNone/>
             </a:pPr>
             <a:r>
@@ -13264,7 +13555,7 @@
           <a:bodyPr wrap="square" lIns="0" tIns="0" rIns="0" bIns="0" rtlCol="0" anchor="t"/>
           <a:lstStyle/>
           <a:p>
-            <a:pPr indent="0" marL="0">
+            <a:pPr marL="0" indent="0">
               <a:buNone/>
             </a:pPr>
             <a:r>
@@ -13306,13 +13597,20 @@
             <a:prstDash val="solid"/>
           </a:ln>
           <a:effectLst>
-            <a:outerShdw sx="100000" sy="100000" kx="0" ky="0" algn="bl" rotWithShape="0" blurRad="101600" dist="38100" dir="8100000">
+            <a:outerShdw blurRad="101600" dist="38100" dir="8100000" algn="bl" rotWithShape="0">
               <a:srgbClr val="1F3864">
                 <a:alpha val="16000"/>
               </a:srgbClr>
             </a:outerShdw>
           </a:effectLst>
         </p:spPr>
+        <p:txBody>
+          <a:bodyPr/>
+          <a:lstStyle/>
+          <a:p>
+            <a:endParaRPr lang="pt-BR"/>
+          </a:p>
+        </p:txBody>
       </p:sp>
       <p:sp>
         <p:nvSpPr>
@@ -13333,6 +13631,13 @@
           </a:solidFill>
           <a:ln/>
         </p:spPr>
+        <p:txBody>
+          <a:bodyPr/>
+          <a:lstStyle/>
+          <a:p>
+            <a:endParaRPr lang="pt-BR"/>
+          </a:p>
+        </p:txBody>
       </p:sp>
       <p:sp>
         <p:nvSpPr>
@@ -13355,7 +13660,7 @@
           <a:bodyPr wrap="square" lIns="0" tIns="0" rIns="0" bIns="0" rtlCol="0" anchor="ctr"/>
           <a:lstStyle/>
           <a:p>
-            <a:pPr algn="ctr" indent="0" marL="0">
+            <a:pPr marL="0" indent="0" algn="ctr">
               <a:buNone/>
             </a:pPr>
             <a:r>
@@ -13394,7 +13699,7 @@
           <a:bodyPr wrap="square" lIns="0" tIns="0" rIns="0" bIns="0" rtlCol="0" anchor="ctr"/>
           <a:lstStyle/>
           <a:p>
-            <a:pPr indent="0" marL="0">
+            <a:pPr marL="0" indent="0">
               <a:buNone/>
             </a:pPr>
             <a:r>
@@ -13433,7 +13738,7 @@
           <a:bodyPr wrap="square" lIns="0" tIns="0" rIns="0" bIns="0" rtlCol="0" anchor="t"/>
           <a:lstStyle/>
           <a:p>
-            <a:pPr indent="0" marL="0">
+            <a:pPr marL="0" indent="0">
               <a:buNone/>
             </a:pPr>
             <a:r>
@@ -13475,13 +13780,20 @@
             <a:prstDash val="solid"/>
           </a:ln>
           <a:effectLst>
-            <a:outerShdw sx="100000" sy="100000" kx="0" ky="0" algn="bl" rotWithShape="0" blurRad="101600" dist="38100" dir="8100000">
+            <a:outerShdw blurRad="101600" dist="38100" dir="8100000" algn="bl" rotWithShape="0">
               <a:srgbClr val="1F3864">
                 <a:alpha val="16000"/>
               </a:srgbClr>
             </a:outerShdw>
           </a:effectLst>
         </p:spPr>
+        <p:txBody>
+          <a:bodyPr/>
+          <a:lstStyle/>
+          <a:p>
+            <a:endParaRPr lang="pt-BR"/>
+          </a:p>
+        </p:txBody>
       </p:sp>
       <p:sp>
         <p:nvSpPr>
@@ -13502,6 +13814,13 @@
           </a:solidFill>
           <a:ln/>
         </p:spPr>
+        <p:txBody>
+          <a:bodyPr/>
+          <a:lstStyle/>
+          <a:p>
+            <a:endParaRPr lang="pt-BR"/>
+          </a:p>
+        </p:txBody>
       </p:sp>
       <p:sp>
         <p:nvSpPr>
@@ -13524,7 +13843,7 @@
           <a:bodyPr wrap="square" lIns="0" tIns="0" rIns="0" bIns="0" rtlCol="0" anchor="ctr"/>
           <a:lstStyle/>
           <a:p>
-            <a:pPr algn="ctr" indent="0" marL="0">
+            <a:pPr marL="0" indent="0" algn="ctr">
               <a:buNone/>
             </a:pPr>
             <a:r>
@@ -13563,7 +13882,7 @@
           <a:bodyPr wrap="square" lIns="0" tIns="0" rIns="0" bIns="0" rtlCol="0" anchor="ctr"/>
           <a:lstStyle/>
           <a:p>
-            <a:pPr indent="0" marL="0">
+            <a:pPr marL="0" indent="0">
               <a:buNone/>
             </a:pPr>
             <a:r>
@@ -13602,7 +13921,7 @@
           <a:bodyPr wrap="square" lIns="0" tIns="0" rIns="0" bIns="0" rtlCol="0" anchor="t"/>
           <a:lstStyle/>
           <a:p>
-            <a:pPr indent="0" marL="0">
+            <a:pPr marL="0" indent="0">
               <a:buNone/>
             </a:pPr>
             <a:r>
@@ -13644,13 +13963,20 @@
             <a:prstDash val="solid"/>
           </a:ln>
           <a:effectLst>
-            <a:outerShdw sx="100000" sy="100000" kx="0" ky="0" algn="bl" rotWithShape="0" blurRad="101600" dist="38100" dir="8100000">
+            <a:outerShdw blurRad="101600" dist="38100" dir="8100000" algn="bl" rotWithShape="0">
               <a:srgbClr val="1F3864">
                 <a:alpha val="16000"/>
               </a:srgbClr>
             </a:outerShdw>
           </a:effectLst>
         </p:spPr>
+        <p:txBody>
+          <a:bodyPr/>
+          <a:lstStyle/>
+          <a:p>
+            <a:endParaRPr lang="pt-BR"/>
+          </a:p>
+        </p:txBody>
       </p:sp>
       <p:sp>
         <p:nvSpPr>
@@ -13671,6 +13997,13 @@
           </a:solidFill>
           <a:ln/>
         </p:spPr>
+        <p:txBody>
+          <a:bodyPr/>
+          <a:lstStyle/>
+          <a:p>
+            <a:endParaRPr lang="pt-BR"/>
+          </a:p>
+        </p:txBody>
       </p:sp>
       <p:sp>
         <p:nvSpPr>
@@ -13693,7 +14026,7 @@
           <a:bodyPr wrap="square" lIns="0" tIns="0" rIns="0" bIns="0" rtlCol="0" anchor="ctr"/>
           <a:lstStyle/>
           <a:p>
-            <a:pPr algn="ctr" indent="0" marL="0">
+            <a:pPr marL="0" indent="0" algn="ctr">
               <a:buNone/>
             </a:pPr>
             <a:r>
@@ -13732,7 +14065,7 @@
           <a:bodyPr wrap="square" lIns="0" tIns="0" rIns="0" bIns="0" rtlCol="0" anchor="ctr"/>
           <a:lstStyle/>
           <a:p>
-            <a:pPr indent="0" marL="0">
+            <a:pPr marL="0" indent="0">
               <a:buNone/>
             </a:pPr>
             <a:r>
@@ -13771,7 +14104,7 @@
           <a:bodyPr wrap="square" lIns="0" tIns="0" rIns="0" bIns="0" rtlCol="0" anchor="t"/>
           <a:lstStyle/>
           <a:p>
-            <a:pPr indent="0" marL="0">
+            <a:pPr marL="0" indent="0">
               <a:buNone/>
             </a:pPr>
             <a:r>
@@ -13810,7 +14143,7 @@
           <a:bodyPr wrap="square" lIns="0" tIns="0" rIns="0" bIns="0" rtlCol="0" anchor="ctr"/>
           <a:lstStyle/>
           <a:p>
-            <a:pPr indent="0" marL="0">
+            <a:pPr marL="0" indent="0">
               <a:buNone/>
             </a:pPr>
             <a:r>
@@ -13849,7 +14182,7 @@
           <a:bodyPr wrap="square" lIns="0" tIns="0" rIns="0" bIns="0" rtlCol="0" anchor="ctr"/>
           <a:lstStyle/>
           <a:p>
-            <a:pPr algn="r" indent="0" marL="0">
+            <a:pPr marL="0" indent="0" algn="r">
               <a:buNone/>
             </a:pPr>
             <a:r>
@@ -13883,6 +14216,7 @@
         <a:solidFill>
           <a:srgbClr val="FFFFFF"/>
         </a:solidFill>
+        <a:effectLst/>
       </p:bgPr>
     </p:bg>
     <p:spTree>
@@ -13920,11 +14254,11 @@
           <a:bodyPr wrap="square" lIns="0" tIns="0" rIns="0" bIns="0" rtlCol="0" anchor="ctr"/>
           <a:lstStyle/>
           <a:p>
-            <a:pPr indent="0" marL="0">
-              <a:buNone/>
-            </a:pPr>
-            <a:r>
-              <a:rPr lang="en-US" sz="1250" b="1" spc="200" kern="0" dirty="0">
+            <a:pPr marL="0" indent="0">
+              <a:buNone/>
+            </a:pPr>
+            <a:r>
+              <a:rPr lang="en-US" sz="1250" b="1" kern="0" spc="200" dirty="0">
                 <a:solidFill>
                   <a:srgbClr val="2E75B6"/>
                 </a:solidFill>
@@ -13959,7 +14293,7 @@
           <a:bodyPr wrap="square" lIns="0" tIns="0" rIns="0" bIns="0" rtlCol="0" anchor="ctr"/>
           <a:lstStyle/>
           <a:p>
-            <a:pPr indent="0" marL="0">
+            <a:pPr marL="0" indent="0">
               <a:buNone/>
             </a:pPr>
             <a:r>
@@ -13996,6 +14330,13 @@
           </a:solidFill>
           <a:ln/>
         </p:spPr>
+        <p:txBody>
+          <a:bodyPr/>
+          <a:lstStyle/>
+          <a:p>
+            <a:endParaRPr lang="pt-BR"/>
+          </a:p>
+        </p:txBody>
       </p:sp>
       <p:sp>
         <p:nvSpPr>
@@ -14018,7 +14359,7 @@
           <a:bodyPr wrap="square" lIns="0" tIns="0" rIns="0" bIns="0" rtlCol="0" anchor="ctr"/>
           <a:lstStyle/>
           <a:p>
-            <a:pPr indent="0" marL="0">
+            <a:pPr marL="0" indent="0">
               <a:buNone/>
             </a:pPr>
             <a:r>
@@ -14057,7 +14398,7 @@
           <a:bodyPr wrap="square" lIns="0" tIns="0" rIns="0" bIns="0" rtlCol="0" anchor="ctr"/>
           <a:lstStyle/>
           <a:p>
-            <a:pPr indent="0" marL="0">
+            <a:pPr marL="0" indent="0">
               <a:buNone/>
             </a:pPr>
             <a:r>
@@ -14094,6 +14435,13 @@
           </a:solidFill>
           <a:ln/>
         </p:spPr>
+        <p:txBody>
+          <a:bodyPr/>
+          <a:lstStyle/>
+          <a:p>
+            <a:endParaRPr lang="pt-BR"/>
+          </a:p>
+        </p:txBody>
       </p:sp>
       <p:sp>
         <p:nvSpPr>
@@ -14116,7 +14464,7 @@
           <a:bodyPr wrap="square" lIns="0" tIns="0" rIns="0" bIns="0" rtlCol="0" anchor="ctr"/>
           <a:lstStyle/>
           <a:p>
-            <a:pPr indent="0" marL="0">
+            <a:pPr marL="0" indent="0">
               <a:buNone/>
             </a:pPr>
             <a:r>
@@ -14155,7 +14503,7 @@
           <a:bodyPr wrap="square" lIns="0" tIns="0" rIns="0" bIns="0" rtlCol="0" anchor="ctr"/>
           <a:lstStyle/>
           <a:p>
-            <a:pPr indent="0" marL="0">
+            <a:pPr marL="0" indent="0">
               <a:buNone/>
             </a:pPr>
             <a:r>
@@ -14192,6 +14540,13 @@
           </a:solidFill>
           <a:ln/>
         </p:spPr>
+        <p:txBody>
+          <a:bodyPr/>
+          <a:lstStyle/>
+          <a:p>
+            <a:endParaRPr lang="pt-BR"/>
+          </a:p>
+        </p:txBody>
       </p:sp>
       <p:sp>
         <p:nvSpPr>
@@ -14214,7 +14569,7 @@
           <a:bodyPr wrap="square" lIns="0" tIns="0" rIns="0" bIns="0" rtlCol="0" anchor="ctr"/>
           <a:lstStyle/>
           <a:p>
-            <a:pPr indent="0" marL="0">
+            <a:pPr marL="0" indent="0">
               <a:buNone/>
             </a:pPr>
             <a:r>
@@ -14240,7 +14595,7 @@
         </p:nvSpPr>
         <p:spPr>
           <a:xfrm>
-            <a:off x="4023360" y="3557016"/>
+            <a:off x="4037648" y="3557016"/>
             <a:ext cx="7589520" cy="777240"/>
           </a:xfrm>
           <a:prstGeom prst="rect">
@@ -14253,7 +14608,7 @@
           <a:bodyPr wrap="square" lIns="0" tIns="0" rIns="0" bIns="0" rtlCol="0" anchor="ctr"/>
           <a:lstStyle/>
           <a:p>
-            <a:pPr indent="0" marL="0">
+            <a:pPr marL="0" indent="0">
               <a:buNone/>
             </a:pPr>
             <a:r>
@@ -14290,6 +14645,13 @@
           </a:solidFill>
           <a:ln/>
         </p:spPr>
+        <p:txBody>
+          <a:bodyPr/>
+          <a:lstStyle/>
+          <a:p>
+            <a:endParaRPr lang="pt-BR"/>
+          </a:p>
+        </p:txBody>
       </p:sp>
       <p:sp>
         <p:nvSpPr>
@@ -14312,7 +14674,7 @@
           <a:bodyPr wrap="square" lIns="0" tIns="0" rIns="0" bIns="0" rtlCol="0" anchor="ctr"/>
           <a:lstStyle/>
           <a:p>
-            <a:pPr indent="0" marL="0">
+            <a:pPr marL="0" indent="0">
               <a:buNone/>
             </a:pPr>
             <a:r>
@@ -14351,7 +14713,7 @@
           <a:bodyPr wrap="square" lIns="0" tIns="0" rIns="0" bIns="0" rtlCol="0" anchor="ctr"/>
           <a:lstStyle/>
           <a:p>
-            <a:pPr indent="0" marL="0">
+            <a:pPr marL="0" indent="0">
               <a:buNone/>
             </a:pPr>
             <a:r>
@@ -14388,6 +14750,13 @@
           </a:solidFill>
           <a:ln/>
         </p:spPr>
+        <p:txBody>
+          <a:bodyPr/>
+          <a:lstStyle/>
+          <a:p>
+            <a:endParaRPr lang="pt-BR"/>
+          </a:p>
+        </p:txBody>
       </p:sp>
       <p:sp>
         <p:nvSpPr>
@@ -14410,7 +14779,7 @@
           <a:bodyPr wrap="square" lIns="0" tIns="0" rIns="0" bIns="0" rtlCol="0" anchor="ctr"/>
           <a:lstStyle/>
           <a:p>
-            <a:pPr indent="0" marL="0">
+            <a:pPr marL="0" indent="0">
               <a:buNone/>
             </a:pPr>
             <a:r>
@@ -14449,7 +14818,7 @@
           <a:bodyPr wrap="square" lIns="0" tIns="0" rIns="0" bIns="0" rtlCol="0" anchor="ctr"/>
           <a:lstStyle/>
           <a:p>
-            <a:pPr indent="0" marL="0">
+            <a:pPr marL="0" indent="0">
               <a:buNone/>
             </a:pPr>
             <a:r>
@@ -14488,7 +14857,7 @@
           <a:bodyPr wrap="square" lIns="0" tIns="0" rIns="0" bIns="0" rtlCol="0" anchor="ctr"/>
           <a:lstStyle/>
           <a:p>
-            <a:pPr indent="0" marL="0">
+            <a:pPr marL="0" indent="0">
               <a:buNone/>
             </a:pPr>
             <a:r>
@@ -14527,7 +14896,7 @@
           <a:bodyPr wrap="square" lIns="0" tIns="0" rIns="0" bIns="0" rtlCol="0" anchor="ctr"/>
           <a:lstStyle/>
           <a:p>
-            <a:pPr algn="r" indent="0" marL="0">
+            <a:pPr marL="0" indent="0" algn="r">
               <a:buNone/>
             </a:pPr>
             <a:r>
@@ -14846,4 +15215,319 @@
     </a:ext>
   </a:extLst>
 </a:theme>
+</file>
+
+<file path=ppt/theme/theme2.xml><?xml version="1.0" encoding="utf-8"?>
+<a:theme xmlns:a="http://schemas.openxmlformats.org/drawingml/2006/main" name="Tema do Office">
+  <a:themeElements>
+    <a:clrScheme name="Office">
+      <a:dk1>
+        <a:sysClr val="windowText" lastClr="000000"/>
+      </a:dk1>
+      <a:lt1>
+        <a:sysClr val="window" lastClr="FFFFFF"/>
+      </a:lt1>
+      <a:dk2>
+        <a:srgbClr val="0E2841"/>
+      </a:dk2>
+      <a:lt2>
+        <a:srgbClr val="E8E8E8"/>
+      </a:lt2>
+      <a:accent1>
+        <a:srgbClr val="156082"/>
+      </a:accent1>
+      <a:accent2>
+        <a:srgbClr val="E97132"/>
+      </a:accent2>
+      <a:accent3>
+        <a:srgbClr val="196B24"/>
+      </a:accent3>
+      <a:accent4>
+        <a:srgbClr val="0F9ED5"/>
+      </a:accent4>
+      <a:accent5>
+        <a:srgbClr val="A02B93"/>
+      </a:accent5>
+      <a:accent6>
+        <a:srgbClr val="4EA72E"/>
+      </a:accent6>
+      <a:hlink>
+        <a:srgbClr val="467886"/>
+      </a:hlink>
+      <a:folHlink>
+        <a:srgbClr val="96607D"/>
+      </a:folHlink>
+    </a:clrScheme>
+    <a:fontScheme name="Office">
+      <a:majorFont>
+        <a:latin typeface="Aptos Display" panose="02110004020202020204"/>
+        <a:ea typeface=""/>
+        <a:cs typeface=""/>
+        <a:font script="Jpan" typeface="游ゴシック Light"/>
+        <a:font script="Hang" typeface="맑은 고딕"/>
+        <a:font script="Hans" typeface="等线 Light"/>
+        <a:font script="Hant" typeface="新細明體"/>
+        <a:font script="Arab" typeface="Times New Roman"/>
+        <a:font script="Hebr" typeface="Times New Roman"/>
+        <a:font script="Thai" typeface="Angsana New"/>
+        <a:font script="Ethi" typeface="Nyala"/>
+        <a:font script="Beng" typeface="Vrinda"/>
+        <a:font script="Gujr" typeface="Shruti"/>
+        <a:font script="Khmr" typeface="MoolBoran"/>
+        <a:font script="Knda" typeface="Tunga"/>
+        <a:font script="Guru" typeface="Raavi"/>
+        <a:font script="Cans" typeface="Euphemia"/>
+        <a:font script="Cher" typeface="Plantagenet Cherokee"/>
+        <a:font script="Yiii" typeface="Microsoft Yi Baiti"/>
+        <a:font script="Tibt" typeface="Microsoft Himalaya"/>
+        <a:font script="Thaa" typeface="MV Boli"/>
+        <a:font script="Deva" typeface="Mangal"/>
+        <a:font script="Telu" typeface="Gautami"/>
+        <a:font script="Taml" typeface="Latha"/>
+        <a:font script="Syrc" typeface="Estrangelo Edessa"/>
+        <a:font script="Orya" typeface="Kalinga"/>
+        <a:font script="Mlym" typeface="Kartika"/>
+        <a:font script="Laoo" typeface="DokChampa"/>
+        <a:font script="Sinh" typeface="Iskoola Pota"/>
+        <a:font script="Mong" typeface="Mongolian Baiti"/>
+        <a:font script="Viet" typeface="Times New Roman"/>
+        <a:font script="Uigh" typeface="Microsoft Uighur"/>
+        <a:font script="Geor" typeface="Sylfaen"/>
+        <a:font script="Armn" typeface="Arial"/>
+        <a:font script="Bugi" typeface="Leelawadee UI"/>
+        <a:font script="Bopo" typeface="Microsoft JhengHei"/>
+        <a:font script="Java" typeface="Javanese Text"/>
+        <a:font script="Lisu" typeface="Segoe UI"/>
+        <a:font script="Mymr" typeface="Myanmar Text"/>
+        <a:font script="Nkoo" typeface="Ebrima"/>
+        <a:font script="Olck" typeface="Nirmala UI"/>
+        <a:font script="Osma" typeface="Ebrima"/>
+        <a:font script="Phag" typeface="Phagspa"/>
+        <a:font script="Syrn" typeface="Estrangelo Edessa"/>
+        <a:font script="Syrj" typeface="Estrangelo Edessa"/>
+        <a:font script="Syre" typeface="Estrangelo Edessa"/>
+        <a:font script="Sora" typeface="Nirmala UI"/>
+        <a:font script="Tale" typeface="Microsoft Tai Le"/>
+        <a:font script="Talu" typeface="Microsoft New Tai Lue"/>
+        <a:font script="Tfng" typeface="Ebrima"/>
+      </a:majorFont>
+      <a:minorFont>
+        <a:latin typeface="Aptos" panose="02110004020202020204"/>
+        <a:ea typeface=""/>
+        <a:cs typeface=""/>
+        <a:font script="Jpan" typeface="游ゴシック"/>
+        <a:font script="Hang" typeface="맑은 고딕"/>
+        <a:font script="Hans" typeface="等线"/>
+        <a:font script="Hant" typeface="新細明體"/>
+        <a:font script="Arab" typeface="Arial"/>
+        <a:font script="Hebr" typeface="Arial"/>
+        <a:font script="Thai" typeface="Cordia New"/>
+        <a:font script="Ethi" typeface="Nyala"/>
+        <a:font script="Beng" typeface="Vrinda"/>
+        <a:font script="Gujr" typeface="Shruti"/>
+        <a:font script="Khmr" typeface="DaunPenh"/>
+        <a:font script="Knda" typeface="Tunga"/>
+        <a:font script="Guru" typeface="Raavi"/>
+        <a:font script="Cans" typeface="Euphemia"/>
+        <a:font script="Cher" typeface="Plantagenet Cherokee"/>
+        <a:font script="Yiii" typeface="Microsoft Yi Baiti"/>
+        <a:font script="Tibt" typeface="Microsoft Himalaya"/>
+        <a:font script="Thaa" typeface="MV Boli"/>
+        <a:font script="Deva" typeface="Mangal"/>
+        <a:font script="Telu" typeface="Gautami"/>
+        <a:font script="Taml" typeface="Latha"/>
+        <a:font script="Syrc" typeface="Estrangelo Edessa"/>
+        <a:font script="Orya" typeface="Kalinga"/>
+        <a:font script="Mlym" typeface="Kartika"/>
+        <a:font script="Laoo" typeface="DokChampa"/>
+        <a:font script="Sinh" typeface="Iskoola Pota"/>
+        <a:font script="Mong" typeface="Mongolian Baiti"/>
+        <a:font script="Viet" typeface="Arial"/>
+        <a:font script="Uigh" typeface="Microsoft Uighur"/>
+        <a:font script="Geor" typeface="Sylfaen"/>
+        <a:font script="Armn" typeface="Arial"/>
+        <a:font script="Bugi" typeface="Leelawadee UI"/>
+        <a:font script="Bopo" typeface="Microsoft JhengHei"/>
+        <a:font script="Java" typeface="Javanese Text"/>
+        <a:font script="Lisu" typeface="Segoe UI"/>
+        <a:font script="Mymr" typeface="Myanmar Text"/>
+        <a:font script="Nkoo" typeface="Ebrima"/>
+        <a:font script="Olck" typeface="Nirmala UI"/>
+        <a:font script="Osma" typeface="Ebrima"/>
+        <a:font script="Phag" typeface="Phagspa"/>
+        <a:font script="Syrn" typeface="Estrangelo Edessa"/>
+        <a:font script="Syrj" typeface="Estrangelo Edessa"/>
+        <a:font script="Syre" typeface="Estrangelo Edessa"/>
+        <a:font script="Sora" typeface="Nirmala UI"/>
+        <a:font script="Tale" typeface="Microsoft Tai Le"/>
+        <a:font script="Talu" typeface="Microsoft New Tai Lue"/>
+        <a:font script="Tfng" typeface="Ebrima"/>
+      </a:minorFont>
+    </a:fontScheme>
+    <a:fmtScheme name="Office">
+      <a:fillStyleLst>
+        <a:solidFill>
+          <a:schemeClr val="phClr"/>
+        </a:solidFill>
+        <a:gradFill rotWithShape="1">
+          <a:gsLst>
+            <a:gs pos="0">
+              <a:schemeClr val="phClr">
+                <a:lumMod val="110000"/>
+                <a:satMod val="105000"/>
+                <a:tint val="67000"/>
+              </a:schemeClr>
+            </a:gs>
+            <a:gs pos="50000">
+              <a:schemeClr val="phClr">
+                <a:lumMod val="105000"/>
+                <a:satMod val="103000"/>
+                <a:tint val="73000"/>
+              </a:schemeClr>
+            </a:gs>
+            <a:gs pos="100000">
+              <a:schemeClr val="phClr">
+                <a:lumMod val="105000"/>
+                <a:satMod val="109000"/>
+                <a:tint val="81000"/>
+              </a:schemeClr>
+            </a:gs>
+          </a:gsLst>
+          <a:lin ang="5400000" scaled="0"/>
+        </a:gradFill>
+        <a:gradFill rotWithShape="1">
+          <a:gsLst>
+            <a:gs pos="0">
+              <a:schemeClr val="phClr">
+                <a:satMod val="103000"/>
+                <a:lumMod val="102000"/>
+                <a:tint val="94000"/>
+              </a:schemeClr>
+            </a:gs>
+            <a:gs pos="50000">
+              <a:schemeClr val="phClr">
+                <a:satMod val="110000"/>
+                <a:lumMod val="100000"/>
+                <a:shade val="100000"/>
+              </a:schemeClr>
+            </a:gs>
+            <a:gs pos="100000">
+              <a:schemeClr val="phClr">
+                <a:lumMod val="99000"/>
+                <a:satMod val="120000"/>
+                <a:shade val="78000"/>
+              </a:schemeClr>
+            </a:gs>
+          </a:gsLst>
+          <a:lin ang="5400000" scaled="0"/>
+        </a:gradFill>
+      </a:fillStyleLst>
+      <a:lnStyleLst>
+        <a:ln w="12700" cap="flat" cmpd="sng" algn="ctr">
+          <a:solidFill>
+            <a:schemeClr val="phClr"/>
+          </a:solidFill>
+          <a:prstDash val="solid"/>
+          <a:miter lim="800000"/>
+        </a:ln>
+        <a:ln w="19050" cap="flat" cmpd="sng" algn="ctr">
+          <a:solidFill>
+            <a:schemeClr val="phClr"/>
+          </a:solidFill>
+          <a:prstDash val="solid"/>
+          <a:miter lim="800000"/>
+        </a:ln>
+        <a:ln w="25400" cap="flat" cmpd="sng" algn="ctr">
+          <a:solidFill>
+            <a:schemeClr val="phClr"/>
+          </a:solidFill>
+          <a:prstDash val="solid"/>
+          <a:miter lim="800000"/>
+        </a:ln>
+      </a:lnStyleLst>
+      <a:effectStyleLst>
+        <a:effectStyle>
+          <a:effectLst/>
+        </a:effectStyle>
+        <a:effectStyle>
+          <a:effectLst/>
+        </a:effectStyle>
+        <a:effectStyle>
+          <a:effectLst>
+            <a:outerShdw blurRad="57150" dist="19050" dir="5400000" algn="ctr" rotWithShape="0">
+              <a:srgbClr val="000000">
+                <a:alpha val="63000"/>
+              </a:srgbClr>
+            </a:outerShdw>
+          </a:effectLst>
+        </a:effectStyle>
+      </a:effectStyleLst>
+      <a:bgFillStyleLst>
+        <a:solidFill>
+          <a:schemeClr val="phClr"/>
+        </a:solidFill>
+        <a:solidFill>
+          <a:schemeClr val="phClr">
+            <a:tint val="95000"/>
+            <a:satMod val="170000"/>
+          </a:schemeClr>
+        </a:solidFill>
+        <a:gradFill rotWithShape="1">
+          <a:gsLst>
+            <a:gs pos="0">
+              <a:schemeClr val="phClr">
+                <a:tint val="93000"/>
+                <a:satMod val="150000"/>
+                <a:shade val="98000"/>
+                <a:lumMod val="102000"/>
+              </a:schemeClr>
+            </a:gs>
+            <a:gs pos="50000">
+              <a:schemeClr val="phClr">
+                <a:tint val="98000"/>
+                <a:satMod val="130000"/>
+                <a:shade val="90000"/>
+                <a:lumMod val="103000"/>
+              </a:schemeClr>
+            </a:gs>
+            <a:gs pos="100000">
+              <a:schemeClr val="phClr">
+                <a:shade val="63000"/>
+                <a:satMod val="120000"/>
+              </a:schemeClr>
+            </a:gs>
+          </a:gsLst>
+          <a:lin ang="5400000" scaled="0"/>
+        </a:gradFill>
+      </a:bgFillStyleLst>
+    </a:fmtScheme>
+  </a:themeElements>
+  <a:objectDefaults>
+    <a:lnDef>
+      <a:spPr/>
+      <a:bodyPr/>
+      <a:lstStyle/>
+      <a:style>
+        <a:lnRef idx="2">
+          <a:schemeClr val="accent1"/>
+        </a:lnRef>
+        <a:fillRef idx="0">
+          <a:schemeClr val="accent1"/>
+        </a:fillRef>
+        <a:effectRef idx="1">
+          <a:schemeClr val="accent1"/>
+        </a:effectRef>
+        <a:fontRef idx="minor">
+          <a:schemeClr val="tx1"/>
+        </a:fontRef>
+      </a:style>
+    </a:lnDef>
+  </a:objectDefaults>
+  <a:extraClrSchemeLst/>
+  <a:extLst>
+    <a:ext uri="{05A4C25C-085E-4340-85A3-A5531E510DB2}">
+      <thm15:themeFamily xmlns:thm15="http://schemas.microsoft.com/office/thememl/2012/main" name="Office Theme" id="{2E142A2C-CD16-42D6-873A-C26D2A0506FA}" vid="{1BDDFF52-6CD6-40A5-AB3C-68EB2F1E4D0A}"/>
+    </a:ext>
+  </a:extLst>
+</a:theme>
 </file>